--- a/PPTs/Ch9_64_bit_data_processing.pptx
+++ b/PPTs/Ch9_64_bit_data_processing.pptx
@@ -5,21 +5,28 @@
     <p:sldMasterId id="2147483660" r:id="rId1"/>
   </p:sldMasterIdLst>
   <p:notesMasterIdLst>
-    <p:notesMasterId r:id="rId9"/>
+    <p:notesMasterId r:id="rId16"/>
   </p:notesMasterIdLst>
   <p:handoutMasterIdLst>
-    <p:handoutMasterId r:id="rId10"/>
+    <p:handoutMasterId r:id="rId17"/>
   </p:handoutMasterIdLst>
   <p:sldIdLst>
-    <p:sldId id="256" r:id="rId2"/>
+    <p:sldId id="269" r:id="rId2"/>
     <p:sldId id="257" r:id="rId3"/>
     <p:sldId id="258" r:id="rId4"/>
     <p:sldId id="259" r:id="rId5"/>
-    <p:sldId id="266" r:id="rId6"/>
-    <p:sldId id="260" r:id="rId7"/>
-    <p:sldId id="263" r:id="rId8"/>
+    <p:sldId id="270" r:id="rId6"/>
+    <p:sldId id="271" r:id="rId7"/>
+    <p:sldId id="261" r:id="rId8"/>
+    <p:sldId id="264" r:id="rId9"/>
+    <p:sldId id="266" r:id="rId10"/>
+    <p:sldId id="268" r:id="rId11"/>
+    <p:sldId id="262" r:id="rId12"/>
+    <p:sldId id="265" r:id="rId13"/>
+    <p:sldId id="267" r:id="rId14"/>
+    <p:sldId id="272" r:id="rId15"/>
   </p:sldIdLst>
-  <p:sldSz cx="9144000" cy="6858000" type="screen4x3"/>
+  <p:sldSz cx="12192000" cy="6858000"/>
   <p:notesSz cx="6858000" cy="9144000"/>
   <p:defaultTextStyle>
     <a:defPPr>
@@ -119,12 +126,12 @@
   <p:extLst>
     <p:ext uri="{EFAFB233-063F-42B5-8137-9DF3F51BA10A}">
       <p15:sldGuideLst xmlns:p15="http://schemas.microsoft.com/office/powerpoint/2012/main">
-        <p15:guide id="1" orient="horz" pos="2160">
+        <p15:guide id="1" orient="horz" pos="2160" userDrawn="1">
           <p15:clr>
             <a:srgbClr val="A4A3A4"/>
           </p15:clr>
         </p15:guide>
-        <p15:guide id="2" pos="2880">
+        <p15:guide id="2" pos="3840" userDrawn="1">
           <p15:clr>
             <a:srgbClr val="A4A3A4"/>
           </p15:clr>
@@ -138,7 +145,7 @@
 <file path=ppt/revisionInfo.xml><?xml version="1.0" encoding="utf-8"?>
 <p1510:revInfo xmlns:a="http://schemas.openxmlformats.org/drawingml/2006/main" xmlns:r="http://schemas.openxmlformats.org/officeDocument/2006/relationships" xmlns:p1510="http://schemas.microsoft.com/office/powerpoint/2015/10/main">
   <p1510:revLst>
-    <p1510:client id="{14401473-1F58-4B5B-BC7A-1612AC53A1D6}" v="28" dt="2025-09-21T23:10:35.326"/>
+    <p1510:client id="{BF3FB78D-86D8-43C7-A58D-9A35E0023D37}" v="8" dt="2025-10-05T20:43:05.784"/>
   </p1510:revLst>
 </p1510:revInfo>
 </file>
@@ -147,191 +154,184 @@
 <pc:chgInfo xmlns:a="http://schemas.openxmlformats.org/drawingml/2006/main" xmlns:r="http://schemas.openxmlformats.org/officeDocument/2006/relationships" xmlns:ac="http://schemas.microsoft.com/office/drawing/2013/main/command" xmlns:pc="http://schemas.microsoft.com/office/powerpoint/2013/main/command">
   <pc:docChgLst>
     <pc:chgData name="Zonghua Gu" userId="9a7e1853e1951ef5" providerId="LiveId" clId="{CF1FAA12-072C-4ED5-BA76-0FFFAEFDB88A}"/>
-    <pc:docChg chg="undo custSel addSld delSld modSld">
-      <pc:chgData name="Zonghua Gu" userId="9a7e1853e1951ef5" providerId="LiveId" clId="{CF1FAA12-072C-4ED5-BA76-0FFFAEFDB88A}" dt="2025-09-21T23:10:38.893" v="347" actId="20577"/>
+    <pc:docChg chg="custSel addSld delSld modSld">
+      <pc:chgData name="Zonghua Gu" userId="9a7e1853e1951ef5" providerId="LiveId" clId="{CF1FAA12-072C-4ED5-BA76-0FFFAEFDB88A}" dt="2025-10-05T20:43:51.203" v="22" actId="208"/>
       <pc:docMkLst>
         <pc:docMk/>
       </pc:docMkLst>
-      <pc:sldChg chg="modSp mod">
-        <pc:chgData name="Zonghua Gu" userId="9a7e1853e1951ef5" providerId="LiveId" clId="{CF1FAA12-072C-4ED5-BA76-0FFFAEFDB88A}" dt="2025-09-21T22:16:46.051" v="21" actId="20577"/>
+      <pc:sldChg chg="addSp delSp modSp del mod">
+        <pc:chgData name="Zonghua Gu" userId="9a7e1853e1951ef5" providerId="LiveId" clId="{CF1FAA12-072C-4ED5-BA76-0FFFAEFDB88A}" dt="2025-10-05T20:39:45.511" v="2" actId="47"/>
         <pc:sldMkLst>
           <pc:docMk/>
           <pc:sldMk cId="1683281344" sldId="256"/>
         </pc:sldMkLst>
-        <pc:spChg chg="mod">
-          <ac:chgData name="Zonghua Gu" userId="9a7e1853e1951ef5" providerId="LiveId" clId="{CF1FAA12-072C-4ED5-BA76-0FFFAEFDB88A}" dt="2025-09-21T22:16:38.952" v="12" actId="20577"/>
+        <pc:spChg chg="del">
+          <ac:chgData name="Zonghua Gu" userId="9a7e1853e1951ef5" providerId="LiveId" clId="{CF1FAA12-072C-4ED5-BA76-0FFFAEFDB88A}" dt="2025-10-05T20:39:37.818" v="0" actId="478"/>
           <ac:spMkLst>
             <pc:docMk/>
             <pc:sldMk cId="1683281344" sldId="256"/>
             <ac:spMk id="2" creationId="{00000000-0000-0000-0000-000000000000}"/>
           </ac:spMkLst>
         </pc:spChg>
-        <pc:spChg chg="mod">
-          <ac:chgData name="Zonghua Gu" userId="9a7e1853e1951ef5" providerId="LiveId" clId="{CF1FAA12-072C-4ED5-BA76-0FFFAEFDB88A}" dt="2025-09-21T22:16:46.051" v="21" actId="20577"/>
+        <pc:spChg chg="del">
+          <ac:chgData name="Zonghua Gu" userId="9a7e1853e1951ef5" providerId="LiveId" clId="{CF1FAA12-072C-4ED5-BA76-0FFFAEFDB88A}" dt="2025-10-05T20:39:37.818" v="0" actId="478"/>
           <ac:spMkLst>
             <pc:docMk/>
             <pc:sldMk cId="1683281344" sldId="256"/>
             <ac:spMk id="3" creationId="{00000000-0000-0000-0000-000000000000}"/>
           </ac:spMkLst>
         </pc:spChg>
+        <pc:spChg chg="del">
+          <ac:chgData name="Zonghua Gu" userId="9a7e1853e1951ef5" providerId="LiveId" clId="{CF1FAA12-072C-4ED5-BA76-0FFFAEFDB88A}" dt="2025-10-05T20:39:37.818" v="0" actId="478"/>
+          <ac:spMkLst>
+            <pc:docMk/>
+            <pc:sldMk cId="1683281344" sldId="256"/>
+            <ac:spMk id="6" creationId="{00000000-0000-0000-0000-000000000000}"/>
+          </ac:spMkLst>
+        </pc:spChg>
+        <pc:spChg chg="add mod">
+          <ac:chgData name="Zonghua Gu" userId="9a7e1853e1951ef5" providerId="LiveId" clId="{CF1FAA12-072C-4ED5-BA76-0FFFAEFDB88A}" dt="2025-10-05T20:39:37.818" v="0" actId="478"/>
+          <ac:spMkLst>
+            <pc:docMk/>
+            <pc:sldMk cId="1683281344" sldId="256"/>
+            <ac:spMk id="8" creationId="{94C8CF98-66DC-FBB5-D844-D3A4121BE169}"/>
+          </ac:spMkLst>
+        </pc:spChg>
+        <pc:spChg chg="add mod">
+          <ac:chgData name="Zonghua Gu" userId="9a7e1853e1951ef5" providerId="LiveId" clId="{CF1FAA12-072C-4ED5-BA76-0FFFAEFDB88A}" dt="2025-10-05T20:39:37.818" v="0" actId="478"/>
+          <ac:spMkLst>
+            <pc:docMk/>
+            <pc:sldMk cId="1683281344" sldId="256"/>
+            <ac:spMk id="10" creationId="{3228A856-3CB1-A397-6598-E3214C6B8E4F}"/>
+          </ac:spMkLst>
+        </pc:spChg>
       </pc:sldChg>
       <pc:sldChg chg="addSp modSp mod">
-        <pc:chgData name="Zonghua Gu" userId="9a7e1853e1951ef5" providerId="LiveId" clId="{CF1FAA12-072C-4ED5-BA76-0FFFAEFDB88A}" dt="2025-09-21T22:30:52.824" v="41" actId="1036"/>
+        <pc:chgData name="Zonghua Gu" userId="9a7e1853e1951ef5" providerId="LiveId" clId="{CF1FAA12-072C-4ED5-BA76-0FFFAEFDB88A}" dt="2025-10-05T20:43:41.988" v="20" actId="208"/>
         <pc:sldMkLst>
           <pc:docMk/>
           <pc:sldMk cId="447900016" sldId="257"/>
         </pc:sldMkLst>
         <pc:spChg chg="add mod">
-          <ac:chgData name="Zonghua Gu" userId="9a7e1853e1951ef5" providerId="LiveId" clId="{CF1FAA12-072C-4ED5-BA76-0FFFAEFDB88A}" dt="2025-09-21T22:30:52.824" v="41" actId="1036"/>
+          <ac:chgData name="Zonghua Gu" userId="9a7e1853e1951ef5" providerId="LiveId" clId="{CF1FAA12-072C-4ED5-BA76-0FFFAEFDB88A}" dt="2025-10-05T20:43:41.988" v="20" actId="208"/>
           <ac:spMkLst>
             <pc:docMk/>
             <pc:sldMk cId="447900016" sldId="257"/>
-            <ac:spMk id="5" creationId="{4C338993-D673-4ACD-ED3E-E45B166F117A}"/>
+            <ac:spMk id="5" creationId="{BC970528-BC53-C0A5-D452-682668CDC489}"/>
           </ac:spMkLst>
         </pc:spChg>
       </pc:sldChg>
       <pc:sldChg chg="addSp modSp mod">
-        <pc:chgData name="Zonghua Gu" userId="9a7e1853e1951ef5" providerId="LiveId" clId="{CF1FAA12-072C-4ED5-BA76-0FFFAEFDB88A}" dt="2025-09-21T22:31:27.274" v="62" actId="20577"/>
+        <pc:chgData name="Zonghua Gu" userId="9a7e1853e1951ef5" providerId="LiveId" clId="{CF1FAA12-072C-4ED5-BA76-0FFFAEFDB88A}" dt="2025-10-05T20:43:45.475" v="21" actId="208"/>
         <pc:sldMkLst>
           <pc:docMk/>
           <pc:sldMk cId="232496035" sldId="258"/>
         </pc:sldMkLst>
         <pc:spChg chg="add mod">
-          <ac:chgData name="Zonghua Gu" userId="9a7e1853e1951ef5" providerId="LiveId" clId="{CF1FAA12-072C-4ED5-BA76-0FFFAEFDB88A}" dt="2025-09-21T22:31:27.274" v="62" actId="20577"/>
+          <ac:chgData name="Zonghua Gu" userId="9a7e1853e1951ef5" providerId="LiveId" clId="{CF1FAA12-072C-4ED5-BA76-0FFFAEFDB88A}" dt="2025-10-05T20:43:45.475" v="21" actId="208"/>
           <ac:spMkLst>
             <pc:docMk/>
             <pc:sldMk cId="232496035" sldId="258"/>
-            <ac:spMk id="5" creationId="{76C6BEE5-193A-C8E4-CFA2-E80816E735C0}"/>
+            <ac:spMk id="5" creationId="{63FACEAE-2AD7-ACCE-CECA-DC82E80DF8FF}"/>
           </ac:spMkLst>
         </pc:spChg>
       </pc:sldChg>
-      <pc:sldChg chg="modSp mod">
-        <pc:chgData name="Zonghua Gu" userId="9a7e1853e1951ef5" providerId="LiveId" clId="{CF1FAA12-072C-4ED5-BA76-0FFFAEFDB88A}" dt="2025-09-21T22:40:32.460" v="176" actId="20577"/>
-        <pc:sldMkLst>
-          <pc:docMk/>
-          <pc:sldMk cId="4037105009" sldId="259"/>
-        </pc:sldMkLst>
-        <pc:spChg chg="mod">
-          <ac:chgData name="Zonghua Gu" userId="9a7e1853e1951ef5" providerId="LiveId" clId="{CF1FAA12-072C-4ED5-BA76-0FFFAEFDB88A}" dt="2025-09-21T22:40:32.460" v="176" actId="20577"/>
-          <ac:spMkLst>
-            <pc:docMk/>
-            <pc:sldMk cId="4037105009" sldId="259"/>
-            <ac:spMk id="4" creationId="{00000000-0000-0000-0000-000000000000}"/>
-          </ac:spMkLst>
-        </pc:spChg>
-      </pc:sldChg>
-      <pc:sldChg chg="addSp modSp mod modNotes modNotesTx">
-        <pc:chgData name="Zonghua Gu" userId="9a7e1853e1951ef5" providerId="LiveId" clId="{CF1FAA12-072C-4ED5-BA76-0FFFAEFDB88A}" dt="2025-09-21T22:57:33.675" v="264" actId="20577"/>
+      <pc:sldChg chg="del">
+        <pc:chgData name="Zonghua Gu" userId="9a7e1853e1951ef5" providerId="LiveId" clId="{CF1FAA12-072C-4ED5-BA76-0FFFAEFDB88A}" dt="2025-10-05T20:41:54.666" v="13" actId="47"/>
         <pc:sldMkLst>
           <pc:docMk/>
           <pc:sldMk cId="1355074441" sldId="260"/>
         </pc:sldMkLst>
+      </pc:sldChg>
+      <pc:sldChg chg="del">
+        <pc:chgData name="Zonghua Gu" userId="9a7e1853e1951ef5" providerId="LiveId" clId="{CF1FAA12-072C-4ED5-BA76-0FFFAEFDB88A}" dt="2025-10-05T20:43:15.281" v="17" actId="47"/>
+        <pc:sldMkLst>
+          <pc:docMk/>
+          <pc:sldMk cId="3638645966" sldId="263"/>
+        </pc:sldMkLst>
+      </pc:sldChg>
+      <pc:sldChg chg="modSp add mod">
+        <pc:chgData name="Zonghua Gu" userId="9a7e1853e1951ef5" providerId="LiveId" clId="{CF1FAA12-072C-4ED5-BA76-0FFFAEFDB88A}" dt="2025-10-05T20:39:54.366" v="3" actId="1076"/>
+        <pc:sldMkLst>
+          <pc:docMk/>
+          <pc:sldMk cId="839383286" sldId="269"/>
+        </pc:sldMkLst>
         <pc:spChg chg="mod">
-          <ac:chgData name="Zonghua Gu" userId="9a7e1853e1951ef5" providerId="LiveId" clId="{CF1FAA12-072C-4ED5-BA76-0FFFAEFDB88A}" dt="2025-09-21T22:45:41.341" v="198" actId="20577"/>
+          <ac:chgData name="Zonghua Gu" userId="9a7e1853e1951ef5" providerId="LiveId" clId="{CF1FAA12-072C-4ED5-BA76-0FFFAEFDB88A}" dt="2025-10-05T20:39:54.366" v="3" actId="1076"/>
           <ac:spMkLst>
             <pc:docMk/>
-            <pc:sldMk cId="1355074441" sldId="260"/>
-            <ac:spMk id="4" creationId="{00000000-0000-0000-0000-000000000000}"/>
+            <pc:sldMk cId="839383286" sldId="269"/>
+            <ac:spMk id="5" creationId="{00000000-0000-0000-0000-000000000000}"/>
           </ac:spMkLst>
         </pc:spChg>
-        <pc:spChg chg="add mod">
-          <ac:chgData name="Zonghua Gu" userId="9a7e1853e1951ef5" providerId="LiveId" clId="{CF1FAA12-072C-4ED5-BA76-0FFFAEFDB88A}" dt="2025-09-21T22:57:33.675" v="264" actId="20577"/>
+        <pc:spChg chg="mod">
+          <ac:chgData name="Zonghua Gu" userId="9a7e1853e1951ef5" providerId="LiveId" clId="{CF1FAA12-072C-4ED5-BA76-0FFFAEFDB88A}" dt="2025-10-05T20:39:54.366" v="3" actId="1076"/>
           <ac:spMkLst>
             <pc:docMk/>
-            <pc:sldMk cId="1355074441" sldId="260"/>
+            <pc:sldMk cId="839383286" sldId="269"/>
+            <ac:spMk id="6" creationId="{00000000-0000-0000-0000-000000000000}"/>
+          </ac:spMkLst>
+        </pc:spChg>
+      </pc:sldChg>
+      <pc:sldChg chg="modSp add mod">
+        <pc:chgData name="Zonghua Gu" userId="9a7e1853e1951ef5" providerId="LiveId" clId="{CF1FAA12-072C-4ED5-BA76-0FFFAEFDB88A}" dt="2025-10-05T20:41:16.034" v="11" actId="27636"/>
+        <pc:sldMkLst>
+          <pc:docMk/>
+          <pc:sldMk cId="3446674091" sldId="270"/>
+        </pc:sldMkLst>
+        <pc:spChg chg="mod">
+          <ac:chgData name="Zonghua Gu" userId="9a7e1853e1951ef5" providerId="LiveId" clId="{CF1FAA12-072C-4ED5-BA76-0FFFAEFDB88A}" dt="2025-10-05T20:41:16.034" v="11" actId="27636"/>
+          <ac:spMkLst>
+            <pc:docMk/>
+            <pc:sldMk cId="3446674091" sldId="270"/>
+            <ac:spMk id="2" creationId="{38FF185C-1F57-A7D0-C373-932269F2E81F}"/>
+          </ac:spMkLst>
+        </pc:spChg>
+        <pc:spChg chg="mod">
+          <ac:chgData name="Zonghua Gu" userId="9a7e1853e1951ef5" providerId="LiveId" clId="{CF1FAA12-072C-4ED5-BA76-0FFFAEFDB88A}" dt="2025-10-05T20:41:16.030" v="10" actId="27636"/>
+          <ac:spMkLst>
+            <pc:docMk/>
+            <pc:sldMk cId="3446674091" sldId="270"/>
+            <ac:spMk id="4" creationId="{9FF2DBCF-749D-BC85-1FB3-2369244197E6}"/>
+          </ac:spMkLst>
+        </pc:spChg>
+      </pc:sldChg>
+      <pc:sldChg chg="modSp add mod">
+        <pc:chgData name="Zonghua Gu" userId="9a7e1853e1951ef5" providerId="LiveId" clId="{CF1FAA12-072C-4ED5-BA76-0FFFAEFDB88A}" dt="2025-10-05T20:43:51.203" v="22" actId="208"/>
+        <pc:sldMkLst>
+          <pc:docMk/>
+          <pc:sldMk cId="1257666469" sldId="271"/>
+        </pc:sldMkLst>
+        <pc:spChg chg="mod">
+          <ac:chgData name="Zonghua Gu" userId="9a7e1853e1951ef5" providerId="LiveId" clId="{CF1FAA12-072C-4ED5-BA76-0FFFAEFDB88A}" dt="2025-10-05T20:43:51.203" v="22" actId="208"/>
+          <ac:spMkLst>
+            <pc:docMk/>
+            <pc:sldMk cId="1257666469" sldId="271"/>
             <ac:spMk id="5" creationId="{2F0F3C14-4D54-0031-95AB-451FB9954532}"/>
           </ac:spMkLst>
         </pc:spChg>
       </pc:sldChg>
-      <pc:sldChg chg="del">
-        <pc:chgData name="Zonghua Gu" userId="9a7e1853e1951ef5" providerId="LiveId" clId="{CF1FAA12-072C-4ED5-BA76-0FFFAEFDB88A}" dt="2025-09-21T23:03:04.184" v="270" actId="2696"/>
+      <pc:sldChg chg="modSp add mod">
+        <pc:chgData name="Zonghua Gu" userId="9a7e1853e1951ef5" providerId="LiveId" clId="{CF1FAA12-072C-4ED5-BA76-0FFFAEFDB88A}" dt="2025-10-05T20:43:26.432" v="19" actId="208"/>
         <pc:sldMkLst>
           <pc:docMk/>
-          <pc:sldMk cId="2714306100" sldId="261"/>
-        </pc:sldMkLst>
-      </pc:sldChg>
-      <pc:sldChg chg="del">
-        <pc:chgData name="Zonghua Gu" userId="9a7e1853e1951ef5" providerId="LiveId" clId="{CF1FAA12-072C-4ED5-BA76-0FFFAEFDB88A}" dt="2025-09-21T23:03:04.184" v="270" actId="2696"/>
-        <pc:sldMkLst>
-          <pc:docMk/>
-          <pc:sldMk cId="99910597" sldId="262"/>
-        </pc:sldMkLst>
-      </pc:sldChg>
-      <pc:sldChg chg="addSp modSp mod">
-        <pc:chgData name="Zonghua Gu" userId="9a7e1853e1951ef5" providerId="LiveId" clId="{CF1FAA12-072C-4ED5-BA76-0FFFAEFDB88A}" dt="2025-09-21T23:10:38.893" v="347" actId="20577"/>
-        <pc:sldMkLst>
-          <pc:docMk/>
-          <pc:sldMk cId="3638645966" sldId="263"/>
+          <pc:sldMk cId="226668900" sldId="272"/>
         </pc:sldMkLst>
         <pc:spChg chg="mod">
-          <ac:chgData name="Zonghua Gu" userId="9a7e1853e1951ef5" providerId="LiveId" clId="{CF1FAA12-072C-4ED5-BA76-0FFFAEFDB88A}" dt="2025-09-21T23:04:24.695" v="281" actId="14100"/>
+          <ac:chgData name="Zonghua Gu" userId="9a7e1853e1951ef5" providerId="LiveId" clId="{CF1FAA12-072C-4ED5-BA76-0FFFAEFDB88A}" dt="2025-10-05T20:43:26.432" v="19" actId="208"/>
           <ac:spMkLst>
             <pc:docMk/>
-            <pc:sldMk cId="3638645966" sldId="263"/>
-            <ac:spMk id="4" creationId="{00000000-0000-0000-0000-000000000000}"/>
-          </ac:spMkLst>
-        </pc:spChg>
-        <pc:spChg chg="add mod">
-          <ac:chgData name="Zonghua Gu" userId="9a7e1853e1951ef5" providerId="LiveId" clId="{CF1FAA12-072C-4ED5-BA76-0FFFAEFDB88A}" dt="2025-09-21T23:10:38.893" v="347" actId="20577"/>
-          <ac:spMkLst>
-            <pc:docMk/>
-            <pc:sldMk cId="3638645966" sldId="263"/>
+            <pc:sldMk cId="226668900" sldId="272"/>
             <ac:spMk id="5" creationId="{0D45E53C-60AD-25C3-58B1-487C352241E8}"/>
           </ac:spMkLst>
         </pc:spChg>
       </pc:sldChg>
-      <pc:sldChg chg="modSp del mod">
-        <pc:chgData name="Zonghua Gu" userId="9a7e1853e1951ef5" providerId="LiveId" clId="{CF1FAA12-072C-4ED5-BA76-0FFFAEFDB88A}" dt="2025-09-21T23:03:04.184" v="270" actId="2696"/>
+      <pc:sldChg chg="add del">
+        <pc:chgData name="Zonghua Gu" userId="9a7e1853e1951ef5" providerId="LiveId" clId="{CF1FAA12-072C-4ED5-BA76-0FFFAEFDB88A}" dt="2025-10-05T20:43:04.846" v="15"/>
         <pc:sldMkLst>
           <pc:docMk/>
-          <pc:sldMk cId="1508398580" sldId="264"/>
+          <pc:sldMk cId="1863276422" sldId="272"/>
         </pc:sldMkLst>
-        <pc:spChg chg="mod">
-          <ac:chgData name="Zonghua Gu" userId="9a7e1853e1951ef5" providerId="LiveId" clId="{CF1FAA12-072C-4ED5-BA76-0FFFAEFDB88A}" dt="2025-09-21T22:58:12.336" v="268"/>
-          <ac:spMkLst>
-            <pc:docMk/>
-            <pc:sldMk cId="1508398580" sldId="264"/>
-            <ac:spMk id="2" creationId="{00000000-0000-0000-0000-000000000000}"/>
-          </ac:spMkLst>
-        </pc:spChg>
-        <pc:picChg chg="mod">
-          <ac:chgData name="Zonghua Gu" userId="9a7e1853e1951ef5" providerId="LiveId" clId="{CF1FAA12-072C-4ED5-BA76-0FFFAEFDB88A}" dt="2025-09-21T23:02:23.275" v="269" actId="1076"/>
-          <ac:picMkLst>
-            <pc:docMk/>
-            <pc:sldMk cId="1508398580" sldId="264"/>
-            <ac:picMk id="6" creationId="{00000000-0000-0000-0000-000000000000}"/>
-          </ac:picMkLst>
-        </pc:picChg>
-      </pc:sldChg>
-      <pc:sldChg chg="del">
-        <pc:chgData name="Zonghua Gu" userId="9a7e1853e1951ef5" providerId="LiveId" clId="{CF1FAA12-072C-4ED5-BA76-0FFFAEFDB88A}" dt="2025-09-21T23:03:04.184" v="270" actId="2696"/>
-        <pc:sldMkLst>
-          <pc:docMk/>
-          <pc:sldMk cId="712390701" sldId="265"/>
-        </pc:sldMkLst>
-      </pc:sldChg>
-      <pc:sldChg chg="modSp new mod">
-        <pc:chgData name="Zonghua Gu" userId="9a7e1853e1951ef5" providerId="LiveId" clId="{CF1FAA12-072C-4ED5-BA76-0FFFAEFDB88A}" dt="2025-09-21T22:39:50.169" v="174" actId="27636"/>
-        <pc:sldMkLst>
-          <pc:docMk/>
-          <pc:sldMk cId="3446674091" sldId="266"/>
-        </pc:sldMkLst>
-        <pc:spChg chg="mod">
-          <ac:chgData name="Zonghua Gu" userId="9a7e1853e1951ef5" providerId="LiveId" clId="{CF1FAA12-072C-4ED5-BA76-0FFFAEFDB88A}" dt="2025-09-21T22:34:51.501" v="88" actId="20577"/>
-          <ac:spMkLst>
-            <pc:docMk/>
-            <pc:sldMk cId="3446674091" sldId="266"/>
-            <ac:spMk id="2" creationId="{38FF185C-1F57-A7D0-C373-932269F2E81F}"/>
-          </ac:spMkLst>
-        </pc:spChg>
-        <pc:spChg chg="mod">
-          <ac:chgData name="Zonghua Gu" userId="9a7e1853e1951ef5" providerId="LiveId" clId="{CF1FAA12-072C-4ED5-BA76-0FFFAEFDB88A}" dt="2025-09-21T22:39:50.169" v="174" actId="27636"/>
-          <ac:spMkLst>
-            <pc:docMk/>
-            <pc:sldMk cId="3446674091" sldId="266"/>
-            <ac:spMk id="4" creationId="{9FF2DBCF-749D-BC85-1FB3-2369244197E6}"/>
-          </ac:spMkLst>
-        </pc:spChg>
       </pc:sldChg>
     </pc:docChg>
   </pc:docChgLst>
@@ -421,7 +421,7 @@
             <a:fld id="{BD4F56A7-3CDE-194F-B9AF-D598FBBF1989}" type="datetimeFigureOut">
               <a:rPr lang="en-US" smtClean="0"/>
               <a:pPr/>
-              <a:t>9/21/2025</a:t>
+              <a:t>10/5/2025</a:t>
             </a:fld>
             <a:endParaRPr lang="en-US"/>
           </a:p>
@@ -589,7 +589,7 @@
             <a:fld id="{1E52AD58-60CE-E948-9CBA-0BD7030FC28E}" type="datetimeFigureOut">
               <a:rPr lang="en-US" smtClean="0"/>
               <a:pPr/>
-              <a:t>9/21/2025</a:t>
+              <a:t>10/5/2025</a:t>
             </a:fld>
             <a:endParaRPr lang="en-US"/>
           </a:p>
@@ -607,8 +607,8 @@
         </p:nvSpPr>
         <p:spPr>
           <a:xfrm>
-            <a:off x="1143000" y="685800"/>
-            <a:ext cx="4572000" cy="3429000"/>
+            <a:off x="381000" y="685800"/>
+            <a:ext cx="6096000" cy="3429000"/>
           </a:xfrm>
           <a:prstGeom prst="rect">
             <a:avLst/>
@@ -974,121 +974,8 @@
         </p:nvSpPr>
         <p:spPr/>
       </p:sp>
-      <p:sp>
-        <p:nvSpPr>
-          <p:cNvPr id="3" name="Notes Placeholder 2"/>
-          <p:cNvSpPr>
-            <a:spLocks noGrp="1"/>
-          </p:cNvSpPr>
-          <p:nvPr>
-            <p:ph type="body" idx="1"/>
-          </p:nvPr>
-        </p:nvSpPr>
-        <p:spPr/>
-        <p:txBody>
-          <a:bodyPr/>
-          <a:lstStyle/>
-          <a:p>
-            <a:r>
-              <a:rPr lang="en-US" sz="1200" b="0" i="0" kern="1200" dirty="0">
-                <a:solidFill>
-                  <a:schemeClr val="tx1"/>
-                </a:solidFill>
-                <a:effectLst/>
-                <a:latin typeface="+mn-lt"/>
-                <a:ea typeface="+mn-ea"/>
-                <a:cs typeface="+mn-cs"/>
-              </a:rPr>
-              <a:t>Counts the number of leading zero bits in a 64-bit value split into two 32-bit registers.</a:t>
-            </a:r>
-          </a:p>
-          <a:p>
-            <a:r>
-              <a:rPr lang="en-US" sz="1200" b="0" i="0" kern="1200" dirty="0">
-                <a:solidFill>
-                  <a:schemeClr val="tx1"/>
-                </a:solidFill>
-                <a:effectLst/>
-                <a:latin typeface="+mn-lt"/>
-                <a:ea typeface="+mn-ea"/>
-                <a:cs typeface="+mn-cs"/>
-              </a:rPr>
-              <a:t>First counts leading zeros in the upper word using the CLZ instruction. If that is 32 (all zero), it counts leading zeros in the lower word and adds them.</a:t>
-            </a:r>
-          </a:p>
-          <a:p>
-            <a:endParaRPr lang="en-US" dirty="0"/>
-          </a:p>
-        </p:txBody>
-      </p:sp>
-      <p:sp>
-        <p:nvSpPr>
-          <p:cNvPr id="4" name="Slide Number Placeholder 3"/>
-          <p:cNvSpPr>
-            <a:spLocks noGrp="1"/>
-          </p:cNvSpPr>
-          <p:nvPr>
-            <p:ph type="sldNum" sz="quarter" idx="5"/>
-          </p:nvPr>
-        </p:nvSpPr>
-        <p:spPr/>
-        <p:txBody>
-          <a:bodyPr/>
-          <a:lstStyle/>
-          <a:p>
-            <a:fld id="{D624DF53-3DD3-9F45-9E7E-472B96F1AB81}" type="slidenum">
-              <a:rPr lang="en-US" smtClean="0"/>
-              <a:pPr/>
-              <a:t>4</a:t>
-            </a:fld>
-            <a:endParaRPr lang="en-US"/>
-          </a:p>
-        </p:txBody>
-      </p:sp>
-    </p:spTree>
-    <p:extLst>
-      <p:ext uri="{BB962C8B-B14F-4D97-AF65-F5344CB8AC3E}">
-        <p14:creationId xmlns:p14="http://schemas.microsoft.com/office/powerpoint/2010/main" val="3965458125"/>
-      </p:ext>
-    </p:extLst>
-  </p:cSld>
-  <p:clrMapOvr>
-    <a:masterClrMapping/>
-  </p:clrMapOvr>
-</p:notes>
-</file>
-
-<file path=ppt/notesSlides/notesSlide3.xml><?xml version="1.0" encoding="utf-8"?>
-<p:notes xmlns:a="http://schemas.openxmlformats.org/drawingml/2006/main" xmlns:r="http://schemas.openxmlformats.org/officeDocument/2006/relationships" xmlns:p="http://schemas.openxmlformats.org/presentationml/2006/main">
-  <p:cSld>
-    <p:spTree>
-      <p:nvGrpSpPr>
-        <p:cNvPr id="1" name=""/>
-        <p:cNvGrpSpPr/>
-        <p:nvPr/>
-      </p:nvGrpSpPr>
-      <p:grpSpPr>
-        <a:xfrm>
-          <a:off x="0" y="0"/>
-          <a:ext cx="0" cy="0"/>
-          <a:chOff x="0" y="0"/>
-          <a:chExt cx="0" cy="0"/>
-        </a:xfrm>
-      </p:grpSpPr>
-      <p:sp>
-        <p:nvSpPr>
-          <p:cNvPr id="2" name="Slide Image Placeholder 1"/>
-          <p:cNvSpPr>
-            <a:spLocks noGrp="1" noRot="1" noChangeAspect="1"/>
-          </p:cNvSpPr>
-          <p:nvPr>
-            <p:ph type="sldImg"/>
-          </p:nvPr>
-        </p:nvSpPr>
-        <p:spPr/>
-      </p:sp>
-      <mc:AlternateContent xmlns:mc="http://schemas.openxmlformats.org/markup-compatibility/2006">
-        <mc:Choice xmlns:a14="http://schemas.microsoft.com/office/drawing/2010/main" Requires="a14">
+      <mc:AlternateContent xmlns:mc="http://schemas.openxmlformats.org/markup-compatibility/2006" xmlns:a14="http://schemas.microsoft.com/office/drawing/2010/main">
+        <mc:Choice Requires="a14">
           <p:sp>
             <p:nvSpPr>
               <p:cNvPr id="3" name="Notes Placeholder 2"/>
@@ -1137,7 +1024,7 @@
                         <a:solidFill>
                           <a:schemeClr val="tx1"/>
                         </a:solidFill>
-                        <a:latin typeface="+mn-lt"/>
+                        <a:latin typeface="Cambria Math" panose="02040503050406030204" pitchFamily="18" charset="0"/>
                         <a:ea typeface="+mn-ea"/>
                         <a:cs typeface="+mn-cs"/>
                       </a:rPr>
@@ -1165,7 +1052,7 @@
                         <a:solidFill>
                           <a:schemeClr val="tx1"/>
                         </a:solidFill>
-                        <a:latin typeface="+mn-lt"/>
+                        <a:latin typeface="Cambria Math" panose="02040503050406030204" pitchFamily="18" charset="0"/>
                         <a:ea typeface="+mn-ea"/>
                         <a:cs typeface="+mn-cs"/>
                       </a:rPr>
@@ -1371,7 +1258,7 @@
             </p:txBody>
           </p:sp>
         </mc:Choice>
-        <mc:Fallback>
+        <mc:Fallback xmlns="">
           <p:sp>
             <p:nvSpPr>
               <p:cNvPr id="3" name="Notes Placeholder 2"/>
@@ -1662,7 +1549,7 @@
 </p:notes>
 </file>
 
-<file path=ppt/notesSlides/notesSlide4.xml><?xml version="1.0" encoding="utf-8"?>
+<file path=ppt/notesSlides/notesSlide3.xml><?xml version="1.0" encoding="utf-8"?>
 <p:notes xmlns:a="http://schemas.openxmlformats.org/drawingml/2006/main" xmlns:r="http://schemas.openxmlformats.org/officeDocument/2006/relationships" xmlns:p="http://schemas.openxmlformats.org/presentationml/2006/main">
   <p:cSld>
     <p:spTree>
@@ -1782,7 +1669,7 @@
             <a:fld id="{D624DF53-3DD3-9F45-9E7E-472B96F1AB81}" type="slidenum">
               <a:rPr lang="en-US" smtClean="0"/>
               <a:pPr/>
-              <a:t>7</a:t>
+              <a:t>14</a:t>
             </a:fld>
             <a:endParaRPr lang="en-US"/>
           </a:p>
@@ -1830,8 +1717,8 @@
         </p:nvSpPr>
         <p:spPr>
           <a:xfrm>
-            <a:off x="1219200" y="3886200"/>
-            <a:ext cx="6858000" cy="990600"/>
+            <a:off x="1625600" y="3886200"/>
+            <a:ext cx="9144000" cy="990600"/>
           </a:xfrm>
         </p:spPr>
         <p:txBody>
@@ -1865,8 +1752,8 @@
         </p:nvSpPr>
         <p:spPr>
           <a:xfrm>
-            <a:off x="1219200" y="5124450"/>
-            <a:ext cx="6858000" cy="533400"/>
+            <a:off x="1625600" y="5124450"/>
+            <a:ext cx="9144000" cy="533400"/>
           </a:xfrm>
         </p:spPr>
         <p:txBody>
@@ -1928,8 +1815,8 @@
         </p:nvSpPr>
         <p:spPr>
           <a:xfrm>
-            <a:off x="6400800" y="6355080"/>
-            <a:ext cx="2286000" cy="365760"/>
+            <a:off x="8534400" y="6355080"/>
+            <a:ext cx="3048000" cy="365760"/>
           </a:xfrm>
         </p:spPr>
         <p:txBody>
@@ -1943,7 +1830,7 @@
             <a:pPr eaLnBrk="1" latinLnBrk="0" hangingPunct="1"/>
             <a:fld id="{8E8B2B42-CBC2-7D4E-BA50-0E7F29B4DAAB}" type="datetime1">
               <a:rPr lang="en-US" smtClean="0"/>
-              <a:t>9/21/2025</a:t>
+              <a:t>10/5/2025</a:t>
             </a:fld>
             <a:endParaRPr lang="en-US" sz="1600" dirty="0"/>
           </a:p>
@@ -1961,8 +1848,8 @@
         </p:nvSpPr>
         <p:spPr>
           <a:xfrm>
-            <a:off x="2898648" y="6355080"/>
-            <a:ext cx="3474720" cy="365760"/>
+            <a:off x="3864864" y="6355080"/>
+            <a:ext cx="4632960" cy="365760"/>
           </a:xfrm>
         </p:spPr>
         <p:txBody>
@@ -1985,8 +1872,8 @@
         </p:nvSpPr>
         <p:spPr>
           <a:xfrm>
-            <a:off x="1216152" y="6355080"/>
-            <a:ext cx="1219200" cy="365760"/>
+            <a:off x="1621536" y="6355080"/>
+            <a:ext cx="1625600" cy="365760"/>
           </a:xfrm>
         </p:spPr>
         <p:txBody>
@@ -2010,8 +1897,8 @@
         </p:nvSpPr>
         <p:spPr>
           <a:xfrm>
-            <a:off x="904875" y="3648075"/>
-            <a:ext cx="7315200" cy="1280160"/>
+            <a:off x="1206500" y="3648075"/>
+            <a:ext cx="9753600" cy="1280160"/>
           </a:xfrm>
           <a:prstGeom prst="rect">
             <a:avLst/>
@@ -2044,7 +1931,7 @@
           <a:lstStyle/>
           <a:p>
             <a:pPr algn="ctr" eaLnBrk="1" latinLnBrk="0" hangingPunct="1"/>
-            <a:endParaRPr kumimoji="0" lang="en-US"/>
+            <a:endParaRPr kumimoji="0" lang="en-US" sz="1800"/>
           </a:p>
         </p:txBody>
       </p:sp>
@@ -2056,8 +1943,8 @@
         </p:nvSpPr>
         <p:spPr>
           <a:xfrm>
-            <a:off x="914400" y="5048250"/>
-            <a:ext cx="7315200" cy="685800"/>
+            <a:off x="1219200" y="5048250"/>
+            <a:ext cx="9753600" cy="685800"/>
           </a:xfrm>
           <a:prstGeom prst="rect">
             <a:avLst/>
@@ -2090,7 +1977,7 @@
           <a:lstStyle/>
           <a:p>
             <a:pPr algn="ctr" eaLnBrk="1" latinLnBrk="0" hangingPunct="1"/>
-            <a:endParaRPr kumimoji="0" lang="en-US"/>
+            <a:endParaRPr kumimoji="0" lang="en-US" sz="1800"/>
           </a:p>
         </p:txBody>
       </p:sp>
@@ -2102,8 +1989,8 @@
         </p:nvSpPr>
         <p:spPr>
           <a:xfrm>
-            <a:off x="904875" y="3648075"/>
-            <a:ext cx="228600" cy="1280160"/>
+            <a:off x="1206500" y="3648075"/>
+            <a:ext cx="304800" cy="1280160"/>
           </a:xfrm>
           <a:prstGeom prst="rect">
             <a:avLst/>
@@ -2136,7 +2023,7 @@
           <a:lstStyle/>
           <a:p>
             <a:pPr algn="ctr" eaLnBrk="1" latinLnBrk="0" hangingPunct="1"/>
-            <a:endParaRPr kumimoji="0" lang="en-US"/>
+            <a:endParaRPr kumimoji="0" lang="en-US" sz="1800"/>
           </a:p>
         </p:txBody>
       </p:sp>
@@ -2148,8 +2035,8 @@
         </p:nvSpPr>
         <p:spPr>
           <a:xfrm>
-            <a:off x="914400" y="5048250"/>
-            <a:ext cx="228600" cy="685800"/>
+            <a:off x="1219200" y="5048250"/>
+            <a:ext cx="304800" cy="685800"/>
           </a:xfrm>
           <a:prstGeom prst="rect">
             <a:avLst/>
@@ -2182,7 +2069,7 @@
           <a:lstStyle/>
           <a:p>
             <a:pPr algn="ctr" eaLnBrk="1" latinLnBrk="0" hangingPunct="1"/>
-            <a:endParaRPr kumimoji="0" lang="en-US"/>
+            <a:endParaRPr kumimoji="0" lang="en-US" sz="1800"/>
           </a:p>
         </p:txBody>
       </p:sp>
@@ -2303,7 +2190,7 @@
             <a:pPr eaLnBrk="1" latinLnBrk="0" hangingPunct="1"/>
             <a:fld id="{597D1259-3A46-254C-ADDB-B5DA4F1DF3DA}" type="datetime1">
               <a:rPr lang="en-US" smtClean="0"/>
-              <a:t>9/21/2025</a:t>
+              <a:t>10/5/2025</a:t>
             </a:fld>
             <a:endParaRPr lang="en-US"/>
           </a:p>
@@ -2389,8 +2276,8 @@
         </p:nvSpPr>
         <p:spPr>
           <a:xfrm>
-            <a:off x="6629400" y="274638"/>
-            <a:ext cx="2057400" cy="5851525"/>
+            <a:off x="8839200" y="274639"/>
+            <a:ext cx="2743200" cy="5851525"/>
           </a:xfrm>
         </p:spPr>
         <p:txBody>
@@ -2416,8 +2303,8 @@
         </p:nvSpPr>
         <p:spPr>
           <a:xfrm>
-            <a:off x="457200" y="274638"/>
-            <a:ext cx="6019800" cy="5851525"/>
+            <a:off x="609600" y="274639"/>
+            <a:ext cx="8026400" cy="5851525"/>
           </a:xfrm>
         </p:spPr>
         <p:txBody>
@@ -2479,7 +2366,7 @@
             <a:pPr eaLnBrk="1" latinLnBrk="0" hangingPunct="1"/>
             <a:fld id="{CCA104EC-54AA-E04F-BDC0-22B4E8892699}" type="datetime1">
               <a:rPr lang="en-US" smtClean="0"/>
-              <a:t>9/21/2025</a:t>
+              <a:t>10/5/2025</a:t>
             </a:fld>
             <a:endParaRPr lang="en-US"/>
           </a:p>
@@ -2538,8 +2425,8 @@
         </p:nvSpPr>
         <p:spPr bwMode="auto">
           <a:xfrm>
-            <a:off x="457200" y="6353175"/>
-            <a:ext cx="8229600" cy="0"/>
+            <a:off x="609600" y="6353175"/>
+            <a:ext cx="10972800" cy="0"/>
           </a:xfrm>
           <a:prstGeom prst="line">
             <a:avLst/>
@@ -2560,7 +2447,7 @@
           <a:bodyPr vert="horz" wrap="square" lIns="91440" tIns="45720" rIns="91440" bIns="45720" anchor="t" compatLnSpc="1"/>
           <a:lstStyle/>
           <a:p>
-            <a:endParaRPr kumimoji="0" lang="en-US"/>
+            <a:endParaRPr kumimoji="0" lang="en-US" sz="1800"/>
           </a:p>
         </p:txBody>
       </p:sp>
@@ -2574,8 +2461,8 @@
         </p:nvSpPr>
         <p:spPr>
           <a:xfrm rot="5400000">
-            <a:off x="419100" y="6467475"/>
-            <a:ext cx="190849" cy="120314"/>
+            <a:off x="590609" y="6447423"/>
+            <a:ext cx="190849" cy="160419"/>
           </a:xfrm>
           <a:prstGeom prst="triangle">
             <a:avLst>
@@ -2610,7 +2497,7 @@
           <a:lstStyle/>
           <a:p>
             <a:pPr algn="ctr" eaLnBrk="1" latinLnBrk="0" hangingPunct="1"/>
-            <a:endParaRPr kumimoji="0" lang="en-US"/>
+            <a:endParaRPr kumimoji="0" lang="en-US" sz="1800"/>
           </a:p>
         </p:txBody>
       </p:sp>
@@ -2624,7 +2511,7 @@
         </p:nvSpPr>
         <p:spPr bwMode="auto">
           <a:xfrm rot="5400000">
-            <a:off x="3629607" y="3201952"/>
+            <a:off x="5814836" y="3201952"/>
             <a:ext cx="5852160" cy="0"/>
           </a:xfrm>
           <a:prstGeom prst="line">
@@ -2646,7 +2533,7 @@
           <a:bodyPr vert="horz" wrap="square" lIns="91440" tIns="45720" rIns="91440" bIns="45720" anchor="t" compatLnSpc="1"/>
           <a:lstStyle/>
           <a:p>
-            <a:endParaRPr kumimoji="0" lang="en-US"/>
+            <a:endParaRPr kumimoji="0" lang="en-US" sz="1800"/>
           </a:p>
         </p:txBody>
       </p:sp>
@@ -2715,7 +2602,7 @@
             <a:pPr eaLnBrk="1" latinLnBrk="0" hangingPunct="1"/>
             <a:fld id="{A9E6F060-20EB-3246-9088-08BF5F1271DE}" type="datetime1">
               <a:rPr lang="en-US" smtClean="0"/>
-              <a:t>9/21/2025</a:t>
+              <a:t>10/5/2025</a:t>
             </a:fld>
             <a:endParaRPr lang="en-US" dirty="0"/>
           </a:p>
@@ -2776,8 +2663,8 @@
         </p:nvSpPr>
         <p:spPr>
           <a:xfrm>
-            <a:off x="457200" y="1219200"/>
-            <a:ext cx="8229600" cy="4937760"/>
+            <a:off x="609600" y="1219200"/>
+            <a:ext cx="10972800" cy="4937760"/>
           </a:xfrm>
         </p:spPr>
         <p:txBody>
@@ -2863,8 +2750,8 @@
         </p:nvSpPr>
         <p:spPr>
           <a:xfrm>
-            <a:off x="1219200" y="2971800"/>
-            <a:ext cx="6858000" cy="1066800"/>
+            <a:off x="1625600" y="2971800"/>
+            <a:ext cx="9144000" cy="1066800"/>
           </a:xfrm>
         </p:spPr>
         <p:txBody>
@@ -2895,8 +2782,8 @@
         </p:nvSpPr>
         <p:spPr>
           <a:xfrm>
-            <a:off x="1295400" y="4267200"/>
-            <a:ext cx="6781800" cy="1143000"/>
+            <a:off x="1727200" y="4267200"/>
+            <a:ext cx="9042400" cy="1143000"/>
           </a:xfrm>
         </p:spPr>
         <p:txBody>
@@ -2974,8 +2861,8 @@
         </p:nvSpPr>
         <p:spPr>
           <a:xfrm>
-            <a:off x="6400800" y="6355080"/>
-            <a:ext cx="2286000" cy="365760"/>
+            <a:off x="8534400" y="6355080"/>
+            <a:ext cx="3048000" cy="365760"/>
           </a:xfrm>
         </p:spPr>
         <p:txBody>
@@ -2985,7 +2872,7 @@
             <a:pPr eaLnBrk="1" latinLnBrk="0" hangingPunct="1"/>
             <a:fld id="{34C82E41-DA7E-CA4C-823B-C759BEA16CE8}" type="datetime1">
               <a:rPr lang="en-US" smtClean="0"/>
-              <a:t>9/21/2025</a:t>
+              <a:t>10/5/2025</a:t>
             </a:fld>
             <a:endParaRPr lang="en-US" dirty="0"/>
           </a:p>
@@ -3003,8 +2890,8 @@
         </p:nvSpPr>
         <p:spPr>
           <a:xfrm>
-            <a:off x="2898648" y="6355080"/>
-            <a:ext cx="3474720" cy="365760"/>
+            <a:off x="3864864" y="6355080"/>
+            <a:ext cx="4632960" cy="365760"/>
           </a:xfrm>
         </p:spPr>
         <p:txBody>
@@ -3027,8 +2914,8 @@
         </p:nvSpPr>
         <p:spPr>
           <a:xfrm>
-            <a:off x="1069848" y="6355080"/>
-            <a:ext cx="1520952" cy="365760"/>
+            <a:off x="1426464" y="6355080"/>
+            <a:ext cx="2027936" cy="365760"/>
           </a:xfrm>
         </p:spPr>
         <p:txBody>
@@ -3052,8 +2939,8 @@
         </p:nvSpPr>
         <p:spPr>
           <a:xfrm>
-            <a:off x="914400" y="2819400"/>
-            <a:ext cx="7315200" cy="1280160"/>
+            <a:off x="1219200" y="2819400"/>
+            <a:ext cx="9753600" cy="1280160"/>
           </a:xfrm>
           <a:prstGeom prst="rect">
             <a:avLst/>
@@ -3086,7 +2973,7 @@
           <a:lstStyle/>
           <a:p>
             <a:pPr algn="ctr" eaLnBrk="1" latinLnBrk="0" hangingPunct="1"/>
-            <a:endParaRPr kumimoji="0" lang="en-US"/>
+            <a:endParaRPr kumimoji="0" lang="en-US" sz="1800"/>
           </a:p>
         </p:txBody>
       </p:sp>
@@ -3098,8 +2985,8 @@
         </p:nvSpPr>
         <p:spPr>
           <a:xfrm>
-            <a:off x="914400" y="2819400"/>
-            <a:ext cx="228600" cy="1280160"/>
+            <a:off x="1219200" y="2819400"/>
+            <a:ext cx="304800" cy="1280160"/>
           </a:xfrm>
           <a:prstGeom prst="rect">
             <a:avLst/>
@@ -3132,7 +3019,7 @@
           <a:lstStyle/>
           <a:p>
             <a:pPr algn="ctr" eaLnBrk="1" latinLnBrk="0" hangingPunct="1"/>
-            <a:endParaRPr kumimoji="0" lang="en-US"/>
+            <a:endParaRPr kumimoji="0" lang="en-US" sz="1800"/>
           </a:p>
         </p:txBody>
       </p:sp>
@@ -3173,8 +3060,8 @@
         </p:nvSpPr>
         <p:spPr>
           <a:xfrm>
-            <a:off x="457200" y="228600"/>
-            <a:ext cx="8229600" cy="914400"/>
+            <a:off x="609600" y="228600"/>
+            <a:ext cx="10972800" cy="914400"/>
           </a:xfrm>
         </p:spPr>
         <p:txBody>
@@ -3206,7 +3093,7 @@
             <a:pPr eaLnBrk="1" latinLnBrk="0" hangingPunct="1"/>
             <a:fld id="{2500C8B0-EB1A-0A41-B839-C4B99CD2225A}" type="datetime1">
               <a:rPr lang="en-US" smtClean="0"/>
-              <a:t>9/21/2025</a:t>
+              <a:t>10/5/2025</a:t>
             </a:fld>
             <a:endParaRPr lang="en-US"/>
           </a:p>
@@ -3267,8 +3154,8 @@
         </p:nvSpPr>
         <p:spPr>
           <a:xfrm>
-            <a:off x="457200" y="1219200"/>
-            <a:ext cx="4041648" cy="4937760"/>
+            <a:off x="609600" y="1219200"/>
+            <a:ext cx="5388864" cy="4937760"/>
           </a:xfrm>
         </p:spPr>
         <p:txBody>
@@ -3324,8 +3211,8 @@
         </p:nvSpPr>
         <p:spPr>
           <a:xfrm>
-            <a:off x="4632198" y="1216152"/>
-            <a:ext cx="4041648" cy="4937760"/>
+            <a:off x="6176264" y="1216152"/>
+            <a:ext cx="5388864" cy="4937760"/>
           </a:xfrm>
         </p:spPr>
         <p:txBody>
@@ -3406,8 +3293,8 @@
         </p:nvSpPr>
         <p:spPr>
           <a:xfrm>
-            <a:off x="457200" y="228600"/>
-            <a:ext cx="8229600" cy="914400"/>
+            <a:off x="609600" y="228600"/>
+            <a:ext cx="10972800" cy="914400"/>
           </a:xfrm>
         </p:spPr>
         <p:txBody>
@@ -3437,8 +3324,8 @@
         </p:nvSpPr>
         <p:spPr>
           <a:xfrm>
-            <a:off x="457200" y="1285875"/>
-            <a:ext cx="4040188" cy="685800"/>
+            <a:off x="609600" y="1285875"/>
+            <a:ext cx="5386917" cy="685800"/>
           </a:xfrm>
           <a:noFill/>
           <a:ln>
@@ -3496,8 +3383,8 @@
         </p:nvSpPr>
         <p:spPr>
           <a:xfrm>
-            <a:off x="4648200" y="1295400"/>
-            <a:ext cx="4041775" cy="685800"/>
+            <a:off x="6197601" y="1295400"/>
+            <a:ext cx="5389033" cy="685800"/>
           </a:xfrm>
           <a:noFill/>
           <a:ln>
@@ -3559,7 +3446,7 @@
             <a:pPr eaLnBrk="1" latinLnBrk="0" hangingPunct="1"/>
             <a:fld id="{4F16605B-D952-1149-A111-28A5633BAE48}" type="datetime1">
               <a:rPr lang="en-US" smtClean="0"/>
-              <a:t>9/21/2025</a:t>
+              <a:t>10/5/2025</a:t>
             </a:fld>
             <a:endParaRPr lang="en-US"/>
           </a:p>
@@ -3620,8 +3507,8 @@
         </p:nvSpPr>
         <p:spPr>
           <a:xfrm>
-            <a:off x="457200" y="2133600"/>
-            <a:ext cx="4038600" cy="4038600"/>
+            <a:off x="609600" y="2133600"/>
+            <a:ext cx="5384800" cy="4038600"/>
           </a:xfrm>
         </p:spPr>
         <p:txBody>
@@ -3677,8 +3564,8 @@
         </p:nvSpPr>
         <p:spPr>
           <a:xfrm>
-            <a:off x="4648200" y="2133600"/>
-            <a:ext cx="4038600" cy="4038600"/>
+            <a:off x="6197600" y="2133600"/>
+            <a:ext cx="5384800" cy="4038600"/>
           </a:xfrm>
         </p:spPr>
         <p:txBody>
@@ -3759,8 +3646,8 @@
         </p:nvSpPr>
         <p:spPr>
           <a:xfrm>
-            <a:off x="457200" y="228600"/>
-            <a:ext cx="8229600" cy="914400"/>
+            <a:off x="609600" y="228600"/>
+            <a:ext cx="10972800" cy="914400"/>
           </a:xfrm>
         </p:spPr>
         <p:txBody>
@@ -3792,7 +3679,7 @@
             <a:pPr eaLnBrk="1" latinLnBrk="0" hangingPunct="1"/>
             <a:fld id="{91109A1C-29B2-B04E-8365-C9D22C4AE842}" type="datetime1">
               <a:rPr lang="en-US" smtClean="0"/>
-              <a:t>9/21/2025</a:t>
+              <a:t>10/5/2025</a:t>
             </a:fld>
             <a:endParaRPr lang="en-US"/>
           </a:p>
@@ -3851,8 +3738,8 @@
         </p:nvSpPr>
         <p:spPr>
           <a:xfrm rot="5400000">
-            <a:off x="419100" y="6467475"/>
-            <a:ext cx="190849" cy="120314"/>
+            <a:off x="590609" y="6447423"/>
+            <a:ext cx="190849" cy="160419"/>
           </a:xfrm>
           <a:prstGeom prst="triangle">
             <a:avLst>
@@ -3887,7 +3774,7 @@
           <a:lstStyle/>
           <a:p>
             <a:pPr algn="ctr" eaLnBrk="1" latinLnBrk="0" hangingPunct="1"/>
-            <a:endParaRPr kumimoji="0" lang="en-US"/>
+            <a:endParaRPr kumimoji="0" lang="en-US" sz="1800"/>
           </a:p>
         </p:txBody>
       </p:sp>
@@ -3934,7 +3821,7 @@
             <a:pPr eaLnBrk="1" latinLnBrk="0" hangingPunct="1"/>
             <a:fld id="{2CE417B6-A42B-064A-8677-46C55C4F613A}" type="datetime1">
               <a:rPr lang="en-US" smtClean="0"/>
-              <a:t>9/21/2025</a:t>
+              <a:t>10/5/2025</a:t>
             </a:fld>
             <a:endParaRPr lang="en-US"/>
           </a:p>
@@ -3993,8 +3880,8 @@
         </p:nvSpPr>
         <p:spPr bwMode="auto">
           <a:xfrm>
-            <a:off x="457200" y="6353175"/>
-            <a:ext cx="8229600" cy="0"/>
+            <a:off x="609600" y="6353175"/>
+            <a:ext cx="10972800" cy="0"/>
           </a:xfrm>
           <a:prstGeom prst="line">
             <a:avLst/>
@@ -4015,7 +3902,7 @@
           <a:bodyPr vert="horz" wrap="square" lIns="91440" tIns="45720" rIns="91440" bIns="45720" anchor="t" compatLnSpc="1"/>
           <a:lstStyle/>
           <a:p>
-            <a:endParaRPr kumimoji="0" lang="en-US"/>
+            <a:endParaRPr kumimoji="0" lang="en-US" sz="1800"/>
           </a:p>
         </p:txBody>
       </p:sp>
@@ -4029,8 +3916,8 @@
         </p:nvSpPr>
         <p:spPr>
           <a:xfrm rot="5400000">
-            <a:off x="419100" y="6467475"/>
-            <a:ext cx="190849" cy="120314"/>
+            <a:off x="590609" y="6447423"/>
+            <a:ext cx="190849" cy="160419"/>
           </a:xfrm>
           <a:prstGeom prst="triangle">
             <a:avLst>
@@ -4065,7 +3952,7 @@
           <a:lstStyle/>
           <a:p>
             <a:pPr algn="ctr" eaLnBrk="1" latinLnBrk="0" hangingPunct="1"/>
-            <a:endParaRPr kumimoji="0" lang="en-US"/>
+            <a:endParaRPr kumimoji="0" lang="en-US" sz="1800"/>
           </a:p>
         </p:txBody>
       </p:sp>
@@ -4106,8 +3993,8 @@
         </p:nvSpPr>
         <p:spPr>
           <a:xfrm>
-            <a:off x="6324600" y="304800"/>
-            <a:ext cx="2514600" cy="838200"/>
+            <a:off x="8432800" y="304800"/>
+            <a:ext cx="3352800" cy="838200"/>
           </a:xfrm>
         </p:spPr>
         <p:txBody>
@@ -4147,8 +4034,8 @@
         </p:nvSpPr>
         <p:spPr>
           <a:xfrm>
-            <a:off x="6324600" y="1219200"/>
-            <a:ext cx="2514600" cy="4843463"/>
+            <a:off x="8432800" y="1219201"/>
+            <a:ext cx="3352800" cy="4843463"/>
           </a:xfrm>
         </p:spPr>
         <p:txBody>
@@ -4212,7 +4099,7 @@
             <a:pPr eaLnBrk="1" latinLnBrk="0" hangingPunct="1"/>
             <a:fld id="{DE76F5AD-3F1F-7141-BC8A-012C5728BE2D}" type="datetime1">
               <a:rPr lang="en-US" smtClean="0"/>
-              <a:t>9/21/2025</a:t>
+              <a:t>10/5/2025</a:t>
             </a:fld>
             <a:endParaRPr lang="en-US"/>
           </a:p>
@@ -4271,8 +4158,8 @@
         </p:nvSpPr>
         <p:spPr bwMode="auto">
           <a:xfrm>
-            <a:off x="457200" y="6353175"/>
-            <a:ext cx="8229600" cy="0"/>
+            <a:off x="609600" y="6353175"/>
+            <a:ext cx="10972800" cy="0"/>
           </a:xfrm>
           <a:prstGeom prst="line">
             <a:avLst/>
@@ -4293,7 +4180,7 @@
           <a:bodyPr vert="horz" wrap="square" lIns="91440" tIns="45720" rIns="91440" bIns="45720" anchor="t" compatLnSpc="1"/>
           <a:lstStyle/>
           <a:p>
-            <a:endParaRPr kumimoji="0" lang="en-US"/>
+            <a:endParaRPr kumimoji="0" lang="en-US" sz="1800"/>
           </a:p>
         </p:txBody>
       </p:sp>
@@ -4307,7 +4194,7 @@
         </p:nvSpPr>
         <p:spPr bwMode="auto">
           <a:xfrm rot="5400000">
-            <a:off x="3160645" y="3324225"/>
+            <a:off x="5220033" y="3324225"/>
             <a:ext cx="6035040" cy="0"/>
           </a:xfrm>
           <a:prstGeom prst="line">
@@ -4329,7 +4216,7 @@
           <a:bodyPr vert="horz" wrap="square" lIns="91440" tIns="45720" rIns="91440" bIns="45720" anchor="t" compatLnSpc="1"/>
           <a:lstStyle/>
           <a:p>
-            <a:endParaRPr kumimoji="0" lang="en-US" dirty="0"/>
+            <a:endParaRPr kumimoji="0" lang="en-US" sz="1800" dirty="0"/>
           </a:p>
         </p:txBody>
       </p:sp>
@@ -4343,8 +4230,8 @@
         </p:nvSpPr>
         <p:spPr>
           <a:xfrm rot="5400000">
-            <a:off x="419100" y="6467475"/>
-            <a:ext cx="190849" cy="120314"/>
+            <a:off x="590609" y="6447423"/>
+            <a:ext cx="190849" cy="160419"/>
           </a:xfrm>
           <a:prstGeom prst="triangle">
             <a:avLst>
@@ -4379,7 +4266,7 @@
           <a:lstStyle/>
           <a:p>
             <a:pPr algn="ctr" eaLnBrk="1" latinLnBrk="0" hangingPunct="1"/>
-            <a:endParaRPr kumimoji="0" lang="en-US"/>
+            <a:endParaRPr kumimoji="0" lang="en-US" sz="1800"/>
           </a:p>
         </p:txBody>
       </p:sp>
@@ -4395,8 +4282,8 @@
         </p:nvSpPr>
         <p:spPr>
           <a:xfrm>
-            <a:off x="304800" y="304800"/>
-            <a:ext cx="5715000" cy="5715000"/>
+            <a:off x="406400" y="304800"/>
+            <a:ext cx="7620000" cy="5715000"/>
           </a:xfrm>
         </p:spPr>
         <p:txBody>
@@ -4482,8 +4369,8 @@
         </p:nvSpPr>
         <p:spPr>
           <a:xfrm>
-            <a:off x="457200" y="500856"/>
-            <a:ext cx="8229600" cy="674688"/>
+            <a:off x="609600" y="500856"/>
+            <a:ext cx="10972800" cy="674688"/>
           </a:xfrm>
           <a:ln>
             <a:solidFill>
@@ -4523,8 +4410,8 @@
         </p:nvSpPr>
         <p:spPr>
           <a:xfrm>
-            <a:off x="457200" y="1905000"/>
-            <a:ext cx="8229600" cy="4270248"/>
+            <a:off x="609600" y="1905000"/>
+            <a:ext cx="10972800" cy="4270248"/>
           </a:xfrm>
           <a:solidFill>
             <a:schemeClr val="tx1">
@@ -4568,8 +4455,8 @@
         </p:nvSpPr>
         <p:spPr>
           <a:xfrm>
-            <a:off x="457200" y="1219200"/>
-            <a:ext cx="8229600" cy="533400"/>
+            <a:off x="609600" y="1219200"/>
+            <a:ext cx="10972800" cy="533400"/>
           </a:xfrm>
         </p:spPr>
         <p:txBody>
@@ -4620,7 +4507,7 @@
             <a:pPr eaLnBrk="1" latinLnBrk="0" hangingPunct="1"/>
             <a:fld id="{09FA12B8-739E-4D47-A14C-180C3BC10865}" type="datetime1">
               <a:rPr lang="en-US" smtClean="0"/>
-              <a:t>9/21/2025</a:t>
+              <a:t>10/5/2025</a:t>
             </a:fld>
             <a:endParaRPr lang="en-US"/>
           </a:p>
@@ -4679,8 +4566,8 @@
         </p:nvSpPr>
         <p:spPr bwMode="auto">
           <a:xfrm>
-            <a:off x="457200" y="6353175"/>
-            <a:ext cx="8229600" cy="0"/>
+            <a:off x="609600" y="6353175"/>
+            <a:ext cx="10972800" cy="0"/>
           </a:xfrm>
           <a:prstGeom prst="line">
             <a:avLst/>
@@ -4701,7 +4588,7 @@
           <a:bodyPr vert="horz" wrap="square" lIns="91440" tIns="45720" rIns="91440" bIns="45720" anchor="t" compatLnSpc="1"/>
           <a:lstStyle/>
           <a:p>
-            <a:endParaRPr kumimoji="0" lang="en-US"/>
+            <a:endParaRPr kumimoji="0" lang="en-US" sz="1800"/>
           </a:p>
         </p:txBody>
       </p:sp>
@@ -4715,8 +4602,8 @@
         </p:nvSpPr>
         <p:spPr>
           <a:xfrm rot="5400000">
-            <a:off x="419100" y="6467475"/>
-            <a:ext cx="190849" cy="120314"/>
+            <a:off x="590609" y="6447423"/>
+            <a:ext cx="190849" cy="160419"/>
           </a:xfrm>
           <a:prstGeom prst="triangle">
             <a:avLst>
@@ -4751,7 +4638,7 @@
           <a:lstStyle/>
           <a:p>
             <a:pPr algn="ctr" eaLnBrk="1" latinLnBrk="0" hangingPunct="1"/>
-            <a:endParaRPr kumimoji="0" lang="en-US"/>
+            <a:endParaRPr kumimoji="0" lang="en-US" sz="1800"/>
           </a:p>
         </p:txBody>
       </p:sp>
@@ -4763,8 +4650,8 @@
         </p:nvSpPr>
         <p:spPr>
           <a:xfrm>
-            <a:off x="457200" y="500856"/>
-            <a:ext cx="182880" cy="685800"/>
+            <a:off x="609600" y="500856"/>
+            <a:ext cx="243840" cy="685800"/>
           </a:xfrm>
           <a:prstGeom prst="rect">
             <a:avLst/>
@@ -4797,7 +4684,7 @@
           <a:lstStyle/>
           <a:p>
             <a:pPr algn="ctr" eaLnBrk="1" latinLnBrk="0" hangingPunct="1"/>
-            <a:endParaRPr kumimoji="0" lang="en-US"/>
+            <a:endParaRPr kumimoji="0" lang="en-US" sz="1800"/>
           </a:p>
         </p:txBody>
       </p:sp>
@@ -4843,8 +4730,8 @@
         </p:nvSpPr>
         <p:spPr>
           <a:xfrm>
-            <a:off x="457200" y="152400"/>
-            <a:ext cx="8229600" cy="990600"/>
+            <a:off x="609600" y="152400"/>
+            <a:ext cx="10972800" cy="990600"/>
           </a:xfrm>
           <a:prstGeom prst="rect">
             <a:avLst/>
@@ -4875,8 +4762,8 @@
         </p:nvSpPr>
         <p:spPr>
           <a:xfrm>
-            <a:off x="457200" y="1219200"/>
-            <a:ext cx="8229600" cy="4910328"/>
+            <a:off x="609600" y="1219200"/>
+            <a:ext cx="10972800" cy="4910328"/>
           </a:xfrm>
           <a:prstGeom prst="rect">
             <a:avLst/>
@@ -4936,8 +4823,8 @@
         </p:nvSpPr>
         <p:spPr>
           <a:xfrm>
-            <a:off x="6400800" y="6356350"/>
-            <a:ext cx="2289048" cy="365760"/>
+            <a:off x="8534400" y="6356350"/>
+            <a:ext cx="3052064" cy="365760"/>
           </a:xfrm>
           <a:prstGeom prst="rect">
             <a:avLst/>
@@ -4958,7 +4845,7 @@
             <a:pPr eaLnBrk="1" latinLnBrk="0" hangingPunct="1"/>
             <a:fld id="{CDD18CD8-E404-844E-A4BD-DF69B8E5881E}" type="datetime1">
               <a:rPr lang="en-US" smtClean="0"/>
-              <a:t>9/21/2025</a:t>
+              <a:t>10/5/2025</a:t>
             </a:fld>
             <a:endParaRPr lang="en-US" sz="1400" dirty="0">
               <a:solidFill>
@@ -4980,8 +4867,8 @@
         </p:nvSpPr>
         <p:spPr>
           <a:xfrm>
-            <a:off x="2898648" y="6356350"/>
-            <a:ext cx="3505200" cy="365760"/>
+            <a:off x="3864864" y="6356350"/>
+            <a:ext cx="4673600" cy="365760"/>
           </a:xfrm>
           <a:prstGeom prst="rect">
             <a:avLst/>
@@ -5020,8 +4907,8 @@
         </p:nvSpPr>
         <p:spPr>
           <a:xfrm>
-            <a:off x="612648" y="6356350"/>
-            <a:ext cx="1981200" cy="365760"/>
+            <a:off x="816864" y="6356350"/>
+            <a:ext cx="2641600" cy="365760"/>
           </a:xfrm>
           <a:prstGeom prst="rect">
             <a:avLst/>
@@ -5063,8 +4950,8 @@
         </p:nvSpPr>
         <p:spPr bwMode="auto">
           <a:xfrm>
-            <a:off x="457200" y="6353175"/>
-            <a:ext cx="8229600" cy="0"/>
+            <a:off x="609600" y="6353175"/>
+            <a:ext cx="10972800" cy="0"/>
           </a:xfrm>
           <a:prstGeom prst="line">
             <a:avLst/>
@@ -5085,7 +4972,7 @@
           <a:bodyPr vert="horz" wrap="square" lIns="91440" tIns="45720" rIns="91440" bIns="45720" anchor="t" compatLnSpc="1"/>
           <a:lstStyle/>
           <a:p>
-            <a:endParaRPr kumimoji="0" lang="en-US"/>
+            <a:endParaRPr kumimoji="0" lang="en-US" sz="1800"/>
           </a:p>
         </p:txBody>
       </p:sp>
@@ -5099,8 +4986,8 @@
         </p:nvSpPr>
         <p:spPr bwMode="auto">
           <a:xfrm>
-            <a:off x="457200" y="1143000"/>
-            <a:ext cx="8229600" cy="0"/>
+            <a:off x="609600" y="1143000"/>
+            <a:ext cx="10972800" cy="0"/>
           </a:xfrm>
           <a:prstGeom prst="line">
             <a:avLst/>
@@ -5121,7 +5008,7 @@
           <a:bodyPr vert="horz" wrap="square" lIns="91440" tIns="45720" rIns="91440" bIns="45720" anchor="t" compatLnSpc="1"/>
           <a:lstStyle/>
           <a:p>
-            <a:endParaRPr kumimoji="0" lang="en-US"/>
+            <a:endParaRPr kumimoji="0" lang="en-US" sz="1800"/>
           </a:p>
         </p:txBody>
       </p:sp>
@@ -5135,8 +5022,8 @@
         </p:nvSpPr>
         <p:spPr>
           <a:xfrm rot="5400000">
-            <a:off x="419100" y="6467475"/>
-            <a:ext cx="190849" cy="120314"/>
+            <a:off x="590609" y="6447423"/>
+            <a:ext cx="190849" cy="160419"/>
           </a:xfrm>
           <a:prstGeom prst="triangle">
             <a:avLst>
@@ -5171,7 +5058,7 @@
           <a:lstStyle/>
           <a:p>
             <a:pPr algn="ctr" eaLnBrk="1" latinLnBrk="0" hangingPunct="1"/>
-            <a:endParaRPr kumimoji="0" lang="en-US"/>
+            <a:endParaRPr kumimoji="0" lang="en-US" sz="1800"/>
           </a:p>
         </p:txBody>
       </p:sp>
@@ -5559,7 +5446,7 @@
         </p:nvSpPr>
         <p:spPr>
           <a:xfrm>
-            <a:off x="1828800" y="337547"/>
+            <a:off x="4572000" y="381000"/>
             <a:ext cx="6477000" cy="646331"/>
           </a:xfrm>
           <a:prstGeom prst="rect">
@@ -5603,7 +5490,7 @@
         </p:nvSpPr>
         <p:spPr>
           <a:xfrm>
-            <a:off x="4854358" y="1828800"/>
+            <a:off x="7597559" y="1872253"/>
             <a:ext cx="3415037" cy="830997"/>
           </a:xfrm>
           <a:prstGeom prst="rect">
@@ -5667,7 +5554,2396 @@
     </p:spTree>
     <p:extLst>
       <p:ext uri="{BB962C8B-B14F-4D97-AF65-F5344CB8AC3E}">
-        <p14:creationId xmlns:p14="http://schemas.microsoft.com/office/powerpoint/2010/main" val="1683281344"/>
+        <p14:creationId xmlns:p14="http://schemas.microsoft.com/office/powerpoint/2010/main" val="839383286"/>
+      </p:ext>
+    </p:extLst>
+  </p:cSld>
+  <p:clrMapOvr>
+    <a:masterClrMapping/>
+  </p:clrMapOvr>
+</p:sld>
+</file>
+
+<file path=ppt/slides/slide10.xml><?xml version="1.0" encoding="utf-8"?>
+<p:sld xmlns:a="http://schemas.openxmlformats.org/drawingml/2006/main" xmlns:r="http://schemas.openxmlformats.org/officeDocument/2006/relationships" xmlns:p="http://schemas.openxmlformats.org/presentationml/2006/main">
+  <p:cSld>
+    <p:spTree>
+      <p:nvGrpSpPr>
+        <p:cNvPr id="1" name=""/>
+        <p:cNvGrpSpPr/>
+        <p:nvPr/>
+      </p:nvGrpSpPr>
+      <p:grpSpPr>
+        <a:xfrm>
+          <a:off x="0" y="0"/>
+          <a:ext cx="0" cy="0"/>
+          <a:chOff x="0" y="0"/>
+          <a:chExt cx="0" cy="0"/>
+        </a:xfrm>
+      </p:grpSpPr>
+      <p:sp>
+        <p:nvSpPr>
+          <p:cNvPr id="2" name="Title 1">
+            <a:extLst>
+              <a:ext uri="{FF2B5EF4-FFF2-40B4-BE49-F238E27FC236}">
+                <a16:creationId xmlns:a16="http://schemas.microsoft.com/office/drawing/2014/main" id="{86BDD6E9-964A-812D-D3B2-86FC83F2F232}"/>
+              </a:ext>
+            </a:extLst>
+          </p:cNvPr>
+          <p:cNvSpPr>
+            <a:spLocks noGrp="1"/>
+          </p:cNvSpPr>
+          <p:nvPr>
+            <p:ph type="title"/>
+          </p:nvPr>
+        </p:nvSpPr>
+        <p:spPr/>
+        <p:txBody>
+          <a:bodyPr/>
+          <a:lstStyle/>
+          <a:p>
+            <a:r>
+              <a:rPr lang="en-US" dirty="0"/>
+              <a:t>64-bit Logic Shift Left</a:t>
+            </a:r>
+          </a:p>
+        </p:txBody>
+      </p:sp>
+      <p:sp>
+        <p:nvSpPr>
+          <p:cNvPr id="3" name="Slide Number Placeholder 2">
+            <a:extLst>
+              <a:ext uri="{FF2B5EF4-FFF2-40B4-BE49-F238E27FC236}">
+                <a16:creationId xmlns:a16="http://schemas.microsoft.com/office/drawing/2014/main" id="{F415B5D9-8CA8-427B-A0A6-F24F6B846104}"/>
+              </a:ext>
+            </a:extLst>
+          </p:cNvPr>
+          <p:cNvSpPr>
+            <a:spLocks noGrp="1"/>
+          </p:cNvSpPr>
+          <p:nvPr>
+            <p:ph type="sldNum" sz="quarter" idx="12"/>
+          </p:nvPr>
+        </p:nvSpPr>
+        <p:spPr/>
+        <p:txBody>
+          <a:bodyPr/>
+          <a:lstStyle/>
+          <a:p>
+            <a:fld id="{EA7C8D44-3667-46F6-9772-CC52308E2A7F}" type="slidenum">
+              <a:rPr kumimoji="0" lang="en-US" smtClean="0"/>
+              <a:pPr/>
+              <a:t>10</a:t>
+            </a:fld>
+            <a:endParaRPr kumimoji="0" lang="en-US" dirty="0"/>
+          </a:p>
+        </p:txBody>
+      </p:sp>
+      <p:sp>
+        <p:nvSpPr>
+          <p:cNvPr id="4" name="Content Placeholder 3">
+            <a:extLst>
+              <a:ext uri="{FF2B5EF4-FFF2-40B4-BE49-F238E27FC236}">
+                <a16:creationId xmlns:a16="http://schemas.microsoft.com/office/drawing/2014/main" id="{ED87AF0E-3042-5B79-52D1-2F094E3BB11D}"/>
+              </a:ext>
+            </a:extLst>
+          </p:cNvPr>
+          <p:cNvSpPr>
+            <a:spLocks noGrp="1"/>
+          </p:cNvSpPr>
+          <p:nvPr>
+            <p:ph sz="quarter" idx="1"/>
+          </p:nvPr>
+        </p:nvSpPr>
+        <p:spPr>
+          <a:xfrm>
+            <a:off x="609600" y="3733800"/>
+            <a:ext cx="10972800" cy="2622550"/>
+          </a:xfrm>
+        </p:spPr>
+        <p:txBody>
+          <a:bodyPr>
+            <a:normAutofit fontScale="70000" lnSpcReduction="20000"/>
+          </a:bodyPr>
+          <a:lstStyle/>
+          <a:p>
+            <a:r>
+              <a:rPr lang="en-US" dirty="0"/>
+              <a:t>Write the assembly code</a:t>
+            </a:r>
+          </a:p>
+          <a:p>
+            <a:pPr marL="274320" lvl="1" indent="0">
+              <a:buNone/>
+            </a:pPr>
+            <a:r>
+              <a:rPr lang="en-US" sz="2500" dirty="0">
+                <a:latin typeface="Consolas" panose="020B0609020204030204" pitchFamily="49" charset="0"/>
+              </a:rPr>
+              <a:t>; r0 = Lower word of 64-bit data</a:t>
+            </a:r>
+          </a:p>
+          <a:p>
+            <a:pPr marL="274320" lvl="1" indent="0">
+              <a:buNone/>
+            </a:pPr>
+            <a:r>
+              <a:rPr lang="en-US" sz="2500" dirty="0">
+                <a:latin typeface="Consolas" panose="020B0609020204030204" pitchFamily="49" charset="0"/>
+              </a:rPr>
+              <a:t>; r1 = Upper word of 64-bit data</a:t>
+            </a:r>
+          </a:p>
+          <a:p>
+            <a:pPr marL="274320" lvl="1" indent="0">
+              <a:buNone/>
+            </a:pPr>
+            <a:endParaRPr lang="en-US" sz="2500" dirty="0">
+              <a:latin typeface="Consolas" panose="020B0609020204030204" pitchFamily="49" charset="0"/>
+            </a:endParaRPr>
+          </a:p>
+          <a:p>
+            <a:pPr marL="274320" lvl="1" indent="0">
+              <a:buNone/>
+            </a:pPr>
+            <a:r>
+              <a:rPr lang="en-US" sz="2500" b="1" dirty="0">
+                <a:solidFill>
+                  <a:srgbClr val="C00000"/>
+                </a:solidFill>
+                <a:latin typeface="Consolas" panose="020B0609020204030204" pitchFamily="49" charset="0"/>
+              </a:rPr>
+              <a:t>MOV  r3, r0          	</a:t>
+            </a:r>
+            <a:r>
+              <a:rPr lang="en-US" sz="2500" dirty="0">
+                <a:latin typeface="Consolas" panose="020B0609020204030204" pitchFamily="49" charset="0"/>
+              </a:rPr>
+              <a:t>; Backup the lower word</a:t>
+            </a:r>
+          </a:p>
+          <a:p>
+            <a:pPr marL="274320" lvl="1" indent="0">
+              <a:buNone/>
+            </a:pPr>
+            <a:r>
+              <a:rPr lang="en-US" sz="2500" b="1" dirty="0">
+                <a:solidFill>
+                  <a:srgbClr val="C00000"/>
+                </a:solidFill>
+                <a:latin typeface="Consolas" panose="020B0609020204030204" pitchFamily="49" charset="0"/>
+              </a:rPr>
+              <a:t>MOVS r1, r1, LSL #3  	</a:t>
+            </a:r>
+            <a:r>
+              <a:rPr lang="en-US" sz="2500" dirty="0">
+                <a:latin typeface="Consolas" panose="020B0609020204030204" pitchFamily="49" charset="0"/>
+              </a:rPr>
+              <a:t>; Shift left the upper word</a:t>
+            </a:r>
+          </a:p>
+          <a:p>
+            <a:pPr marL="274320" lvl="1" indent="0">
+              <a:buNone/>
+            </a:pPr>
+            <a:r>
+              <a:rPr lang="en-US" sz="2500" b="1" dirty="0">
+                <a:solidFill>
+                  <a:srgbClr val="C00000"/>
+                </a:solidFill>
+                <a:latin typeface="Consolas" panose="020B0609020204030204" pitchFamily="49" charset="0"/>
+              </a:rPr>
+              <a:t>MOV  r0, r0, LSL #3  	</a:t>
+            </a:r>
+            <a:r>
+              <a:rPr lang="en-US" sz="2500" dirty="0">
+                <a:latin typeface="Consolas" panose="020B0609020204030204" pitchFamily="49" charset="0"/>
+              </a:rPr>
+              <a:t>; Shift left the lower word</a:t>
+            </a:r>
+          </a:p>
+          <a:p>
+            <a:pPr marL="274320" lvl="1" indent="0">
+              <a:buNone/>
+            </a:pPr>
+            <a:endParaRPr lang="en-US" sz="2500" dirty="0">
+              <a:latin typeface="Consolas" panose="020B0609020204030204" pitchFamily="49" charset="0"/>
+            </a:endParaRPr>
+          </a:p>
+          <a:p>
+            <a:pPr marL="274320" lvl="1" indent="0">
+              <a:buNone/>
+            </a:pPr>
+            <a:r>
+              <a:rPr lang="en-US" sz="2500" b="1" dirty="0">
+                <a:solidFill>
+                  <a:srgbClr val="C00000"/>
+                </a:solidFill>
+                <a:latin typeface="Consolas" panose="020B0609020204030204" pitchFamily="49" charset="0"/>
+              </a:rPr>
+              <a:t>ORR  r1, r1, r3, LSR #29   </a:t>
+            </a:r>
+            <a:r>
+              <a:rPr lang="en-US" sz="2500" dirty="0">
+                <a:latin typeface="Consolas" panose="020B0609020204030204" pitchFamily="49" charset="0"/>
+              </a:rPr>
+              <a:t>; upper |= lower &gt;&gt; (32 - 3)</a:t>
+            </a:r>
+          </a:p>
+        </p:txBody>
+      </p:sp>
+      <p:pic>
+        <p:nvPicPr>
+          <p:cNvPr id="5" name="Picture 4" descr="Diagram, timeline&#10;&#10;Description automatically generated">
+            <a:extLst>
+              <a:ext uri="{FF2B5EF4-FFF2-40B4-BE49-F238E27FC236}">
+                <a16:creationId xmlns:a16="http://schemas.microsoft.com/office/drawing/2014/main" id="{4D38B958-46BB-9D65-5CFE-EF5010B12657}"/>
+              </a:ext>
+            </a:extLst>
+          </p:cNvPr>
+          <p:cNvPicPr>
+            <a:picLocks noChangeAspect="1"/>
+          </p:cNvPicPr>
+          <p:nvPr/>
+        </p:nvPicPr>
+        <p:blipFill>
+          <a:blip r:embed="rId2" cstate="print">
+            <a:extLst>
+              <a:ext uri="{28A0092B-C50C-407E-A947-70E740481C1C}">
+                <a14:useLocalDpi xmlns:a14="http://schemas.microsoft.com/office/drawing/2010/main" val="0"/>
+              </a:ext>
+            </a:extLst>
+          </a:blip>
+          <a:stretch>
+            <a:fillRect/>
+          </a:stretch>
+        </p:blipFill>
+        <p:spPr>
+          <a:xfrm>
+            <a:off x="1828800" y="1219200"/>
+            <a:ext cx="7860206" cy="2295446"/>
+          </a:xfrm>
+          <a:prstGeom prst="rect">
+            <a:avLst/>
+          </a:prstGeom>
+        </p:spPr>
+      </p:pic>
+      <p:sp>
+        <p:nvSpPr>
+          <p:cNvPr id="6" name="TextBox 5">
+            <a:extLst>
+              <a:ext uri="{FF2B5EF4-FFF2-40B4-BE49-F238E27FC236}">
+                <a16:creationId xmlns:a16="http://schemas.microsoft.com/office/drawing/2014/main" id="{80108A63-B80E-2434-483E-2FBAE7FC2285}"/>
+              </a:ext>
+            </a:extLst>
+          </p:cNvPr>
+          <p:cNvSpPr txBox="1"/>
+          <p:nvPr/>
+        </p:nvSpPr>
+        <p:spPr>
+          <a:xfrm>
+            <a:off x="7086600" y="1141214"/>
+            <a:ext cx="437940" cy="369332"/>
+          </a:xfrm>
+          <a:prstGeom prst="rect">
+            <a:avLst/>
+          </a:prstGeom>
+          <a:noFill/>
+        </p:spPr>
+        <p:txBody>
+          <a:bodyPr wrap="none" rtlCol="0">
+            <a:spAutoFit/>
+          </a:bodyPr>
+          <a:lstStyle/>
+          <a:p>
+            <a:r>
+              <a:rPr lang="en-US" b="1" dirty="0">
+                <a:solidFill>
+                  <a:srgbClr val="0000FF"/>
+                </a:solidFill>
+                <a:latin typeface="Consolas" panose="020B0609020204030204" pitchFamily="49" charset="0"/>
+              </a:rPr>
+              <a:t>r0</a:t>
+            </a:r>
+          </a:p>
+        </p:txBody>
+      </p:sp>
+      <p:sp>
+        <p:nvSpPr>
+          <p:cNvPr id="7" name="TextBox 6">
+            <a:extLst>
+              <a:ext uri="{FF2B5EF4-FFF2-40B4-BE49-F238E27FC236}">
+                <a16:creationId xmlns:a16="http://schemas.microsoft.com/office/drawing/2014/main" id="{7E9A29B0-A4A4-F42E-DE4D-0705907E0736}"/>
+              </a:ext>
+            </a:extLst>
+          </p:cNvPr>
+          <p:cNvSpPr txBox="1"/>
+          <p:nvPr/>
+        </p:nvSpPr>
+        <p:spPr>
+          <a:xfrm>
+            <a:off x="3886200" y="1141214"/>
+            <a:ext cx="437940" cy="369332"/>
+          </a:xfrm>
+          <a:prstGeom prst="rect">
+            <a:avLst/>
+          </a:prstGeom>
+          <a:noFill/>
+        </p:spPr>
+        <p:txBody>
+          <a:bodyPr wrap="none" rtlCol="0">
+            <a:spAutoFit/>
+          </a:bodyPr>
+          <a:lstStyle/>
+          <a:p>
+            <a:r>
+              <a:rPr lang="en-US" b="1" dirty="0">
+                <a:solidFill>
+                  <a:srgbClr val="0000FF"/>
+                </a:solidFill>
+                <a:latin typeface="Consolas" panose="020B0609020204030204" pitchFamily="49" charset="0"/>
+              </a:rPr>
+              <a:t>r1</a:t>
+            </a:r>
+          </a:p>
+        </p:txBody>
+      </p:sp>
+      <p:sp>
+        <p:nvSpPr>
+          <p:cNvPr id="8" name="TextBox 7">
+            <a:extLst>
+              <a:ext uri="{FF2B5EF4-FFF2-40B4-BE49-F238E27FC236}">
+                <a16:creationId xmlns:a16="http://schemas.microsoft.com/office/drawing/2014/main" id="{9D375EA0-FFBF-CB2A-26EE-E17CF8A0837C}"/>
+              </a:ext>
+            </a:extLst>
+          </p:cNvPr>
+          <p:cNvSpPr txBox="1"/>
+          <p:nvPr/>
+        </p:nvSpPr>
+        <p:spPr>
+          <a:xfrm>
+            <a:off x="3829260" y="3288268"/>
+            <a:ext cx="437940" cy="369332"/>
+          </a:xfrm>
+          <a:prstGeom prst="rect">
+            <a:avLst/>
+          </a:prstGeom>
+          <a:noFill/>
+        </p:spPr>
+        <p:txBody>
+          <a:bodyPr wrap="none" rtlCol="0">
+            <a:spAutoFit/>
+          </a:bodyPr>
+          <a:lstStyle/>
+          <a:p>
+            <a:r>
+              <a:rPr lang="en-US" b="1" dirty="0">
+                <a:solidFill>
+                  <a:srgbClr val="0000FF"/>
+                </a:solidFill>
+                <a:latin typeface="Consolas" panose="020B0609020204030204" pitchFamily="49" charset="0"/>
+              </a:rPr>
+              <a:t>r1</a:t>
+            </a:r>
+          </a:p>
+        </p:txBody>
+      </p:sp>
+      <p:sp>
+        <p:nvSpPr>
+          <p:cNvPr id="9" name="TextBox 8">
+            <a:extLst>
+              <a:ext uri="{FF2B5EF4-FFF2-40B4-BE49-F238E27FC236}">
+                <a16:creationId xmlns:a16="http://schemas.microsoft.com/office/drawing/2014/main" id="{805B6964-6E28-2AE9-EBB9-5DEFBD660848}"/>
+              </a:ext>
+            </a:extLst>
+          </p:cNvPr>
+          <p:cNvSpPr txBox="1"/>
+          <p:nvPr/>
+        </p:nvSpPr>
+        <p:spPr>
+          <a:xfrm>
+            <a:off x="7086600" y="3288268"/>
+            <a:ext cx="437940" cy="369332"/>
+          </a:xfrm>
+          <a:prstGeom prst="rect">
+            <a:avLst/>
+          </a:prstGeom>
+          <a:noFill/>
+        </p:spPr>
+        <p:txBody>
+          <a:bodyPr wrap="none" rtlCol="0">
+            <a:spAutoFit/>
+          </a:bodyPr>
+          <a:lstStyle/>
+          <a:p>
+            <a:r>
+              <a:rPr lang="en-US" b="1" dirty="0">
+                <a:solidFill>
+                  <a:srgbClr val="0000FF"/>
+                </a:solidFill>
+                <a:latin typeface="Consolas" panose="020B0609020204030204" pitchFamily="49" charset="0"/>
+              </a:rPr>
+              <a:t>r0</a:t>
+            </a:r>
+          </a:p>
+        </p:txBody>
+      </p:sp>
+      <p:sp>
+        <p:nvSpPr>
+          <p:cNvPr id="10" name="TextBox 9">
+            <a:extLst>
+              <a:ext uri="{FF2B5EF4-FFF2-40B4-BE49-F238E27FC236}">
+                <a16:creationId xmlns:a16="http://schemas.microsoft.com/office/drawing/2014/main" id="{37F28818-94A2-F76F-BA07-9224E63D52C3}"/>
+              </a:ext>
+            </a:extLst>
+          </p:cNvPr>
+          <p:cNvSpPr txBox="1"/>
+          <p:nvPr/>
+        </p:nvSpPr>
+        <p:spPr>
+          <a:xfrm>
+            <a:off x="2505323" y="1914882"/>
+            <a:ext cx="437940" cy="369332"/>
+          </a:xfrm>
+          <a:prstGeom prst="rect">
+            <a:avLst/>
+          </a:prstGeom>
+          <a:noFill/>
+        </p:spPr>
+        <p:txBody>
+          <a:bodyPr wrap="none" rtlCol="0">
+            <a:spAutoFit/>
+          </a:bodyPr>
+          <a:lstStyle/>
+          <a:p>
+            <a:r>
+              <a:rPr lang="en-US" b="1" dirty="0">
+                <a:solidFill>
+                  <a:srgbClr val="0000FF"/>
+                </a:solidFill>
+                <a:latin typeface="Consolas" panose="020B0609020204030204" pitchFamily="49" charset="0"/>
+              </a:rPr>
+              <a:t>r1</a:t>
+            </a:r>
+          </a:p>
+        </p:txBody>
+      </p:sp>
+      <p:sp>
+        <p:nvSpPr>
+          <p:cNvPr id="11" name="TextBox 10">
+            <a:extLst>
+              <a:ext uri="{FF2B5EF4-FFF2-40B4-BE49-F238E27FC236}">
+                <a16:creationId xmlns:a16="http://schemas.microsoft.com/office/drawing/2014/main" id="{1F66DCDC-260C-EA34-9282-5EF46AC1E57D}"/>
+              </a:ext>
+            </a:extLst>
+          </p:cNvPr>
+          <p:cNvSpPr txBox="1"/>
+          <p:nvPr/>
+        </p:nvSpPr>
+        <p:spPr>
+          <a:xfrm>
+            <a:off x="5283202" y="1914882"/>
+            <a:ext cx="437940" cy="369332"/>
+          </a:xfrm>
+          <a:prstGeom prst="rect">
+            <a:avLst/>
+          </a:prstGeom>
+          <a:noFill/>
+        </p:spPr>
+        <p:txBody>
+          <a:bodyPr wrap="none" rtlCol="0">
+            <a:spAutoFit/>
+          </a:bodyPr>
+          <a:lstStyle/>
+          <a:p>
+            <a:r>
+              <a:rPr lang="en-US" b="1" dirty="0">
+                <a:solidFill>
+                  <a:srgbClr val="0000FF"/>
+                </a:solidFill>
+                <a:latin typeface="Consolas" panose="020B0609020204030204" pitchFamily="49" charset="0"/>
+              </a:rPr>
+              <a:t>r4</a:t>
+            </a:r>
+          </a:p>
+        </p:txBody>
+      </p:sp>
+    </p:spTree>
+    <p:extLst>
+      <p:ext uri="{BB962C8B-B14F-4D97-AF65-F5344CB8AC3E}">
+        <p14:creationId xmlns:p14="http://schemas.microsoft.com/office/powerpoint/2010/main" val="3371855514"/>
+      </p:ext>
+    </p:extLst>
+  </p:cSld>
+  <p:clrMapOvr>
+    <a:masterClrMapping/>
+  </p:clrMapOvr>
+</p:sld>
+</file>
+
+<file path=ppt/slides/slide11.xml><?xml version="1.0" encoding="utf-8"?>
+<p:sld xmlns:a="http://schemas.openxmlformats.org/drawingml/2006/main" xmlns:r="http://schemas.openxmlformats.org/officeDocument/2006/relationships" xmlns:p="http://schemas.openxmlformats.org/presentationml/2006/main">
+  <p:cSld>
+    <p:spTree>
+      <p:nvGrpSpPr>
+        <p:cNvPr id="1" name=""/>
+        <p:cNvGrpSpPr/>
+        <p:nvPr/>
+      </p:nvGrpSpPr>
+      <p:grpSpPr>
+        <a:xfrm>
+          <a:off x="0" y="0"/>
+          <a:ext cx="0" cy="0"/>
+          <a:chOff x="0" y="0"/>
+          <a:chExt cx="0" cy="0"/>
+        </a:xfrm>
+      </p:grpSpPr>
+      <p:sp>
+        <p:nvSpPr>
+          <p:cNvPr id="2" name="Title 1"/>
+          <p:cNvSpPr>
+            <a:spLocks noGrp="1"/>
+          </p:cNvSpPr>
+          <p:nvPr>
+            <p:ph type="title"/>
+          </p:nvPr>
+        </p:nvSpPr>
+        <p:spPr/>
+        <p:txBody>
+          <a:bodyPr/>
+          <a:lstStyle/>
+          <a:p>
+            <a:r>
+              <a:rPr lang="en-US" dirty="0"/>
+              <a:t>64-bit Logic Shift Right</a:t>
+            </a:r>
+          </a:p>
+        </p:txBody>
+      </p:sp>
+      <p:sp>
+        <p:nvSpPr>
+          <p:cNvPr id="3" name="Slide Number Placeholder 2"/>
+          <p:cNvSpPr>
+            <a:spLocks noGrp="1"/>
+          </p:cNvSpPr>
+          <p:nvPr>
+            <p:ph type="sldNum" sz="quarter" idx="12"/>
+          </p:nvPr>
+        </p:nvSpPr>
+        <p:spPr/>
+        <p:txBody>
+          <a:bodyPr/>
+          <a:lstStyle/>
+          <a:p>
+            <a:fld id="{EA7C8D44-3667-46F6-9772-CC52308E2A7F}" type="slidenum">
+              <a:rPr kumimoji="0" lang="en-US" smtClean="0"/>
+              <a:pPr/>
+              <a:t>11</a:t>
+            </a:fld>
+            <a:endParaRPr kumimoji="0" lang="en-US" dirty="0"/>
+          </a:p>
+        </p:txBody>
+      </p:sp>
+      <p:pic>
+        <p:nvPicPr>
+          <p:cNvPr id="4" name="Picture 3"/>
+          <p:cNvPicPr>
+            <a:picLocks noChangeAspect="1"/>
+          </p:cNvPicPr>
+          <p:nvPr/>
+        </p:nvPicPr>
+        <p:blipFill>
+          <a:blip r:embed="rId2"/>
+          <a:stretch>
+            <a:fillRect/>
+          </a:stretch>
+        </p:blipFill>
+        <p:spPr>
+          <a:xfrm>
+            <a:off x="1773778" y="2940435"/>
+            <a:ext cx="8644445" cy="977130"/>
+          </a:xfrm>
+          <a:prstGeom prst="rect">
+            <a:avLst/>
+          </a:prstGeom>
+        </p:spPr>
+      </p:pic>
+    </p:spTree>
+    <p:extLst>
+      <p:ext uri="{BB962C8B-B14F-4D97-AF65-F5344CB8AC3E}">
+        <p14:creationId xmlns:p14="http://schemas.microsoft.com/office/powerpoint/2010/main" val="99910597"/>
+      </p:ext>
+    </p:extLst>
+  </p:cSld>
+  <p:clrMapOvr>
+    <a:masterClrMapping/>
+  </p:clrMapOvr>
+</p:sld>
+</file>
+
+<file path=ppt/slides/slide12.xml><?xml version="1.0" encoding="utf-8"?>
+<p:sld xmlns:a="http://schemas.openxmlformats.org/drawingml/2006/main" xmlns:r="http://schemas.openxmlformats.org/officeDocument/2006/relationships" xmlns:p="http://schemas.openxmlformats.org/presentationml/2006/main">
+  <p:cSld>
+    <p:spTree>
+      <p:nvGrpSpPr>
+        <p:cNvPr id="1" name=""/>
+        <p:cNvGrpSpPr/>
+        <p:nvPr/>
+      </p:nvGrpSpPr>
+      <p:grpSpPr>
+        <a:xfrm>
+          <a:off x="0" y="0"/>
+          <a:ext cx="0" cy="0"/>
+          <a:chOff x="0" y="0"/>
+          <a:chExt cx="0" cy="0"/>
+        </a:xfrm>
+      </p:grpSpPr>
+      <p:sp>
+        <p:nvSpPr>
+          <p:cNvPr id="2" name="Title 1"/>
+          <p:cNvSpPr>
+            <a:spLocks noGrp="1"/>
+          </p:cNvSpPr>
+          <p:nvPr>
+            <p:ph type="title"/>
+          </p:nvPr>
+        </p:nvSpPr>
+        <p:spPr/>
+        <p:txBody>
+          <a:bodyPr/>
+          <a:lstStyle/>
+          <a:p>
+            <a:r>
+              <a:rPr lang="en-US" dirty="0"/>
+              <a:t>64-bit Logic Shift Right</a:t>
+            </a:r>
+          </a:p>
+        </p:txBody>
+      </p:sp>
+      <p:sp>
+        <p:nvSpPr>
+          <p:cNvPr id="3" name="Slide Number Placeholder 2"/>
+          <p:cNvSpPr>
+            <a:spLocks noGrp="1"/>
+          </p:cNvSpPr>
+          <p:nvPr>
+            <p:ph type="sldNum" sz="quarter" idx="12"/>
+          </p:nvPr>
+        </p:nvSpPr>
+        <p:spPr/>
+        <p:txBody>
+          <a:bodyPr/>
+          <a:lstStyle/>
+          <a:p>
+            <a:fld id="{EA7C8D44-3667-46F6-9772-CC52308E2A7F}" type="slidenum">
+              <a:rPr kumimoji="0" lang="en-US" smtClean="0"/>
+              <a:pPr/>
+              <a:t>12</a:t>
+            </a:fld>
+            <a:endParaRPr kumimoji="0" lang="en-US" dirty="0"/>
+          </a:p>
+        </p:txBody>
+      </p:sp>
+      <p:sp>
+        <p:nvSpPr>
+          <p:cNvPr id="5" name="TextBox 4"/>
+          <p:cNvSpPr txBox="1"/>
+          <p:nvPr/>
+        </p:nvSpPr>
+        <p:spPr>
+          <a:xfrm>
+            <a:off x="1752600" y="1371600"/>
+            <a:ext cx="3245760" cy="369332"/>
+          </a:xfrm>
+          <a:prstGeom prst="rect">
+            <a:avLst/>
+          </a:prstGeom>
+          <a:noFill/>
+        </p:spPr>
+        <p:txBody>
+          <a:bodyPr wrap="none" rtlCol="0">
+            <a:spAutoFit/>
+          </a:bodyPr>
+          <a:lstStyle/>
+          <a:p>
+            <a:r>
+              <a:rPr lang="en-US" dirty="0"/>
+              <a:t>Example of Logic Shift Right by 3</a:t>
+            </a:r>
+          </a:p>
+        </p:txBody>
+      </p:sp>
+      <p:pic>
+        <p:nvPicPr>
+          <p:cNvPr id="1027" name="Picture 3"/>
+          <p:cNvPicPr>
+            <a:picLocks noChangeAspect="1" noChangeArrowheads="1"/>
+          </p:cNvPicPr>
+          <p:nvPr/>
+        </p:nvPicPr>
+        <p:blipFill>
+          <a:blip r:embed="rId2">
+            <a:extLst>
+              <a:ext uri="{28A0092B-C50C-407E-A947-70E740481C1C}">
+                <a14:useLocalDpi xmlns:a14="http://schemas.microsoft.com/office/drawing/2010/main" val="0"/>
+              </a:ext>
+            </a:extLst>
+          </a:blip>
+          <a:srcRect/>
+          <a:stretch>
+            <a:fillRect/>
+          </a:stretch>
+        </p:blipFill>
+        <p:spPr bwMode="auto">
+          <a:xfrm>
+            <a:off x="1524000" y="2295526"/>
+            <a:ext cx="9100256" cy="2581274"/>
+          </a:xfrm>
+          <a:prstGeom prst="rect">
+            <a:avLst/>
+          </a:prstGeom>
+          <a:noFill/>
+          <a:ln>
+            <a:noFill/>
+          </a:ln>
+          <a:extLst>
+            <a:ext uri="{909E8E84-426E-40DD-AFC4-6F175D3DCCD1}">
+              <a14:hiddenFill xmlns:a14="http://schemas.microsoft.com/office/drawing/2010/main">
+                <a:solidFill>
+                  <a:schemeClr val="accent1"/>
+                </a:solidFill>
+              </a14:hiddenFill>
+            </a:ext>
+            <a:ext uri="{91240B29-F687-4F45-9708-019B960494DF}">
+              <a14:hiddenLine xmlns:a14="http://schemas.microsoft.com/office/drawing/2010/main" w="9525">
+                <a:solidFill>
+                  <a:schemeClr val="tx1"/>
+                </a:solidFill>
+                <a:miter lim="800000"/>
+                <a:headEnd/>
+                <a:tailEnd/>
+              </a14:hiddenLine>
+            </a:ext>
+          </a:extLst>
+        </p:spPr>
+      </p:pic>
+    </p:spTree>
+    <p:extLst>
+      <p:ext uri="{BB962C8B-B14F-4D97-AF65-F5344CB8AC3E}">
+        <p14:creationId xmlns:p14="http://schemas.microsoft.com/office/powerpoint/2010/main" val="712390701"/>
+      </p:ext>
+    </p:extLst>
+  </p:cSld>
+  <p:clrMapOvr>
+    <a:masterClrMapping/>
+  </p:clrMapOvr>
+</p:sld>
+</file>
+
+<file path=ppt/slides/slide13.xml><?xml version="1.0" encoding="utf-8"?>
+<p:sld xmlns:a="http://schemas.openxmlformats.org/drawingml/2006/main" xmlns:r="http://schemas.openxmlformats.org/officeDocument/2006/relationships" xmlns:p="http://schemas.openxmlformats.org/presentationml/2006/main">
+  <p:cSld>
+    <p:spTree>
+      <p:nvGrpSpPr>
+        <p:cNvPr id="1" name=""/>
+        <p:cNvGrpSpPr/>
+        <p:nvPr/>
+      </p:nvGrpSpPr>
+      <p:grpSpPr>
+        <a:xfrm>
+          <a:off x="0" y="0"/>
+          <a:ext cx="0" cy="0"/>
+          <a:chOff x="0" y="0"/>
+          <a:chExt cx="0" cy="0"/>
+        </a:xfrm>
+      </p:grpSpPr>
+      <p:sp>
+        <p:nvSpPr>
+          <p:cNvPr id="2" name="Title 1"/>
+          <p:cNvSpPr>
+            <a:spLocks noGrp="1"/>
+          </p:cNvSpPr>
+          <p:nvPr>
+            <p:ph type="title"/>
+          </p:nvPr>
+        </p:nvSpPr>
+        <p:spPr/>
+        <p:txBody>
+          <a:bodyPr/>
+          <a:lstStyle/>
+          <a:p>
+            <a:r>
+              <a:rPr lang="en-US" dirty="0"/>
+              <a:t>64-bit Logic Shift Right</a:t>
+            </a:r>
+          </a:p>
+        </p:txBody>
+      </p:sp>
+      <p:sp>
+        <p:nvSpPr>
+          <p:cNvPr id="3" name="Slide Number Placeholder 2"/>
+          <p:cNvSpPr>
+            <a:spLocks noGrp="1"/>
+          </p:cNvSpPr>
+          <p:nvPr>
+            <p:ph type="sldNum" sz="quarter" idx="12"/>
+          </p:nvPr>
+        </p:nvSpPr>
+        <p:spPr/>
+        <p:txBody>
+          <a:bodyPr/>
+          <a:lstStyle/>
+          <a:p>
+            <a:fld id="{EA7C8D44-3667-46F6-9772-CC52308E2A7F}" type="slidenum">
+              <a:rPr kumimoji="0" lang="en-US" smtClean="0"/>
+              <a:pPr/>
+              <a:t>13</a:t>
+            </a:fld>
+            <a:endParaRPr kumimoji="0" lang="en-US" dirty="0"/>
+          </a:p>
+        </p:txBody>
+      </p:sp>
+      <p:pic>
+        <p:nvPicPr>
+          <p:cNvPr id="1027" name="Picture 3"/>
+          <p:cNvPicPr>
+            <a:picLocks noChangeAspect="1" noChangeArrowheads="1"/>
+          </p:cNvPicPr>
+          <p:nvPr/>
+        </p:nvPicPr>
+        <p:blipFill>
+          <a:blip r:embed="rId2" cstate="print">
+            <a:extLst>
+              <a:ext uri="{28A0092B-C50C-407E-A947-70E740481C1C}">
+                <a14:useLocalDpi xmlns:a14="http://schemas.microsoft.com/office/drawing/2010/main" val="0"/>
+              </a:ext>
+            </a:extLst>
+          </a:blip>
+          <a:srcRect/>
+          <a:stretch>
+            <a:fillRect/>
+          </a:stretch>
+        </p:blipFill>
+        <p:spPr bwMode="auto">
+          <a:xfrm>
+            <a:off x="2590800" y="1371600"/>
+            <a:ext cx="7010400" cy="1988489"/>
+          </a:xfrm>
+          <a:prstGeom prst="rect">
+            <a:avLst/>
+          </a:prstGeom>
+          <a:noFill/>
+          <a:ln>
+            <a:noFill/>
+          </a:ln>
+          <a:extLst>
+            <a:ext uri="{909E8E84-426E-40DD-AFC4-6F175D3DCCD1}">
+              <a14:hiddenFill xmlns:a14="http://schemas.microsoft.com/office/drawing/2010/main">
+                <a:solidFill>
+                  <a:schemeClr val="accent1"/>
+                </a:solidFill>
+              </a14:hiddenFill>
+            </a:ext>
+            <a:ext uri="{91240B29-F687-4F45-9708-019B960494DF}">
+              <a14:hiddenLine xmlns:a14="http://schemas.microsoft.com/office/drawing/2010/main" w="9525">
+                <a:solidFill>
+                  <a:schemeClr val="tx1"/>
+                </a:solidFill>
+                <a:miter lim="800000"/>
+                <a:headEnd/>
+                <a:tailEnd/>
+              </a14:hiddenLine>
+            </a:ext>
+          </a:extLst>
+        </p:spPr>
+      </p:pic>
+      <p:sp>
+        <p:nvSpPr>
+          <p:cNvPr id="4" name="Content Placeholder 3">
+            <a:extLst>
+              <a:ext uri="{FF2B5EF4-FFF2-40B4-BE49-F238E27FC236}">
+                <a16:creationId xmlns:a16="http://schemas.microsoft.com/office/drawing/2014/main" id="{91D3B00B-1004-E202-E411-07D70B1B5B0E}"/>
+              </a:ext>
+            </a:extLst>
+          </p:cNvPr>
+          <p:cNvSpPr>
+            <a:spLocks noGrp="1"/>
+          </p:cNvSpPr>
+          <p:nvPr>
+            <p:ph sz="quarter" idx="1"/>
+          </p:nvPr>
+        </p:nvSpPr>
+        <p:spPr>
+          <a:xfrm>
+            <a:off x="635000" y="3563288"/>
+            <a:ext cx="10972800" cy="2761311"/>
+          </a:xfrm>
+        </p:spPr>
+        <p:txBody>
+          <a:bodyPr>
+            <a:normAutofit lnSpcReduction="10000"/>
+          </a:bodyPr>
+          <a:lstStyle/>
+          <a:p>
+            <a:r>
+              <a:rPr lang="en-US" dirty="0"/>
+              <a:t>Write the assembly code</a:t>
+            </a:r>
+          </a:p>
+          <a:p>
+            <a:pPr marL="274320" lvl="1" indent="0">
+              <a:buNone/>
+            </a:pPr>
+            <a:r>
+              <a:rPr lang="en-US" dirty="0">
+                <a:latin typeface="Consolas" panose="020B0609020204030204" pitchFamily="49" charset="0"/>
+              </a:rPr>
+              <a:t>; r0 = Lower word of 64-bit data</a:t>
+            </a:r>
+          </a:p>
+          <a:p>
+            <a:pPr marL="274320" lvl="1" indent="0">
+              <a:buNone/>
+            </a:pPr>
+            <a:r>
+              <a:rPr lang="en-US" dirty="0">
+                <a:latin typeface="Consolas" panose="020B0609020204030204" pitchFamily="49" charset="0"/>
+              </a:rPr>
+              <a:t>; r1 = Upper word of 64-bit data</a:t>
+            </a:r>
+          </a:p>
+          <a:p>
+            <a:pPr marL="274320" lvl="1" indent="0">
+              <a:buNone/>
+            </a:pPr>
+            <a:r>
+              <a:rPr lang="en-US" b="1" dirty="0">
+                <a:solidFill>
+                  <a:srgbClr val="C00000"/>
+                </a:solidFill>
+                <a:latin typeface="Consolas" panose="020B0609020204030204" pitchFamily="49" charset="0"/>
+              </a:rPr>
+              <a:t>MOV r3, r1              </a:t>
+            </a:r>
+            <a:r>
+              <a:rPr lang="en-US" dirty="0">
+                <a:latin typeface="Consolas" panose="020B0609020204030204" pitchFamily="49" charset="0"/>
+              </a:rPr>
+              <a:t>; Backup the upper word</a:t>
+            </a:r>
+          </a:p>
+          <a:p>
+            <a:pPr marL="274320" lvl="1" indent="0">
+              <a:buNone/>
+            </a:pPr>
+            <a:r>
+              <a:rPr lang="en-US" b="1" dirty="0">
+                <a:solidFill>
+                  <a:srgbClr val="C00000"/>
+                </a:solidFill>
+                <a:latin typeface="Consolas" panose="020B0609020204030204" pitchFamily="49" charset="0"/>
+              </a:rPr>
+              <a:t>MOV r1, r1, LSR #3      </a:t>
+            </a:r>
+            <a:r>
+              <a:rPr lang="en-US" dirty="0">
+                <a:latin typeface="Consolas" panose="020B0609020204030204" pitchFamily="49" charset="0"/>
+              </a:rPr>
+              <a:t>; Shift right upper word</a:t>
+            </a:r>
+          </a:p>
+          <a:p>
+            <a:pPr marL="274320" lvl="1" indent="0">
+              <a:buNone/>
+            </a:pPr>
+            <a:r>
+              <a:rPr lang="en-US" b="1" dirty="0">
+                <a:solidFill>
+                  <a:srgbClr val="C00000"/>
+                </a:solidFill>
+                <a:latin typeface="Consolas" panose="020B0609020204030204" pitchFamily="49" charset="0"/>
+              </a:rPr>
+              <a:t>MOV r0, r0, LSR #3      </a:t>
+            </a:r>
+            <a:r>
+              <a:rPr lang="en-US" dirty="0">
+                <a:latin typeface="Consolas" panose="020B0609020204030204" pitchFamily="49" charset="0"/>
+              </a:rPr>
+              <a:t>; Shift right lower word</a:t>
+            </a:r>
+          </a:p>
+          <a:p>
+            <a:pPr marL="274320" lvl="1" indent="0">
+              <a:buNone/>
+            </a:pPr>
+            <a:r>
+              <a:rPr lang="en-US" b="1" dirty="0">
+                <a:solidFill>
+                  <a:srgbClr val="C00000"/>
+                </a:solidFill>
+                <a:latin typeface="Consolas" panose="020B0609020204030204" pitchFamily="49" charset="0"/>
+              </a:rPr>
+              <a:t>ORR r0, r0, r3, LSL 29  </a:t>
+            </a:r>
+            <a:r>
+              <a:rPr lang="en-US" dirty="0">
+                <a:latin typeface="Consolas" panose="020B0609020204030204" pitchFamily="49" charset="0"/>
+              </a:rPr>
+              <a:t>; lower |= upper &lt;&lt; (32 - 3)</a:t>
+            </a:r>
+          </a:p>
+        </p:txBody>
+      </p:sp>
+      <p:sp>
+        <p:nvSpPr>
+          <p:cNvPr id="6" name="TextBox 5">
+            <a:extLst>
+              <a:ext uri="{FF2B5EF4-FFF2-40B4-BE49-F238E27FC236}">
+                <a16:creationId xmlns:a16="http://schemas.microsoft.com/office/drawing/2014/main" id="{79830566-267C-93CA-7E5A-3D2B1076B92C}"/>
+              </a:ext>
+            </a:extLst>
+          </p:cNvPr>
+          <p:cNvSpPr txBox="1"/>
+          <p:nvPr/>
+        </p:nvSpPr>
+        <p:spPr>
+          <a:xfrm>
+            <a:off x="5683460" y="1186934"/>
+            <a:ext cx="437940" cy="369332"/>
+          </a:xfrm>
+          <a:prstGeom prst="rect">
+            <a:avLst/>
+          </a:prstGeom>
+          <a:noFill/>
+        </p:spPr>
+        <p:txBody>
+          <a:bodyPr wrap="none" rtlCol="0">
+            <a:spAutoFit/>
+          </a:bodyPr>
+          <a:lstStyle/>
+          <a:p>
+            <a:r>
+              <a:rPr lang="en-US" b="1" dirty="0">
+                <a:solidFill>
+                  <a:srgbClr val="0000FF"/>
+                </a:solidFill>
+                <a:latin typeface="Consolas" panose="020B0609020204030204" pitchFamily="49" charset="0"/>
+              </a:rPr>
+              <a:t>r0</a:t>
+            </a:r>
+          </a:p>
+        </p:txBody>
+      </p:sp>
+      <p:sp>
+        <p:nvSpPr>
+          <p:cNvPr id="7" name="TextBox 6">
+            <a:extLst>
+              <a:ext uri="{FF2B5EF4-FFF2-40B4-BE49-F238E27FC236}">
+                <a16:creationId xmlns:a16="http://schemas.microsoft.com/office/drawing/2014/main" id="{8343C1AA-3E98-17B0-B56A-0D87A307675A}"/>
+              </a:ext>
+            </a:extLst>
+          </p:cNvPr>
+          <p:cNvSpPr txBox="1"/>
+          <p:nvPr/>
+        </p:nvSpPr>
+        <p:spPr>
+          <a:xfrm>
+            <a:off x="2483060" y="1186934"/>
+            <a:ext cx="437940" cy="369332"/>
+          </a:xfrm>
+          <a:prstGeom prst="rect">
+            <a:avLst/>
+          </a:prstGeom>
+          <a:noFill/>
+        </p:spPr>
+        <p:txBody>
+          <a:bodyPr wrap="none" rtlCol="0">
+            <a:spAutoFit/>
+          </a:bodyPr>
+          <a:lstStyle/>
+          <a:p>
+            <a:r>
+              <a:rPr lang="en-US" b="1" dirty="0">
+                <a:solidFill>
+                  <a:srgbClr val="0000FF"/>
+                </a:solidFill>
+                <a:latin typeface="Consolas" panose="020B0609020204030204" pitchFamily="49" charset="0"/>
+              </a:rPr>
+              <a:t>r1</a:t>
+            </a:r>
+          </a:p>
+        </p:txBody>
+      </p:sp>
+      <p:sp>
+        <p:nvSpPr>
+          <p:cNvPr id="8" name="TextBox 7">
+            <a:extLst>
+              <a:ext uri="{FF2B5EF4-FFF2-40B4-BE49-F238E27FC236}">
+                <a16:creationId xmlns:a16="http://schemas.microsoft.com/office/drawing/2014/main" id="{AA1B301B-CD63-74B4-1D7D-B98FCF028166}"/>
+              </a:ext>
+            </a:extLst>
+          </p:cNvPr>
+          <p:cNvSpPr txBox="1"/>
+          <p:nvPr/>
+        </p:nvSpPr>
+        <p:spPr>
+          <a:xfrm>
+            <a:off x="5464490" y="3111225"/>
+            <a:ext cx="437940" cy="369332"/>
+          </a:xfrm>
+          <a:prstGeom prst="rect">
+            <a:avLst/>
+          </a:prstGeom>
+          <a:noFill/>
+        </p:spPr>
+        <p:txBody>
+          <a:bodyPr wrap="none" rtlCol="0">
+            <a:spAutoFit/>
+          </a:bodyPr>
+          <a:lstStyle/>
+          <a:p>
+            <a:r>
+              <a:rPr lang="en-US" b="1" dirty="0">
+                <a:solidFill>
+                  <a:srgbClr val="0000FF"/>
+                </a:solidFill>
+                <a:latin typeface="Consolas" panose="020B0609020204030204" pitchFamily="49" charset="0"/>
+              </a:rPr>
+              <a:t>r0</a:t>
+            </a:r>
+          </a:p>
+        </p:txBody>
+      </p:sp>
+      <p:sp>
+        <p:nvSpPr>
+          <p:cNvPr id="9" name="TextBox 8">
+            <a:extLst>
+              <a:ext uri="{FF2B5EF4-FFF2-40B4-BE49-F238E27FC236}">
+                <a16:creationId xmlns:a16="http://schemas.microsoft.com/office/drawing/2014/main" id="{D0DA8B67-4CC2-6901-2C44-577FDE9BF2FF}"/>
+              </a:ext>
+            </a:extLst>
+          </p:cNvPr>
+          <p:cNvSpPr txBox="1"/>
+          <p:nvPr/>
+        </p:nvSpPr>
+        <p:spPr>
+          <a:xfrm>
+            <a:off x="2423793" y="3110046"/>
+            <a:ext cx="437940" cy="369332"/>
+          </a:xfrm>
+          <a:prstGeom prst="rect">
+            <a:avLst/>
+          </a:prstGeom>
+          <a:noFill/>
+        </p:spPr>
+        <p:txBody>
+          <a:bodyPr wrap="none" rtlCol="0">
+            <a:spAutoFit/>
+          </a:bodyPr>
+          <a:lstStyle/>
+          <a:p>
+            <a:r>
+              <a:rPr lang="en-US" b="1" dirty="0">
+                <a:solidFill>
+                  <a:srgbClr val="0000FF"/>
+                </a:solidFill>
+                <a:latin typeface="Consolas" panose="020B0609020204030204" pitchFamily="49" charset="0"/>
+              </a:rPr>
+              <a:t>r1</a:t>
+            </a:r>
+          </a:p>
+        </p:txBody>
+      </p:sp>
+    </p:spTree>
+    <p:extLst>
+      <p:ext uri="{BB962C8B-B14F-4D97-AF65-F5344CB8AC3E}">
+        <p14:creationId xmlns:p14="http://schemas.microsoft.com/office/powerpoint/2010/main" val="984593191"/>
+      </p:ext>
+    </p:extLst>
+  </p:cSld>
+  <p:clrMapOvr>
+    <a:masterClrMapping/>
+  </p:clrMapOvr>
+</p:sld>
+</file>
+
+<file path=ppt/slides/slide14.xml><?xml version="1.0" encoding="utf-8"?>
+<p:sld xmlns:a="http://schemas.openxmlformats.org/drawingml/2006/main" xmlns:r="http://schemas.openxmlformats.org/officeDocument/2006/relationships" xmlns:p="http://schemas.openxmlformats.org/presentationml/2006/main">
+  <p:cSld>
+    <p:spTree>
+      <p:nvGrpSpPr>
+        <p:cNvPr id="1" name=""/>
+        <p:cNvGrpSpPr/>
+        <p:nvPr/>
+      </p:nvGrpSpPr>
+      <p:grpSpPr>
+        <a:xfrm>
+          <a:off x="0" y="0"/>
+          <a:ext cx="0" cy="0"/>
+          <a:chOff x="0" y="0"/>
+          <a:chExt cx="0" cy="0"/>
+        </a:xfrm>
+      </p:grpSpPr>
+      <p:sp>
+        <p:nvSpPr>
+          <p:cNvPr id="2" name="Title 1"/>
+          <p:cNvSpPr>
+            <a:spLocks noGrp="1"/>
+          </p:cNvSpPr>
+          <p:nvPr>
+            <p:ph type="title"/>
+          </p:nvPr>
+        </p:nvSpPr>
+        <p:spPr/>
+        <p:txBody>
+          <a:bodyPr/>
+          <a:lstStyle/>
+          <a:p>
+            <a:r>
+              <a:rPr lang="en-US" dirty="0"/>
+              <a:t>64-bit Multiplication</a:t>
+            </a:r>
+          </a:p>
+        </p:txBody>
+      </p:sp>
+      <p:sp>
+        <p:nvSpPr>
+          <p:cNvPr id="3" name="Slide Number Placeholder 2"/>
+          <p:cNvSpPr>
+            <a:spLocks noGrp="1"/>
+          </p:cNvSpPr>
+          <p:nvPr>
+            <p:ph type="sldNum" sz="quarter" idx="12"/>
+          </p:nvPr>
+        </p:nvSpPr>
+        <p:spPr/>
+        <p:txBody>
+          <a:bodyPr/>
+          <a:lstStyle/>
+          <a:p>
+            <a:fld id="{EA7C8D44-3667-46F6-9772-CC52308E2A7F}" type="slidenum">
+              <a:rPr kumimoji="0" lang="en-US" smtClean="0"/>
+              <a:pPr/>
+              <a:t>14</a:t>
+            </a:fld>
+            <a:endParaRPr kumimoji="0" lang="en-US" dirty="0"/>
+          </a:p>
+        </p:txBody>
+      </p:sp>
+      <p:sp>
+        <p:nvSpPr>
+          <p:cNvPr id="4" name="Content Placeholder 3"/>
+          <p:cNvSpPr>
+            <a:spLocks noGrp="1"/>
+          </p:cNvSpPr>
+          <p:nvPr>
+            <p:ph sz="quarter" idx="1"/>
+          </p:nvPr>
+        </p:nvSpPr>
+        <p:spPr>
+          <a:xfrm>
+            <a:off x="2006301" y="1152862"/>
+            <a:ext cx="8229600" cy="2123739"/>
+          </a:xfrm>
+        </p:spPr>
+        <p:style>
+          <a:lnRef idx="2">
+            <a:schemeClr val="accent1"/>
+          </a:lnRef>
+          <a:fillRef idx="1">
+            <a:schemeClr val="lt1"/>
+          </a:fillRef>
+          <a:effectRef idx="0">
+            <a:schemeClr val="accent1"/>
+          </a:effectRef>
+          <a:fontRef idx="minor">
+            <a:schemeClr val="dk1"/>
+          </a:fontRef>
+        </p:style>
+        <p:txBody>
+          <a:bodyPr>
+            <a:normAutofit lnSpcReduction="10000"/>
+          </a:bodyPr>
+          <a:lstStyle/>
+          <a:p>
+            <a:pPr marL="0" indent="0">
+              <a:buNone/>
+            </a:pPr>
+            <a:r>
+              <a:rPr lang="en-US" sz="1600" b="1" dirty="0">
+                <a:solidFill>
+                  <a:schemeClr val="bg1">
+                    <a:lumMod val="50000"/>
+                  </a:schemeClr>
+                </a:solidFill>
+                <a:latin typeface="Consolas" panose="020B0609020204030204" pitchFamily="49" charset="0"/>
+                <a:cs typeface="Consolas" panose="020B0609020204030204" pitchFamily="49" charset="0"/>
+              </a:rPr>
+              <a:t>  ; product (</a:t>
+            </a:r>
+            <a:r>
+              <a:rPr lang="en-US" sz="1600" b="1" dirty="0" err="1">
+                <a:solidFill>
+                  <a:schemeClr val="bg1">
+                    <a:lumMod val="50000"/>
+                  </a:schemeClr>
+                </a:solidFill>
+                <a:latin typeface="Consolas" panose="020B0609020204030204" pitchFamily="49" charset="0"/>
+                <a:cs typeface="Consolas" panose="020B0609020204030204" pitchFamily="49" charset="0"/>
+              </a:rPr>
+              <a:t>r5:r4</a:t>
+            </a:r>
+            <a:r>
+              <a:rPr lang="en-US" sz="1600" b="1" dirty="0">
+                <a:solidFill>
+                  <a:schemeClr val="bg1">
+                    <a:lumMod val="50000"/>
+                  </a:schemeClr>
+                </a:solidFill>
+                <a:latin typeface="Consolas" panose="020B0609020204030204" pitchFamily="49" charset="0"/>
+                <a:cs typeface="Consolas" panose="020B0609020204030204" pitchFamily="49" charset="0"/>
+              </a:rPr>
+              <a:t>) = multiplier (</a:t>
+            </a:r>
+            <a:r>
+              <a:rPr lang="en-US" sz="1600" b="1" dirty="0" err="1">
+                <a:solidFill>
+                  <a:schemeClr val="bg1">
+                    <a:lumMod val="50000"/>
+                  </a:schemeClr>
+                </a:solidFill>
+                <a:latin typeface="Consolas" panose="020B0609020204030204" pitchFamily="49" charset="0"/>
+                <a:cs typeface="Consolas" panose="020B0609020204030204" pitchFamily="49" charset="0"/>
+              </a:rPr>
+              <a:t>r1:r0</a:t>
+            </a:r>
+            <a:r>
+              <a:rPr lang="en-US" sz="1600" b="1" dirty="0">
+                <a:solidFill>
+                  <a:schemeClr val="bg1">
+                    <a:lumMod val="50000"/>
+                  </a:schemeClr>
+                </a:solidFill>
+                <a:latin typeface="Consolas" panose="020B0609020204030204" pitchFamily="49" charset="0"/>
+                <a:cs typeface="Consolas" panose="020B0609020204030204" pitchFamily="49" charset="0"/>
+              </a:rPr>
+              <a:t>) × multiplicand (</a:t>
+            </a:r>
+            <a:r>
+              <a:rPr lang="en-US" sz="1600" b="1" dirty="0" err="1">
+                <a:solidFill>
+                  <a:schemeClr val="bg1">
+                    <a:lumMod val="50000"/>
+                  </a:schemeClr>
+                </a:solidFill>
+                <a:latin typeface="Consolas" panose="020B0609020204030204" pitchFamily="49" charset="0"/>
+                <a:cs typeface="Consolas" panose="020B0609020204030204" pitchFamily="49" charset="0"/>
+              </a:rPr>
+              <a:t>r3:r2</a:t>
+            </a:r>
+            <a:r>
+              <a:rPr lang="en-US" sz="1600" b="1" dirty="0">
+                <a:solidFill>
+                  <a:schemeClr val="bg1">
+                    <a:lumMod val="50000"/>
+                  </a:schemeClr>
+                </a:solidFill>
+                <a:latin typeface="Consolas" panose="020B0609020204030204" pitchFamily="49" charset="0"/>
+                <a:cs typeface="Consolas" panose="020B0609020204030204" pitchFamily="49" charset="0"/>
+              </a:rPr>
+              <a:t>) </a:t>
+            </a:r>
+          </a:p>
+          <a:p>
+            <a:pPr marL="0" indent="0">
+              <a:buNone/>
+            </a:pPr>
+            <a:r>
+              <a:rPr lang="en-US" sz="1600" b="1" dirty="0">
+                <a:solidFill>
+                  <a:schemeClr val="bg1">
+                    <a:lumMod val="50000"/>
+                  </a:schemeClr>
+                </a:solidFill>
+                <a:latin typeface="Consolas" panose="020B0609020204030204" pitchFamily="49" charset="0"/>
+                <a:cs typeface="Consolas" panose="020B0609020204030204" pitchFamily="49" charset="0"/>
+              </a:rPr>
+              <a:t>  ; (</a:t>
+            </a:r>
+            <a:r>
+              <a:rPr lang="en-US" sz="1600" b="1" dirty="0" err="1">
+                <a:solidFill>
+                  <a:schemeClr val="bg1">
+                    <a:lumMod val="50000"/>
+                  </a:schemeClr>
+                </a:solidFill>
+                <a:latin typeface="Consolas" panose="020B0609020204030204" pitchFamily="49" charset="0"/>
+                <a:cs typeface="Consolas" panose="020B0609020204030204" pitchFamily="49" charset="0"/>
+              </a:rPr>
+              <a:t>r5:r4</a:t>
+            </a:r>
+            <a:r>
+              <a:rPr lang="en-US" sz="1600" b="1" dirty="0">
+                <a:solidFill>
+                  <a:schemeClr val="bg1">
+                    <a:lumMod val="50000"/>
+                  </a:schemeClr>
+                </a:solidFill>
+                <a:latin typeface="Consolas" panose="020B0609020204030204" pitchFamily="49" charset="0"/>
+                <a:cs typeface="Consolas" panose="020B0609020204030204" pitchFamily="49" charset="0"/>
+              </a:rPr>
+              <a:t>) = </a:t>
+            </a:r>
+            <a:r>
+              <a:rPr lang="en-US" sz="1600" b="1" dirty="0" err="1">
+                <a:solidFill>
+                  <a:schemeClr val="bg1">
+                    <a:lumMod val="50000"/>
+                  </a:schemeClr>
+                </a:solidFill>
+                <a:latin typeface="Consolas" panose="020B0609020204030204" pitchFamily="49" charset="0"/>
+                <a:cs typeface="Consolas" panose="020B0609020204030204" pitchFamily="49" charset="0"/>
+              </a:rPr>
+              <a:t>r0</a:t>
+            </a:r>
+            <a:r>
+              <a:rPr lang="en-US" sz="1600" b="1" dirty="0">
+                <a:solidFill>
+                  <a:schemeClr val="bg1">
+                    <a:lumMod val="50000"/>
+                  </a:schemeClr>
+                </a:solidFill>
+                <a:latin typeface="Consolas" panose="020B0609020204030204" pitchFamily="49" charset="0"/>
+                <a:cs typeface="Consolas" panose="020B0609020204030204" pitchFamily="49" charset="0"/>
+              </a:rPr>
+              <a:t> × </a:t>
+            </a:r>
+            <a:r>
+              <a:rPr lang="en-US" sz="1600" b="1" dirty="0" err="1">
+                <a:solidFill>
+                  <a:schemeClr val="bg1">
+                    <a:lumMod val="50000"/>
+                  </a:schemeClr>
+                </a:solidFill>
+                <a:latin typeface="Consolas" panose="020B0609020204030204" pitchFamily="49" charset="0"/>
+                <a:cs typeface="Consolas" panose="020B0609020204030204" pitchFamily="49" charset="0"/>
+              </a:rPr>
+              <a:t>r2</a:t>
+            </a:r>
+            <a:r>
+              <a:rPr lang="en-US" sz="1600" b="1" dirty="0">
+                <a:solidFill>
+                  <a:schemeClr val="bg1">
+                    <a:lumMod val="50000"/>
+                  </a:schemeClr>
+                </a:solidFill>
+                <a:latin typeface="Consolas" panose="020B0609020204030204" pitchFamily="49" charset="0"/>
+                <a:cs typeface="Consolas" panose="020B0609020204030204" pitchFamily="49" charset="0"/>
+              </a:rPr>
+              <a:t> + 2</a:t>
+            </a:r>
+            <a:r>
+              <a:rPr lang="en-US" sz="1600" b="1" baseline="30000" dirty="0">
+                <a:solidFill>
+                  <a:schemeClr val="bg1">
+                    <a:lumMod val="50000"/>
+                  </a:schemeClr>
+                </a:solidFill>
+                <a:latin typeface="Consolas" panose="020B0609020204030204" pitchFamily="49" charset="0"/>
+                <a:cs typeface="Consolas" panose="020B0609020204030204" pitchFamily="49" charset="0"/>
+              </a:rPr>
+              <a:t>32 </a:t>
+            </a:r>
+            <a:r>
+              <a:rPr lang="en-US" sz="1600" b="1" dirty="0">
+                <a:solidFill>
+                  <a:schemeClr val="bg1">
+                    <a:lumMod val="50000"/>
+                  </a:schemeClr>
+                </a:solidFill>
+                <a:latin typeface="Consolas" panose="020B0609020204030204" pitchFamily="49" charset="0"/>
+                <a:cs typeface="Consolas" panose="020B0609020204030204" pitchFamily="49" charset="0"/>
+              </a:rPr>
+              <a:t>× (</a:t>
+            </a:r>
+            <a:r>
+              <a:rPr lang="en-US" sz="1600" b="1" dirty="0" err="1">
+                <a:solidFill>
+                  <a:schemeClr val="bg1">
+                    <a:lumMod val="50000"/>
+                  </a:schemeClr>
+                </a:solidFill>
+                <a:latin typeface="Consolas" panose="020B0609020204030204" pitchFamily="49" charset="0"/>
+                <a:cs typeface="Consolas" panose="020B0609020204030204" pitchFamily="49" charset="0"/>
+              </a:rPr>
+              <a:t>r1</a:t>
+            </a:r>
+            <a:r>
+              <a:rPr lang="en-US" sz="1600" b="1" dirty="0">
+                <a:solidFill>
+                  <a:schemeClr val="bg1">
+                    <a:lumMod val="50000"/>
+                  </a:schemeClr>
+                </a:solidFill>
+                <a:latin typeface="Consolas" panose="020B0609020204030204" pitchFamily="49" charset="0"/>
+                <a:cs typeface="Consolas" panose="020B0609020204030204" pitchFamily="49" charset="0"/>
+              </a:rPr>
+              <a:t> × </a:t>
+            </a:r>
+            <a:r>
+              <a:rPr lang="en-US" sz="1600" b="1" dirty="0" err="1">
+                <a:solidFill>
+                  <a:schemeClr val="bg1">
+                    <a:lumMod val="50000"/>
+                  </a:schemeClr>
+                </a:solidFill>
+                <a:latin typeface="Consolas" panose="020B0609020204030204" pitchFamily="49" charset="0"/>
+                <a:cs typeface="Consolas" panose="020B0609020204030204" pitchFamily="49" charset="0"/>
+              </a:rPr>
+              <a:t>r2</a:t>
+            </a:r>
+            <a:r>
+              <a:rPr lang="en-US" sz="1600" b="1" dirty="0">
+                <a:solidFill>
+                  <a:schemeClr val="bg1">
+                    <a:lumMod val="50000"/>
+                  </a:schemeClr>
+                </a:solidFill>
+                <a:latin typeface="Consolas" panose="020B0609020204030204" pitchFamily="49" charset="0"/>
+                <a:cs typeface="Consolas" panose="020B0609020204030204" pitchFamily="49" charset="0"/>
+              </a:rPr>
+              <a:t> + </a:t>
+            </a:r>
+            <a:r>
+              <a:rPr lang="en-US" sz="1600" b="1" dirty="0" err="1">
+                <a:solidFill>
+                  <a:schemeClr val="bg1">
+                    <a:lumMod val="50000"/>
+                  </a:schemeClr>
+                </a:solidFill>
+                <a:latin typeface="Consolas" panose="020B0609020204030204" pitchFamily="49" charset="0"/>
+                <a:cs typeface="Consolas" panose="020B0609020204030204" pitchFamily="49" charset="0"/>
+              </a:rPr>
+              <a:t>r0</a:t>
+            </a:r>
+            <a:r>
+              <a:rPr lang="en-US" sz="1600" b="1" dirty="0">
+                <a:solidFill>
+                  <a:schemeClr val="bg1">
+                    <a:lumMod val="50000"/>
+                  </a:schemeClr>
+                </a:solidFill>
+                <a:latin typeface="Consolas" panose="020B0609020204030204" pitchFamily="49" charset="0"/>
+                <a:cs typeface="Consolas" panose="020B0609020204030204" pitchFamily="49" charset="0"/>
+              </a:rPr>
+              <a:t> × </a:t>
+            </a:r>
+            <a:r>
+              <a:rPr lang="en-US" sz="1600" b="1" dirty="0" err="1">
+                <a:solidFill>
+                  <a:schemeClr val="bg1">
+                    <a:lumMod val="50000"/>
+                  </a:schemeClr>
+                </a:solidFill>
+                <a:latin typeface="Consolas" panose="020B0609020204030204" pitchFamily="49" charset="0"/>
+                <a:cs typeface="Consolas" panose="020B0609020204030204" pitchFamily="49" charset="0"/>
+              </a:rPr>
+              <a:t>r3</a:t>
+            </a:r>
+            <a:r>
+              <a:rPr lang="en-US" sz="1600" b="1" dirty="0">
+                <a:solidFill>
+                  <a:schemeClr val="bg1">
+                    <a:lumMod val="50000"/>
+                  </a:schemeClr>
+                </a:solidFill>
+                <a:latin typeface="Consolas" panose="020B0609020204030204" pitchFamily="49" charset="0"/>
+                <a:cs typeface="Consolas" panose="020B0609020204030204" pitchFamily="49" charset="0"/>
+              </a:rPr>
+              <a:t>) + 2</a:t>
+            </a:r>
+            <a:r>
+              <a:rPr lang="en-US" sz="1600" b="1" baseline="30000" dirty="0">
+                <a:solidFill>
+                  <a:schemeClr val="bg1">
+                    <a:lumMod val="50000"/>
+                  </a:schemeClr>
+                </a:solidFill>
+                <a:latin typeface="Consolas" panose="020B0609020204030204" pitchFamily="49" charset="0"/>
+                <a:cs typeface="Consolas" panose="020B0609020204030204" pitchFamily="49" charset="0"/>
+              </a:rPr>
+              <a:t>64</a:t>
+            </a:r>
+            <a:r>
+              <a:rPr lang="en-US" sz="1600" b="1" dirty="0">
+                <a:solidFill>
+                  <a:schemeClr val="bg1">
+                    <a:lumMod val="50000"/>
+                  </a:schemeClr>
+                </a:solidFill>
+                <a:latin typeface="Consolas" panose="020B0609020204030204" pitchFamily="49" charset="0"/>
+                <a:cs typeface="Consolas" panose="020B0609020204030204" pitchFamily="49" charset="0"/>
+              </a:rPr>
+              <a:t> × </a:t>
+            </a:r>
+            <a:r>
+              <a:rPr lang="en-US" sz="1600" b="1" dirty="0" err="1">
+                <a:solidFill>
+                  <a:schemeClr val="bg1">
+                    <a:lumMod val="50000"/>
+                  </a:schemeClr>
+                </a:solidFill>
+                <a:latin typeface="Consolas" panose="020B0609020204030204" pitchFamily="49" charset="0"/>
+                <a:cs typeface="Consolas" panose="020B0609020204030204" pitchFamily="49" charset="0"/>
+              </a:rPr>
+              <a:t>r1</a:t>
+            </a:r>
+            <a:r>
+              <a:rPr lang="en-US" sz="1600" b="1" dirty="0">
+                <a:solidFill>
+                  <a:schemeClr val="bg1">
+                    <a:lumMod val="50000"/>
+                  </a:schemeClr>
+                </a:solidFill>
+                <a:latin typeface="Consolas" panose="020B0609020204030204" pitchFamily="49" charset="0"/>
+                <a:cs typeface="Consolas" panose="020B0609020204030204" pitchFamily="49" charset="0"/>
+              </a:rPr>
+              <a:t> × </a:t>
+            </a:r>
+            <a:r>
+              <a:rPr lang="en-US" sz="1600" b="1" dirty="0" err="1">
+                <a:solidFill>
+                  <a:schemeClr val="bg1">
+                    <a:lumMod val="50000"/>
+                  </a:schemeClr>
+                </a:solidFill>
+                <a:latin typeface="Consolas" panose="020B0609020204030204" pitchFamily="49" charset="0"/>
+                <a:cs typeface="Consolas" panose="020B0609020204030204" pitchFamily="49" charset="0"/>
+              </a:rPr>
+              <a:t>r3</a:t>
+            </a:r>
+            <a:endParaRPr lang="en-US" sz="1600" b="1" dirty="0">
+              <a:solidFill>
+                <a:schemeClr val="bg1">
+                  <a:lumMod val="50000"/>
+                </a:schemeClr>
+              </a:solidFill>
+              <a:latin typeface="Consolas" panose="020B0609020204030204" pitchFamily="49" charset="0"/>
+              <a:cs typeface="Consolas" panose="020B0609020204030204" pitchFamily="49" charset="0"/>
+            </a:endParaRPr>
+          </a:p>
+          <a:p>
+            <a:pPr marL="0" indent="0">
+              <a:buNone/>
+            </a:pPr>
+            <a:r>
+              <a:rPr lang="en-US" sz="1600" b="1" dirty="0">
+                <a:solidFill>
+                  <a:schemeClr val="bg1">
+                    <a:lumMod val="50000"/>
+                  </a:schemeClr>
+                </a:solidFill>
+                <a:latin typeface="Consolas" panose="020B0609020204030204" pitchFamily="49" charset="0"/>
+                <a:cs typeface="Consolas" panose="020B0609020204030204" pitchFamily="49" charset="0"/>
+              </a:rPr>
+              <a:t>  ; The last item exceeds 64 bits and thus it is ignored.</a:t>
+            </a:r>
+          </a:p>
+          <a:p>
+            <a:pPr marL="0" indent="0">
+              <a:buNone/>
+            </a:pPr>
+            <a:r>
+              <a:rPr lang="en-US" sz="1600" b="1" dirty="0">
+                <a:latin typeface="Consolas" panose="020B0609020204030204" pitchFamily="49" charset="0"/>
+                <a:cs typeface="Consolas" panose="020B0609020204030204" pitchFamily="49" charset="0"/>
+              </a:rPr>
+              <a:t> </a:t>
+            </a:r>
+          </a:p>
+          <a:p>
+            <a:pPr marL="0" indent="0">
+              <a:buNone/>
+            </a:pPr>
+            <a:r>
+              <a:rPr lang="en-US" sz="1600" b="1" dirty="0">
+                <a:latin typeface="Consolas" panose="020B0609020204030204" pitchFamily="49" charset="0"/>
+                <a:cs typeface="Consolas" panose="020B0609020204030204" pitchFamily="49" charset="0"/>
+              </a:rPr>
+              <a:t>  </a:t>
+            </a:r>
+            <a:r>
+              <a:rPr lang="en-US" sz="1600" b="1" dirty="0" err="1">
+                <a:solidFill>
+                  <a:srgbClr val="C00000"/>
+                </a:solidFill>
+                <a:latin typeface="Consolas" panose="020B0609020204030204" pitchFamily="49" charset="0"/>
+                <a:cs typeface="Consolas" panose="020B0609020204030204" pitchFamily="49" charset="0"/>
+              </a:rPr>
+              <a:t>UMULL</a:t>
+            </a:r>
+            <a:r>
+              <a:rPr lang="en-US" sz="1600" b="1" dirty="0">
+                <a:solidFill>
+                  <a:srgbClr val="C00000"/>
+                </a:solidFill>
+                <a:latin typeface="Consolas" panose="020B0609020204030204" pitchFamily="49" charset="0"/>
+                <a:cs typeface="Consolas" panose="020B0609020204030204" pitchFamily="49" charset="0"/>
+              </a:rPr>
+              <a:t> </a:t>
+            </a:r>
+            <a:r>
+              <a:rPr lang="en-US" sz="1600" b="1" dirty="0" err="1">
+                <a:solidFill>
+                  <a:srgbClr val="C00000"/>
+                </a:solidFill>
+                <a:latin typeface="Consolas" panose="020B0609020204030204" pitchFamily="49" charset="0"/>
+                <a:cs typeface="Consolas" panose="020B0609020204030204" pitchFamily="49" charset="0"/>
+              </a:rPr>
+              <a:t>r4</a:t>
+            </a:r>
+            <a:r>
+              <a:rPr lang="en-US" sz="1600" b="1" dirty="0">
+                <a:solidFill>
+                  <a:srgbClr val="C00000"/>
+                </a:solidFill>
+                <a:latin typeface="Consolas" panose="020B0609020204030204" pitchFamily="49" charset="0"/>
+                <a:cs typeface="Consolas" panose="020B0609020204030204" pitchFamily="49" charset="0"/>
+              </a:rPr>
+              <a:t>, </a:t>
+            </a:r>
+            <a:r>
+              <a:rPr lang="en-US" sz="1600" b="1" dirty="0" err="1">
+                <a:solidFill>
+                  <a:srgbClr val="C00000"/>
+                </a:solidFill>
+                <a:latin typeface="Consolas" panose="020B0609020204030204" pitchFamily="49" charset="0"/>
+                <a:cs typeface="Consolas" panose="020B0609020204030204" pitchFamily="49" charset="0"/>
+              </a:rPr>
+              <a:t>r5</a:t>
+            </a:r>
+            <a:r>
+              <a:rPr lang="en-US" sz="1600" b="1" dirty="0">
+                <a:solidFill>
+                  <a:srgbClr val="C00000"/>
+                </a:solidFill>
+                <a:latin typeface="Consolas" panose="020B0609020204030204" pitchFamily="49" charset="0"/>
+                <a:cs typeface="Consolas" panose="020B0609020204030204" pitchFamily="49" charset="0"/>
+              </a:rPr>
+              <a:t>, </a:t>
+            </a:r>
+            <a:r>
+              <a:rPr lang="en-US" sz="1600" b="1" dirty="0" err="1">
+                <a:solidFill>
+                  <a:srgbClr val="C00000"/>
+                </a:solidFill>
+                <a:latin typeface="Consolas" panose="020B0609020204030204" pitchFamily="49" charset="0"/>
+                <a:cs typeface="Consolas" panose="020B0609020204030204" pitchFamily="49" charset="0"/>
+              </a:rPr>
+              <a:t>r0</a:t>
+            </a:r>
+            <a:r>
+              <a:rPr lang="en-US" sz="1600" b="1" dirty="0">
+                <a:solidFill>
+                  <a:srgbClr val="C00000"/>
+                </a:solidFill>
+                <a:latin typeface="Consolas" panose="020B0609020204030204" pitchFamily="49" charset="0"/>
+                <a:cs typeface="Consolas" panose="020B0609020204030204" pitchFamily="49" charset="0"/>
+              </a:rPr>
+              <a:t>, </a:t>
+            </a:r>
+            <a:r>
+              <a:rPr lang="en-US" sz="1600" b="1" dirty="0" err="1">
+                <a:solidFill>
+                  <a:srgbClr val="C00000"/>
+                </a:solidFill>
+                <a:latin typeface="Consolas" panose="020B0609020204030204" pitchFamily="49" charset="0"/>
+                <a:cs typeface="Consolas" panose="020B0609020204030204" pitchFamily="49" charset="0"/>
+              </a:rPr>
+              <a:t>r2</a:t>
+            </a:r>
+            <a:r>
+              <a:rPr lang="en-US" sz="1600" b="1" dirty="0">
+                <a:solidFill>
+                  <a:srgbClr val="C00000"/>
+                </a:solidFill>
+                <a:latin typeface="Consolas" panose="020B0609020204030204" pitchFamily="49" charset="0"/>
+                <a:cs typeface="Consolas" panose="020B0609020204030204" pitchFamily="49" charset="0"/>
+              </a:rPr>
+              <a:t>    </a:t>
+            </a:r>
+            <a:r>
+              <a:rPr lang="en-US" sz="1600" b="1" dirty="0">
+                <a:solidFill>
+                  <a:schemeClr val="bg1">
+                    <a:lumMod val="50000"/>
+                  </a:schemeClr>
+                </a:solidFill>
+                <a:latin typeface="Consolas" panose="020B0609020204030204" pitchFamily="49" charset="0"/>
+                <a:cs typeface="Consolas" panose="020B0609020204030204" pitchFamily="49" charset="0"/>
+              </a:rPr>
+              <a:t>; (</a:t>
+            </a:r>
+            <a:r>
+              <a:rPr lang="en-US" sz="1600" b="1" dirty="0" err="1">
+                <a:solidFill>
+                  <a:schemeClr val="bg1">
+                    <a:lumMod val="50000"/>
+                  </a:schemeClr>
+                </a:solidFill>
+                <a:latin typeface="Consolas" panose="020B0609020204030204" pitchFamily="49" charset="0"/>
+                <a:cs typeface="Consolas" panose="020B0609020204030204" pitchFamily="49" charset="0"/>
+              </a:rPr>
+              <a:t>r5:r4</a:t>
+            </a:r>
+            <a:r>
+              <a:rPr lang="en-US" sz="1600" b="1" dirty="0">
+                <a:solidFill>
+                  <a:schemeClr val="bg1">
+                    <a:lumMod val="50000"/>
+                  </a:schemeClr>
+                </a:solidFill>
+                <a:latin typeface="Consolas" panose="020B0609020204030204" pitchFamily="49" charset="0"/>
+                <a:cs typeface="Consolas" panose="020B0609020204030204" pitchFamily="49" charset="0"/>
+              </a:rPr>
+              <a:t>) = </a:t>
+            </a:r>
+            <a:r>
+              <a:rPr lang="en-US" sz="1600" b="1" dirty="0" err="1">
+                <a:solidFill>
+                  <a:schemeClr val="bg1">
+                    <a:lumMod val="50000"/>
+                  </a:schemeClr>
+                </a:solidFill>
+                <a:latin typeface="Consolas" panose="020B0609020204030204" pitchFamily="49" charset="0"/>
+                <a:cs typeface="Consolas" panose="020B0609020204030204" pitchFamily="49" charset="0"/>
+              </a:rPr>
+              <a:t>r0</a:t>
+            </a:r>
+            <a:r>
+              <a:rPr lang="en-US" sz="1600" b="1" dirty="0">
+                <a:solidFill>
+                  <a:schemeClr val="bg1">
+                    <a:lumMod val="50000"/>
+                  </a:schemeClr>
+                </a:solidFill>
+                <a:latin typeface="Consolas" panose="020B0609020204030204" pitchFamily="49" charset="0"/>
+                <a:cs typeface="Consolas" panose="020B0609020204030204" pitchFamily="49" charset="0"/>
+              </a:rPr>
+              <a:t> * </a:t>
+            </a:r>
+            <a:r>
+              <a:rPr lang="en-US" sz="1600" b="1" dirty="0" err="1">
+                <a:solidFill>
+                  <a:schemeClr val="bg1">
+                    <a:lumMod val="50000"/>
+                  </a:schemeClr>
+                </a:solidFill>
+                <a:latin typeface="Consolas" panose="020B0609020204030204" pitchFamily="49" charset="0"/>
+                <a:cs typeface="Consolas" panose="020B0609020204030204" pitchFamily="49" charset="0"/>
+              </a:rPr>
+              <a:t>r2</a:t>
+            </a:r>
+            <a:endParaRPr lang="en-US" sz="1600" b="1" dirty="0">
+              <a:solidFill>
+                <a:schemeClr val="bg1">
+                  <a:lumMod val="50000"/>
+                </a:schemeClr>
+              </a:solidFill>
+              <a:latin typeface="Consolas" panose="020B0609020204030204" pitchFamily="49" charset="0"/>
+              <a:cs typeface="Consolas" panose="020B0609020204030204" pitchFamily="49" charset="0"/>
+            </a:endParaRPr>
+          </a:p>
+          <a:p>
+            <a:pPr marL="0" indent="0">
+              <a:buNone/>
+            </a:pPr>
+            <a:r>
+              <a:rPr lang="en-US" sz="1600" b="1" dirty="0">
+                <a:latin typeface="Consolas" panose="020B0609020204030204" pitchFamily="49" charset="0"/>
+                <a:cs typeface="Consolas" panose="020B0609020204030204" pitchFamily="49" charset="0"/>
+              </a:rPr>
+              <a:t>  </a:t>
+            </a:r>
+            <a:r>
+              <a:rPr lang="en-US" sz="1600" b="1" dirty="0">
+                <a:solidFill>
+                  <a:srgbClr val="C00000"/>
+                </a:solidFill>
+                <a:latin typeface="Consolas" panose="020B0609020204030204" pitchFamily="49" charset="0"/>
+                <a:cs typeface="Consolas" panose="020B0609020204030204" pitchFamily="49" charset="0"/>
+              </a:rPr>
+              <a:t>MLA   </a:t>
+            </a:r>
+            <a:r>
+              <a:rPr lang="en-US" sz="1600" b="1" dirty="0" err="1">
+                <a:solidFill>
+                  <a:srgbClr val="C00000"/>
+                </a:solidFill>
+                <a:latin typeface="Consolas" panose="020B0609020204030204" pitchFamily="49" charset="0"/>
+                <a:cs typeface="Consolas" panose="020B0609020204030204" pitchFamily="49" charset="0"/>
+              </a:rPr>
+              <a:t>r5</a:t>
+            </a:r>
+            <a:r>
+              <a:rPr lang="en-US" sz="1600" b="1" dirty="0">
+                <a:solidFill>
+                  <a:srgbClr val="C00000"/>
+                </a:solidFill>
+                <a:latin typeface="Consolas" panose="020B0609020204030204" pitchFamily="49" charset="0"/>
+                <a:cs typeface="Consolas" panose="020B0609020204030204" pitchFamily="49" charset="0"/>
+              </a:rPr>
+              <a:t>, </a:t>
+            </a:r>
+            <a:r>
+              <a:rPr lang="en-US" sz="1600" b="1" dirty="0" err="1">
+                <a:solidFill>
+                  <a:srgbClr val="C00000"/>
+                </a:solidFill>
+                <a:latin typeface="Consolas" panose="020B0609020204030204" pitchFamily="49" charset="0"/>
+                <a:cs typeface="Consolas" panose="020B0609020204030204" pitchFamily="49" charset="0"/>
+              </a:rPr>
+              <a:t>r1</a:t>
+            </a:r>
+            <a:r>
+              <a:rPr lang="en-US" sz="1600" b="1" dirty="0">
+                <a:solidFill>
+                  <a:srgbClr val="C00000"/>
+                </a:solidFill>
+                <a:latin typeface="Consolas" panose="020B0609020204030204" pitchFamily="49" charset="0"/>
+                <a:cs typeface="Consolas" panose="020B0609020204030204" pitchFamily="49" charset="0"/>
+              </a:rPr>
+              <a:t>, </a:t>
+            </a:r>
+            <a:r>
+              <a:rPr lang="en-US" sz="1600" b="1" dirty="0" err="1">
+                <a:solidFill>
+                  <a:srgbClr val="C00000"/>
+                </a:solidFill>
+                <a:latin typeface="Consolas" panose="020B0609020204030204" pitchFamily="49" charset="0"/>
+                <a:cs typeface="Consolas" panose="020B0609020204030204" pitchFamily="49" charset="0"/>
+              </a:rPr>
+              <a:t>r2</a:t>
+            </a:r>
+            <a:r>
+              <a:rPr lang="en-US" sz="1600" b="1" dirty="0">
+                <a:solidFill>
+                  <a:srgbClr val="C00000"/>
+                </a:solidFill>
+                <a:latin typeface="Consolas" panose="020B0609020204030204" pitchFamily="49" charset="0"/>
+                <a:cs typeface="Consolas" panose="020B0609020204030204" pitchFamily="49" charset="0"/>
+              </a:rPr>
+              <a:t>, </a:t>
+            </a:r>
+            <a:r>
+              <a:rPr lang="en-US" sz="1600" b="1" dirty="0" err="1">
+                <a:solidFill>
+                  <a:srgbClr val="C00000"/>
+                </a:solidFill>
+                <a:latin typeface="Consolas" panose="020B0609020204030204" pitchFamily="49" charset="0"/>
+                <a:cs typeface="Consolas" panose="020B0609020204030204" pitchFamily="49" charset="0"/>
+              </a:rPr>
+              <a:t>r5</a:t>
+            </a:r>
+            <a:r>
+              <a:rPr lang="en-US" sz="1600" b="1" dirty="0">
+                <a:solidFill>
+                  <a:srgbClr val="C00000"/>
+                </a:solidFill>
+                <a:latin typeface="Consolas" panose="020B0609020204030204" pitchFamily="49" charset="0"/>
+                <a:cs typeface="Consolas" panose="020B0609020204030204" pitchFamily="49" charset="0"/>
+              </a:rPr>
+              <a:t>    </a:t>
+            </a:r>
+            <a:r>
+              <a:rPr lang="en-US" sz="1600" b="1" dirty="0">
+                <a:solidFill>
+                  <a:schemeClr val="bg1">
+                    <a:lumMod val="50000"/>
+                  </a:schemeClr>
+                </a:solidFill>
+                <a:latin typeface="Consolas" panose="020B0609020204030204" pitchFamily="49" charset="0"/>
+                <a:cs typeface="Consolas" panose="020B0609020204030204" pitchFamily="49" charset="0"/>
+              </a:rPr>
+              <a:t>; </a:t>
+            </a:r>
+            <a:r>
+              <a:rPr lang="en-US" sz="1600" b="1" dirty="0" err="1">
+                <a:solidFill>
+                  <a:schemeClr val="bg1">
+                    <a:lumMod val="50000"/>
+                  </a:schemeClr>
+                </a:solidFill>
+                <a:latin typeface="Consolas" panose="020B0609020204030204" pitchFamily="49" charset="0"/>
+                <a:cs typeface="Consolas" panose="020B0609020204030204" pitchFamily="49" charset="0"/>
+              </a:rPr>
+              <a:t>r5</a:t>
+            </a:r>
+            <a:r>
+              <a:rPr lang="en-US" sz="1600" b="1" dirty="0">
+                <a:solidFill>
+                  <a:schemeClr val="bg1">
+                    <a:lumMod val="50000"/>
+                  </a:schemeClr>
+                </a:solidFill>
+                <a:latin typeface="Consolas" panose="020B0609020204030204" pitchFamily="49" charset="0"/>
+                <a:cs typeface="Consolas" panose="020B0609020204030204" pitchFamily="49" charset="0"/>
+              </a:rPr>
+              <a:t> = </a:t>
+            </a:r>
+            <a:r>
+              <a:rPr lang="en-US" sz="1600" b="1" dirty="0" err="1">
+                <a:solidFill>
+                  <a:schemeClr val="bg1">
+                    <a:lumMod val="50000"/>
+                  </a:schemeClr>
+                </a:solidFill>
+                <a:latin typeface="Consolas" panose="020B0609020204030204" pitchFamily="49" charset="0"/>
+                <a:cs typeface="Consolas" panose="020B0609020204030204" pitchFamily="49" charset="0"/>
+              </a:rPr>
+              <a:t>r5</a:t>
+            </a:r>
+            <a:r>
+              <a:rPr lang="en-US" sz="1600" b="1" dirty="0">
+                <a:solidFill>
+                  <a:schemeClr val="bg1">
+                    <a:lumMod val="50000"/>
+                  </a:schemeClr>
+                </a:solidFill>
+                <a:latin typeface="Consolas" panose="020B0609020204030204" pitchFamily="49" charset="0"/>
+                <a:cs typeface="Consolas" panose="020B0609020204030204" pitchFamily="49" charset="0"/>
+              </a:rPr>
+              <a:t> + </a:t>
+            </a:r>
+            <a:r>
+              <a:rPr lang="en-US" sz="1600" b="1" dirty="0" err="1">
+                <a:solidFill>
+                  <a:schemeClr val="bg1">
+                    <a:lumMod val="50000"/>
+                  </a:schemeClr>
+                </a:solidFill>
+                <a:latin typeface="Consolas" panose="020B0609020204030204" pitchFamily="49" charset="0"/>
+                <a:cs typeface="Consolas" panose="020B0609020204030204" pitchFamily="49" charset="0"/>
+              </a:rPr>
+              <a:t>r1</a:t>
+            </a:r>
+            <a:r>
+              <a:rPr lang="en-US" sz="1600" b="1" dirty="0">
+                <a:solidFill>
+                  <a:schemeClr val="bg1">
+                    <a:lumMod val="50000"/>
+                  </a:schemeClr>
+                </a:solidFill>
+                <a:latin typeface="Consolas" panose="020B0609020204030204" pitchFamily="49" charset="0"/>
+                <a:cs typeface="Consolas" panose="020B0609020204030204" pitchFamily="49" charset="0"/>
+              </a:rPr>
+              <a:t> * </a:t>
+            </a:r>
+            <a:r>
+              <a:rPr lang="en-US" sz="1600" b="1" dirty="0" err="1">
+                <a:solidFill>
+                  <a:schemeClr val="bg1">
+                    <a:lumMod val="50000"/>
+                  </a:schemeClr>
+                </a:solidFill>
+                <a:latin typeface="Consolas" panose="020B0609020204030204" pitchFamily="49" charset="0"/>
+                <a:cs typeface="Consolas" panose="020B0609020204030204" pitchFamily="49" charset="0"/>
+              </a:rPr>
+              <a:t>r2</a:t>
+            </a:r>
+            <a:endParaRPr lang="en-US" sz="1600" b="1" dirty="0">
+              <a:solidFill>
+                <a:schemeClr val="bg1">
+                  <a:lumMod val="50000"/>
+                </a:schemeClr>
+              </a:solidFill>
+              <a:latin typeface="Consolas" panose="020B0609020204030204" pitchFamily="49" charset="0"/>
+              <a:cs typeface="Consolas" panose="020B0609020204030204" pitchFamily="49" charset="0"/>
+            </a:endParaRPr>
+          </a:p>
+          <a:p>
+            <a:pPr marL="0" indent="0">
+              <a:buNone/>
+            </a:pPr>
+            <a:r>
+              <a:rPr lang="en-US" sz="1600" b="1" dirty="0">
+                <a:latin typeface="Consolas" panose="020B0609020204030204" pitchFamily="49" charset="0"/>
+                <a:cs typeface="Consolas" panose="020B0609020204030204" pitchFamily="49" charset="0"/>
+              </a:rPr>
+              <a:t>  </a:t>
+            </a:r>
+            <a:r>
+              <a:rPr lang="en-US" sz="1600" b="1" dirty="0">
+                <a:solidFill>
+                  <a:srgbClr val="C00000"/>
+                </a:solidFill>
+                <a:latin typeface="Consolas" panose="020B0609020204030204" pitchFamily="49" charset="0"/>
+                <a:cs typeface="Consolas" panose="020B0609020204030204" pitchFamily="49" charset="0"/>
+              </a:rPr>
+              <a:t>MLA   </a:t>
+            </a:r>
+            <a:r>
+              <a:rPr lang="en-US" sz="1600" b="1" dirty="0" err="1">
+                <a:solidFill>
+                  <a:srgbClr val="C00000"/>
+                </a:solidFill>
+                <a:latin typeface="Consolas" panose="020B0609020204030204" pitchFamily="49" charset="0"/>
+                <a:cs typeface="Consolas" panose="020B0609020204030204" pitchFamily="49" charset="0"/>
+              </a:rPr>
+              <a:t>r5</a:t>
+            </a:r>
+            <a:r>
+              <a:rPr lang="en-US" sz="1600" b="1" dirty="0">
+                <a:solidFill>
+                  <a:srgbClr val="C00000"/>
+                </a:solidFill>
+                <a:latin typeface="Consolas" panose="020B0609020204030204" pitchFamily="49" charset="0"/>
+                <a:cs typeface="Consolas" panose="020B0609020204030204" pitchFamily="49" charset="0"/>
+              </a:rPr>
+              <a:t>, </a:t>
+            </a:r>
+            <a:r>
+              <a:rPr lang="en-US" sz="1600" b="1" dirty="0" err="1">
+                <a:solidFill>
+                  <a:srgbClr val="C00000"/>
+                </a:solidFill>
+                <a:latin typeface="Consolas" panose="020B0609020204030204" pitchFamily="49" charset="0"/>
+                <a:cs typeface="Consolas" panose="020B0609020204030204" pitchFamily="49" charset="0"/>
+              </a:rPr>
+              <a:t>r0</a:t>
+            </a:r>
+            <a:r>
+              <a:rPr lang="en-US" sz="1600" b="1" dirty="0">
+                <a:solidFill>
+                  <a:srgbClr val="C00000"/>
+                </a:solidFill>
+                <a:latin typeface="Consolas" panose="020B0609020204030204" pitchFamily="49" charset="0"/>
+                <a:cs typeface="Consolas" panose="020B0609020204030204" pitchFamily="49" charset="0"/>
+              </a:rPr>
+              <a:t>, </a:t>
+            </a:r>
+            <a:r>
+              <a:rPr lang="en-US" sz="1600" b="1" dirty="0" err="1">
+                <a:solidFill>
+                  <a:srgbClr val="C00000"/>
+                </a:solidFill>
+                <a:latin typeface="Consolas" panose="020B0609020204030204" pitchFamily="49" charset="0"/>
+                <a:cs typeface="Consolas" panose="020B0609020204030204" pitchFamily="49" charset="0"/>
+              </a:rPr>
+              <a:t>r3</a:t>
+            </a:r>
+            <a:r>
+              <a:rPr lang="en-US" sz="1600" b="1" dirty="0">
+                <a:solidFill>
+                  <a:srgbClr val="C00000"/>
+                </a:solidFill>
+                <a:latin typeface="Consolas" panose="020B0609020204030204" pitchFamily="49" charset="0"/>
+                <a:cs typeface="Consolas" panose="020B0609020204030204" pitchFamily="49" charset="0"/>
+              </a:rPr>
+              <a:t>, </a:t>
+            </a:r>
+            <a:r>
+              <a:rPr lang="en-US" sz="1600" b="1" dirty="0" err="1">
+                <a:solidFill>
+                  <a:srgbClr val="C00000"/>
+                </a:solidFill>
+                <a:latin typeface="Consolas" panose="020B0609020204030204" pitchFamily="49" charset="0"/>
+                <a:cs typeface="Consolas" panose="020B0609020204030204" pitchFamily="49" charset="0"/>
+              </a:rPr>
+              <a:t>r5</a:t>
+            </a:r>
+            <a:r>
+              <a:rPr lang="en-US" sz="1600" b="1" dirty="0">
+                <a:solidFill>
+                  <a:srgbClr val="C00000"/>
+                </a:solidFill>
+                <a:latin typeface="Consolas" panose="020B0609020204030204" pitchFamily="49" charset="0"/>
+                <a:cs typeface="Consolas" panose="020B0609020204030204" pitchFamily="49" charset="0"/>
+              </a:rPr>
+              <a:t>    </a:t>
+            </a:r>
+            <a:r>
+              <a:rPr lang="en-US" sz="1600" b="1" dirty="0">
+                <a:solidFill>
+                  <a:schemeClr val="bg1">
+                    <a:lumMod val="50000"/>
+                  </a:schemeClr>
+                </a:solidFill>
+                <a:latin typeface="Consolas" panose="020B0609020204030204" pitchFamily="49" charset="0"/>
+                <a:cs typeface="Consolas" panose="020B0609020204030204" pitchFamily="49" charset="0"/>
+              </a:rPr>
+              <a:t>; </a:t>
+            </a:r>
+            <a:r>
+              <a:rPr lang="en-US" sz="1600" b="1" dirty="0" err="1">
+                <a:solidFill>
+                  <a:schemeClr val="bg1">
+                    <a:lumMod val="50000"/>
+                  </a:schemeClr>
+                </a:solidFill>
+                <a:latin typeface="Consolas" panose="020B0609020204030204" pitchFamily="49" charset="0"/>
+                <a:cs typeface="Consolas" panose="020B0609020204030204" pitchFamily="49" charset="0"/>
+              </a:rPr>
+              <a:t>r5</a:t>
+            </a:r>
+            <a:r>
+              <a:rPr lang="en-US" sz="1600" b="1" dirty="0">
+                <a:solidFill>
+                  <a:schemeClr val="bg1">
+                    <a:lumMod val="50000"/>
+                  </a:schemeClr>
+                </a:solidFill>
+                <a:latin typeface="Consolas" panose="020B0609020204030204" pitchFamily="49" charset="0"/>
+                <a:cs typeface="Consolas" panose="020B0609020204030204" pitchFamily="49" charset="0"/>
+              </a:rPr>
+              <a:t> = </a:t>
+            </a:r>
+            <a:r>
+              <a:rPr lang="en-US" sz="1600" b="1" dirty="0" err="1">
+                <a:solidFill>
+                  <a:schemeClr val="bg1">
+                    <a:lumMod val="50000"/>
+                  </a:schemeClr>
+                </a:solidFill>
+                <a:latin typeface="Consolas" panose="020B0609020204030204" pitchFamily="49" charset="0"/>
+                <a:cs typeface="Consolas" panose="020B0609020204030204" pitchFamily="49" charset="0"/>
+              </a:rPr>
+              <a:t>r5</a:t>
+            </a:r>
+            <a:r>
+              <a:rPr lang="en-US" sz="1600" b="1" dirty="0">
+                <a:solidFill>
+                  <a:schemeClr val="bg1">
+                    <a:lumMod val="50000"/>
+                  </a:schemeClr>
+                </a:solidFill>
+                <a:latin typeface="Consolas" panose="020B0609020204030204" pitchFamily="49" charset="0"/>
+                <a:cs typeface="Consolas" panose="020B0609020204030204" pitchFamily="49" charset="0"/>
+              </a:rPr>
+              <a:t> + </a:t>
+            </a:r>
+            <a:r>
+              <a:rPr lang="en-US" sz="1600" b="1" dirty="0" err="1">
+                <a:solidFill>
+                  <a:schemeClr val="bg1">
+                    <a:lumMod val="50000"/>
+                  </a:schemeClr>
+                </a:solidFill>
+                <a:latin typeface="Consolas" panose="020B0609020204030204" pitchFamily="49" charset="0"/>
+                <a:cs typeface="Consolas" panose="020B0609020204030204" pitchFamily="49" charset="0"/>
+              </a:rPr>
+              <a:t>r0</a:t>
+            </a:r>
+            <a:r>
+              <a:rPr lang="en-US" sz="1600" b="1" dirty="0">
+                <a:solidFill>
+                  <a:schemeClr val="bg1">
+                    <a:lumMod val="50000"/>
+                  </a:schemeClr>
+                </a:solidFill>
+                <a:latin typeface="Consolas" panose="020B0609020204030204" pitchFamily="49" charset="0"/>
+                <a:cs typeface="Consolas" panose="020B0609020204030204" pitchFamily="49" charset="0"/>
+              </a:rPr>
+              <a:t> * </a:t>
+            </a:r>
+            <a:r>
+              <a:rPr lang="en-US" sz="1600" b="1" dirty="0" err="1">
+                <a:solidFill>
+                  <a:schemeClr val="bg1">
+                    <a:lumMod val="50000"/>
+                  </a:schemeClr>
+                </a:solidFill>
+                <a:latin typeface="Consolas" panose="020B0609020204030204" pitchFamily="49" charset="0"/>
+                <a:cs typeface="Consolas" panose="020B0609020204030204" pitchFamily="49" charset="0"/>
+              </a:rPr>
+              <a:t>r3</a:t>
+            </a:r>
+            <a:endParaRPr lang="en-US" sz="1600" b="1" dirty="0">
+              <a:solidFill>
+                <a:schemeClr val="bg1">
+                  <a:lumMod val="50000"/>
+                </a:schemeClr>
+              </a:solidFill>
+              <a:latin typeface="Consolas" panose="020B0609020204030204" pitchFamily="49" charset="0"/>
+              <a:cs typeface="Consolas" panose="020B0609020204030204" pitchFamily="49" charset="0"/>
+            </a:endParaRPr>
+          </a:p>
+        </p:txBody>
+      </p:sp>
+      <p:sp>
+        <p:nvSpPr>
+          <p:cNvPr id="5" name="TextBox 4">
+            <a:extLst>
+              <a:ext uri="{FF2B5EF4-FFF2-40B4-BE49-F238E27FC236}">
+                <a16:creationId xmlns:a16="http://schemas.microsoft.com/office/drawing/2014/main" id="{0D45E53C-60AD-25C3-58B1-487C352241E8}"/>
+              </a:ext>
+            </a:extLst>
+          </p:cNvPr>
+          <p:cNvSpPr txBox="1"/>
+          <p:nvPr/>
+        </p:nvSpPr>
+        <p:spPr>
+          <a:xfrm>
+            <a:off x="1981199" y="3387762"/>
+            <a:ext cx="8254701" cy="2862322"/>
+          </a:xfrm>
+          <a:prstGeom prst="rect">
+            <a:avLst/>
+          </a:prstGeom>
+          <a:solidFill>
+            <a:schemeClr val="bg1">
+              <a:lumMod val="85000"/>
+            </a:schemeClr>
+          </a:solidFill>
+          <a:ln>
+            <a:solidFill>
+              <a:schemeClr val="tx1"/>
+            </a:solidFill>
+          </a:ln>
+        </p:spPr>
+        <p:txBody>
+          <a:bodyPr wrap="square" rtlCol="0">
+            <a:spAutoFit/>
+          </a:bodyPr>
+          <a:lstStyle/>
+          <a:p>
+            <a:r>
+              <a:rPr lang="en-US" dirty="0"/>
+              <a:t>UMULL r4, r5, r0, r2 computes the 64-bit product of the low words and places the low 32 bits in r4 and the high 32 bits in r5, establishing the initial 64-bit accumulator.</a:t>
+            </a:r>
+          </a:p>
+          <a:p>
+            <a:r>
+              <a:rPr lang="en-US" dirty="0"/>
+              <a:t>MLA Multiply Accumulate: MLA Rd, Rn, Rm, Ra computes </a:t>
+            </a:r>
+            <a:r>
+              <a:rPr lang="da-DK" dirty="0"/>
+              <a:t>Rd = (Ra + (Rn × Rm)) mod 2^32. </a:t>
+            </a:r>
+            <a:r>
+              <a:rPr lang="en-US" dirty="0"/>
+              <a:t>Only the least-significant 32 bits of the sum are written to Rd; any higher bits are discarded.</a:t>
+            </a:r>
+          </a:p>
+          <a:p>
+            <a:r>
+              <a:rPr lang="en-US" dirty="0"/>
+              <a:t>MLA r5, r1, r2 adds the cross term r1·r2 (which conceptually belongs at bit position 32) into the high half r5</a:t>
+            </a:r>
+          </a:p>
+          <a:p>
+            <a:r>
+              <a:rPr lang="en-US" dirty="0"/>
+              <a:t>MLA r5, r0, r3, r5 similarly adds the other cross term r0·r3 into r5, completing the contribution of both cross terms at the correct alignment; overflow beyond 32 bits of r5 is discarded, ignoring the 2^64·(r1·r3) part.</a:t>
+            </a:r>
+          </a:p>
+        </p:txBody>
+      </p:sp>
+    </p:spTree>
+    <p:extLst>
+      <p:ext uri="{BB962C8B-B14F-4D97-AF65-F5344CB8AC3E}">
+        <p14:creationId xmlns:p14="http://schemas.microsoft.com/office/powerpoint/2010/main" val="226668900"/>
       </p:ext>
     </p:extLst>
   </p:cSld>
@@ -5752,7 +8028,7 @@
         </p:nvSpPr>
         <p:spPr>
           <a:xfrm>
-            <a:off x="1371600" y="3581400"/>
+            <a:off x="2895600" y="3581400"/>
             <a:ext cx="7391400" cy="3108960"/>
           </a:xfrm>
         </p:spPr>
@@ -6561,7 +8837,7 @@
         </p:blipFill>
         <p:spPr bwMode="auto">
           <a:xfrm>
-            <a:off x="2819400" y="1371600"/>
+            <a:off x="4343400" y="1371601"/>
             <a:ext cx="3886200" cy="1960195"/>
           </a:xfrm>
           <a:prstGeom prst="rect">
@@ -6597,7 +8873,7 @@
           <p:cNvPr id="5" name="TextBox 4">
             <a:extLst>
               <a:ext uri="{FF2B5EF4-FFF2-40B4-BE49-F238E27FC236}">
-                <a16:creationId xmlns:a16="http://schemas.microsoft.com/office/drawing/2014/main" id="{4C338993-D673-4ACD-ED3E-E45B166F117A}"/>
+                <a16:creationId xmlns:a16="http://schemas.microsoft.com/office/drawing/2014/main" id="{BC970528-BC53-C0A5-D452-682668CDC489}"/>
               </a:ext>
             </a:extLst>
           </p:cNvPr>
@@ -6606,7 +8882,7 @@
         </p:nvSpPr>
         <p:spPr>
           <a:xfrm>
-            <a:off x="4480173" y="78487"/>
+            <a:off x="7467600" y="98612"/>
             <a:ext cx="4610935" cy="1200329"/>
           </a:xfrm>
           <a:prstGeom prst="rect">
@@ -6617,6 +8893,11 @@
               <a:lumMod val="85000"/>
             </a:schemeClr>
           </a:solidFill>
+          <a:ln>
+            <a:solidFill>
+              <a:schemeClr val="tx1"/>
+            </a:solidFill>
+          </a:ln>
         </p:spPr>
         <p:txBody>
           <a:bodyPr wrap="square" rtlCol="0">
@@ -6719,7 +9000,7 @@
         </p:nvSpPr>
         <p:spPr>
           <a:xfrm>
-            <a:off x="838200" y="3200400"/>
+            <a:off x="2362200" y="3200400"/>
             <a:ext cx="7580616" cy="3505200"/>
           </a:xfrm>
         </p:spPr>
@@ -7521,7 +9802,7 @@
         </p:blipFill>
         <p:spPr bwMode="auto">
           <a:xfrm>
-            <a:off x="3108789" y="1295400"/>
+            <a:off x="4632789" y="1295401"/>
             <a:ext cx="3581400" cy="1806453"/>
           </a:xfrm>
           <a:prstGeom prst="rect">
@@ -7557,7 +9838,7 @@
           <p:cNvPr id="5" name="TextBox 4">
             <a:extLst>
               <a:ext uri="{FF2B5EF4-FFF2-40B4-BE49-F238E27FC236}">
-                <a16:creationId xmlns:a16="http://schemas.microsoft.com/office/drawing/2014/main" id="{76C6BEE5-193A-C8E4-CFA2-E80816E735C0}"/>
+                <a16:creationId xmlns:a16="http://schemas.microsoft.com/office/drawing/2014/main" id="{63FACEAE-2AD7-ACCE-CECA-DC82E80DF8FF}"/>
               </a:ext>
             </a:extLst>
           </p:cNvPr>
@@ -7566,7 +9847,7 @@
         </p:nvSpPr>
         <p:spPr>
           <a:xfrm>
-            <a:off x="4480173" y="78487"/>
+            <a:off x="7467600" y="78562"/>
             <a:ext cx="4610935" cy="1200329"/>
           </a:xfrm>
           <a:prstGeom prst="rect">
@@ -7577,6 +9858,11 @@
               <a:lumMod val="85000"/>
             </a:schemeClr>
           </a:solidFill>
+          <a:ln>
+            <a:solidFill>
+              <a:schemeClr val="tx1"/>
+            </a:solidFill>
+          </a:ln>
         </p:spPr>
         <p:txBody>
           <a:bodyPr wrap="square" rtlCol="0">
@@ -7679,8 +9965,8 @@
         </p:nvSpPr>
         <p:spPr>
           <a:xfrm>
-            <a:off x="838200" y="1539240"/>
-            <a:ext cx="7696200" cy="4709160"/>
+            <a:off x="2362200" y="1539240"/>
+            <a:ext cx="7696200" cy="4404360"/>
           </a:xfrm>
         </p:spPr>
         <p:style>
@@ -7878,14 +10164,64 @@
               <a:t> </a:t>
             </a:r>
             <a:r>
-              <a:rPr lang="en-US" sz="1600" b="1" dirty="0">
-                <a:solidFill>
-                  <a:srgbClr val="C00000"/>
-                </a:solidFill>
-                <a:latin typeface="Consolas" panose="020B0609020204030204" pitchFamily="49" charset="0"/>
-                <a:cs typeface="Consolas" panose="020B0609020204030204" pitchFamily="49" charset="0"/>
-              </a:rPr>
-              <a:t>CLZ  r2, r1          </a:t>
+              <a:rPr lang="en-US" sz="1600" b="1" dirty="0" err="1">
+                <a:solidFill>
+                  <a:srgbClr val="C00000"/>
+                </a:solidFill>
+                <a:latin typeface="Consolas" panose="020B0609020204030204" pitchFamily="49" charset="0"/>
+                <a:cs typeface="Consolas" panose="020B0609020204030204" pitchFamily="49" charset="0"/>
+              </a:rPr>
+              <a:t>CLZ</a:t>
+            </a:r>
+            <a:r>
+              <a:rPr lang="en-US" sz="1600" b="1" dirty="0">
+                <a:solidFill>
+                  <a:srgbClr val="C00000"/>
+                </a:solidFill>
+                <a:latin typeface="Consolas" panose="020B0609020204030204" pitchFamily="49" charset="0"/>
+                <a:cs typeface="Consolas" panose="020B0609020204030204" pitchFamily="49" charset="0"/>
+              </a:rPr>
+              <a:t>  </a:t>
+            </a:r>
+            <a:r>
+              <a:rPr lang="en-US" sz="1600" b="1" dirty="0" err="1">
+                <a:solidFill>
+                  <a:srgbClr val="C00000"/>
+                </a:solidFill>
+                <a:latin typeface="Consolas" panose="020B0609020204030204" pitchFamily="49" charset="0"/>
+                <a:cs typeface="Consolas" panose="020B0609020204030204" pitchFamily="49" charset="0"/>
+              </a:rPr>
+              <a:t>r2</a:t>
+            </a:r>
+            <a:r>
+              <a:rPr lang="en-US" sz="1600" b="1" dirty="0">
+                <a:solidFill>
+                  <a:srgbClr val="C00000"/>
+                </a:solidFill>
+                <a:latin typeface="Consolas" panose="020B0609020204030204" pitchFamily="49" charset="0"/>
+                <a:cs typeface="Consolas" panose="020B0609020204030204" pitchFamily="49" charset="0"/>
+              </a:rPr>
+              <a:t>, </a:t>
+            </a:r>
+            <a:r>
+              <a:rPr lang="en-US" sz="1600" b="1" dirty="0" err="1">
+                <a:solidFill>
+                  <a:srgbClr val="C00000"/>
+                </a:solidFill>
+                <a:latin typeface="Consolas" panose="020B0609020204030204" pitchFamily="49" charset="0"/>
+                <a:cs typeface="Consolas" panose="020B0609020204030204" pitchFamily="49" charset="0"/>
+              </a:rPr>
+              <a:t>r1</a:t>
+            </a:r>
+            <a:r>
+              <a:rPr lang="en-US" sz="1600" b="1" dirty="0">
+                <a:solidFill>
+                  <a:srgbClr val="C00000"/>
+                </a:solidFill>
+                <a:latin typeface="Consolas" panose="020B0609020204030204" pitchFamily="49" charset="0"/>
+                <a:cs typeface="Consolas" panose="020B0609020204030204" pitchFamily="49" charset="0"/>
+              </a:rPr>
+              <a:t>          </a:t>
             </a:r>
             <a:r>
               <a:rPr lang="en-US" sz="1600" b="1" dirty="0">
@@ -7897,7 +10233,31 @@
                 <a:latin typeface="Consolas" panose="020B0609020204030204" pitchFamily="49" charset="0"/>
                 <a:cs typeface="Consolas" panose="020B0609020204030204" pitchFamily="49" charset="0"/>
               </a:rPr>
-              <a:t>; CLZ = Count leading zeroes. It counts how many zero bits appear from MSB downwards in the 32-bit value in r1, and places that count (0–32) into r2</a:t>
+              <a:t>; </a:t>
+            </a:r>
+            <a:r>
+              <a:rPr lang="en-US" sz="1600" b="1" dirty="0" err="1">
+                <a:solidFill>
+                  <a:schemeClr val="bg1">
+                    <a:lumMod val="50000"/>
+                  </a:schemeClr>
+                </a:solidFill>
+                <a:latin typeface="Consolas" panose="020B0609020204030204" pitchFamily="49" charset="0"/>
+                <a:cs typeface="Consolas" panose="020B0609020204030204" pitchFamily="49" charset="0"/>
+              </a:rPr>
+              <a:t>CLZ</a:t>
+            </a:r>
+            <a:r>
+              <a:rPr lang="en-US" sz="1600" b="1" dirty="0">
+                <a:solidFill>
+                  <a:schemeClr val="bg1">
+                    <a:lumMod val="50000"/>
+                  </a:schemeClr>
+                </a:solidFill>
+                <a:latin typeface="Consolas" panose="020B0609020204030204" pitchFamily="49" charset="0"/>
+                <a:cs typeface="Consolas" panose="020B0609020204030204" pitchFamily="49" charset="0"/>
+              </a:rPr>
+              <a:t> = Count leading zeroes</a:t>
             </a:r>
           </a:p>
           <a:p>
@@ -7941,46 +10301,45 @@
               <a:t> </a:t>
             </a:r>
             <a:r>
-              <a:rPr lang="en-US" sz="1600" b="1" dirty="0">
-                <a:solidFill>
-                  <a:srgbClr val="C00000"/>
-                </a:solidFill>
-                <a:latin typeface="Consolas" panose="020B0609020204030204" pitchFamily="49" charset="0"/>
-                <a:cs typeface="Consolas" panose="020B0609020204030204" pitchFamily="49" charset="0"/>
-              </a:rPr>
-              <a:t>CMP	r2, #32       </a:t>
-            </a:r>
-            <a:r>
-              <a:rPr lang="en-US" sz="1600" b="1" dirty="0">
-                <a:solidFill>
-                  <a:schemeClr val="bg1">
-                    <a:lumMod val="50000"/>
-                  </a:schemeClr>
-                </a:solidFill>
-                <a:latin typeface="Consolas" panose="020B0609020204030204" pitchFamily="49" charset="0"/>
-              </a:rPr>
-              <a:t>; Compare r2 with </a:t>
-            </a:r>
-            <a:r>
-              <a:rPr lang="en-US" sz="1600" b="1" dirty="0">
-                <a:solidFill>
-                  <a:schemeClr val="bg1">
-                    <a:lumMod val="50000"/>
-                  </a:schemeClr>
-                </a:solidFill>
-                <a:latin typeface="Consolas" panose="020B0609020204030204" pitchFamily="49" charset="0"/>
-                <a:cs typeface="Consolas" panose="020B0609020204030204" pitchFamily="49" charset="0"/>
-              </a:rPr>
-              <a:t>32</a:t>
-            </a:r>
-            <a:endParaRPr lang="en-US" sz="1600" b="1" dirty="0">
-              <a:solidFill>
-                <a:schemeClr val="bg1">
-                  <a:lumMod val="50000"/>
-                </a:schemeClr>
-              </a:solidFill>
-              <a:latin typeface="Consolas" panose="020B0609020204030204" pitchFamily="49" charset="0"/>
-            </a:endParaRPr>
+              <a:rPr lang="en-US" sz="1600" b="1" dirty="0" err="1">
+                <a:solidFill>
+                  <a:srgbClr val="C00000"/>
+                </a:solidFill>
+                <a:latin typeface="Consolas" panose="020B0609020204030204" pitchFamily="49" charset="0"/>
+                <a:cs typeface="Consolas" panose="020B0609020204030204" pitchFamily="49" charset="0"/>
+              </a:rPr>
+              <a:t>CMP</a:t>
+            </a:r>
+            <a:r>
+              <a:rPr lang="en-US" sz="1600" b="1" dirty="0">
+                <a:solidFill>
+                  <a:srgbClr val="C00000"/>
+                </a:solidFill>
+                <a:latin typeface="Consolas" panose="020B0609020204030204" pitchFamily="49" charset="0"/>
+                <a:cs typeface="Consolas" panose="020B0609020204030204" pitchFamily="49" charset="0"/>
+              </a:rPr>
+              <a:t>	</a:t>
+            </a:r>
+            <a:r>
+              <a:rPr lang="en-US" sz="1600" b="1" dirty="0" err="1">
+                <a:solidFill>
+                  <a:srgbClr val="C00000"/>
+                </a:solidFill>
+                <a:latin typeface="Consolas" panose="020B0609020204030204" pitchFamily="49" charset="0"/>
+                <a:cs typeface="Consolas" panose="020B0609020204030204" pitchFamily="49" charset="0"/>
+              </a:rPr>
+              <a:t>r2</a:t>
+            </a:r>
+            <a:r>
+              <a:rPr lang="en-US" sz="1600" b="1" dirty="0">
+                <a:solidFill>
+                  <a:srgbClr val="C00000"/>
+                </a:solidFill>
+                <a:latin typeface="Consolas" panose="020B0609020204030204" pitchFamily="49" charset="0"/>
+                <a:cs typeface="Consolas" panose="020B0609020204030204" pitchFamily="49" charset="0"/>
+              </a:rPr>
+              <a:t>, #32</a:t>
+            </a:r>
           </a:p>
           <a:p>
             <a:pPr marL="0" indent="0">
@@ -7994,14 +10353,64 @@
               <a:t> </a:t>
             </a:r>
             <a:r>
-              <a:rPr lang="en-US" sz="1600" b="1" dirty="0">
-                <a:solidFill>
-                  <a:srgbClr val="C00000"/>
-                </a:solidFill>
-                <a:latin typeface="Consolas" panose="020B0609020204030204" pitchFamily="49" charset="0"/>
-                <a:cs typeface="Consolas" panose="020B0609020204030204" pitchFamily="49" charset="0"/>
-              </a:rPr>
-              <a:t>CLZEQ  r3, r0        </a:t>
+              <a:rPr lang="en-US" sz="1600" b="1" dirty="0" err="1">
+                <a:solidFill>
+                  <a:srgbClr val="C00000"/>
+                </a:solidFill>
+                <a:latin typeface="Consolas" panose="020B0609020204030204" pitchFamily="49" charset="0"/>
+                <a:cs typeface="Consolas" panose="020B0609020204030204" pitchFamily="49" charset="0"/>
+              </a:rPr>
+              <a:t>CLZEQ</a:t>
+            </a:r>
+            <a:r>
+              <a:rPr lang="en-US" sz="1600" b="1" dirty="0">
+                <a:solidFill>
+                  <a:srgbClr val="C00000"/>
+                </a:solidFill>
+                <a:latin typeface="Consolas" panose="020B0609020204030204" pitchFamily="49" charset="0"/>
+                <a:cs typeface="Consolas" panose="020B0609020204030204" pitchFamily="49" charset="0"/>
+              </a:rPr>
+              <a:t>  </a:t>
+            </a:r>
+            <a:r>
+              <a:rPr lang="en-US" sz="1600" b="1" dirty="0" err="1">
+                <a:solidFill>
+                  <a:srgbClr val="C00000"/>
+                </a:solidFill>
+                <a:latin typeface="Consolas" panose="020B0609020204030204" pitchFamily="49" charset="0"/>
+                <a:cs typeface="Consolas" panose="020B0609020204030204" pitchFamily="49" charset="0"/>
+              </a:rPr>
+              <a:t>r3</a:t>
+            </a:r>
+            <a:r>
+              <a:rPr lang="en-US" sz="1600" b="1" dirty="0">
+                <a:solidFill>
+                  <a:srgbClr val="C00000"/>
+                </a:solidFill>
+                <a:latin typeface="Consolas" panose="020B0609020204030204" pitchFamily="49" charset="0"/>
+                <a:cs typeface="Consolas" panose="020B0609020204030204" pitchFamily="49" charset="0"/>
+              </a:rPr>
+              <a:t>, </a:t>
+            </a:r>
+            <a:r>
+              <a:rPr lang="en-US" sz="1600" b="1" dirty="0" err="1">
+                <a:solidFill>
+                  <a:srgbClr val="C00000"/>
+                </a:solidFill>
+                <a:latin typeface="Consolas" panose="020B0609020204030204" pitchFamily="49" charset="0"/>
+                <a:cs typeface="Consolas" panose="020B0609020204030204" pitchFamily="49" charset="0"/>
+              </a:rPr>
+              <a:t>r0</a:t>
+            </a:r>
+            <a:r>
+              <a:rPr lang="en-US" sz="1600" b="1" dirty="0">
+                <a:solidFill>
+                  <a:srgbClr val="C00000"/>
+                </a:solidFill>
+                <a:latin typeface="Consolas" panose="020B0609020204030204" pitchFamily="49" charset="0"/>
+                <a:cs typeface="Consolas" panose="020B0609020204030204" pitchFamily="49" charset="0"/>
+              </a:rPr>
+              <a:t>        </a:t>
             </a:r>
             <a:r>
               <a:rPr lang="en-US" sz="1600" b="1" dirty="0">
@@ -8013,7 +10422,48 @@
                 <a:latin typeface="Consolas" panose="020B0609020204030204" pitchFamily="49" charset="0"/>
                 <a:cs typeface="Consolas" panose="020B0609020204030204" pitchFamily="49" charset="0"/>
               </a:rPr>
-              <a:t>; if r2 == 32, then count leading zero                       bits of the lower word</a:t>
+              <a:t>; if </a:t>
+            </a:r>
+            <a:r>
+              <a:rPr lang="en-US" sz="1600" b="1" dirty="0" err="1">
+                <a:solidFill>
+                  <a:schemeClr val="bg1">
+                    <a:lumMod val="50000"/>
+                  </a:schemeClr>
+                </a:solidFill>
+                <a:latin typeface="Consolas" panose="020B0609020204030204" pitchFamily="49" charset="0"/>
+                <a:cs typeface="Consolas" panose="020B0609020204030204" pitchFamily="49" charset="0"/>
+              </a:rPr>
+              <a:t>r2</a:t>
+            </a:r>
+            <a:r>
+              <a:rPr lang="en-US" sz="1600" b="1" dirty="0">
+                <a:solidFill>
+                  <a:schemeClr val="bg1">
+                    <a:lumMod val="50000"/>
+                  </a:schemeClr>
+                </a:solidFill>
+                <a:latin typeface="Consolas" panose="020B0609020204030204" pitchFamily="49" charset="0"/>
+                <a:cs typeface="Consolas" panose="020B0609020204030204" pitchFamily="49" charset="0"/>
+              </a:rPr>
+              <a:t> == 32, then count leading zero</a:t>
+            </a:r>
+          </a:p>
+          <a:p>
+            <a:pPr marL="0" indent="0">
+              <a:buNone/>
+            </a:pPr>
+            <a:r>
+              <a:rPr lang="en-US" sz="1600" b="1" dirty="0">
+                <a:solidFill>
+                  <a:schemeClr val="bg1">
+                    <a:lumMod val="50000"/>
+                  </a:schemeClr>
+                </a:solidFill>
+                <a:latin typeface="Consolas" panose="020B0609020204030204" pitchFamily="49" charset="0"/>
+                <a:cs typeface="Consolas" panose="020B0609020204030204" pitchFamily="49" charset="0"/>
+              </a:rPr>
+              <a:t>                      ; bits of the lower word</a:t>
             </a:r>
           </a:p>
           <a:p>
@@ -8202,7 +10652,7 @@
         <p:spPr/>
         <p:txBody>
           <a:bodyPr>
-            <a:normAutofit fontScale="90000"/>
+            <a:normAutofit/>
           </a:bodyPr>
           <a:lstStyle/>
           <a:p>
@@ -8262,7 +10712,7 @@
         <p:spPr/>
         <p:txBody>
           <a:bodyPr>
-            <a:normAutofit fontScale="92500" lnSpcReduction="10000"/>
+            <a:normAutofit lnSpcReduction="10000"/>
           </a:bodyPr>
           <a:lstStyle/>
           <a:p>
@@ -8394,7 +10844,7 @@
         </p:nvSpPr>
         <p:spPr>
           <a:xfrm>
-            <a:off x="457200" y="1254162"/>
+            <a:off x="1981200" y="1254162"/>
             <a:ext cx="8229600" cy="2022438"/>
           </a:xfrm>
         </p:spPr>
@@ -8679,7 +11129,7 @@
         </p:nvSpPr>
         <p:spPr>
           <a:xfrm>
-            <a:off x="457200" y="3387762"/>
+            <a:off x="1981200" y="3387763"/>
             <a:ext cx="8229600" cy="3139321"/>
           </a:xfrm>
           <a:prstGeom prst="rect">
@@ -8690,6 +11140,11 @@
               <a:lumMod val="85000"/>
             </a:schemeClr>
           </a:solidFill>
+          <a:ln>
+            <a:solidFill>
+              <a:schemeClr val="tx1"/>
+            </a:solidFill>
+          </a:ln>
         </p:spPr>
         <p:txBody>
           <a:bodyPr wrap="square" rtlCol="0">
@@ -8725,7 +11180,7 @@
     </p:spTree>
     <p:extLst>
       <p:ext uri="{BB962C8B-B14F-4D97-AF65-F5344CB8AC3E}">
-        <p14:creationId xmlns:p14="http://schemas.microsoft.com/office/powerpoint/2010/main" val="1355074441"/>
+        <p14:creationId xmlns:p14="http://schemas.microsoft.com/office/powerpoint/2010/main" val="1257666469"/>
       </p:ext>
     </p:extLst>
   </p:cSld>
@@ -8769,7 +11224,7 @@
           <a:p>
             <a:r>
               <a:rPr lang="en-US" dirty="0"/>
-              <a:t>64-bit Multiplication</a:t>
+              <a:t>64-bit Logic Shift Left</a:t>
             </a:r>
           </a:p>
         </p:txBody>
@@ -8798,9 +11253,268 @@
           </a:p>
         </p:txBody>
       </p:sp>
-      <p:sp>
-        <p:nvSpPr>
-          <p:cNvPr id="4" name="Content Placeholder 3"/>
+      <p:pic>
+        <p:nvPicPr>
+          <p:cNvPr id="4" name="Picture 3"/>
+          <p:cNvPicPr>
+            <a:picLocks noChangeAspect="1"/>
+          </p:cNvPicPr>
+          <p:nvPr/>
+        </p:nvPicPr>
+        <p:blipFill>
+          <a:blip r:embed="rId2"/>
+          <a:stretch>
+            <a:fillRect/>
+          </a:stretch>
+        </p:blipFill>
+        <p:spPr>
+          <a:xfrm>
+            <a:off x="1780125" y="3086370"/>
+            <a:ext cx="8631751" cy="685260"/>
+          </a:xfrm>
+          <a:prstGeom prst="rect">
+            <a:avLst/>
+          </a:prstGeom>
+        </p:spPr>
+      </p:pic>
+    </p:spTree>
+    <p:extLst>
+      <p:ext uri="{BB962C8B-B14F-4D97-AF65-F5344CB8AC3E}">
+        <p14:creationId xmlns:p14="http://schemas.microsoft.com/office/powerpoint/2010/main" val="2714306100"/>
+      </p:ext>
+    </p:extLst>
+  </p:cSld>
+  <p:clrMapOvr>
+    <a:masterClrMapping/>
+  </p:clrMapOvr>
+</p:sld>
+</file>
+
+<file path=ppt/slides/slide8.xml><?xml version="1.0" encoding="utf-8"?>
+<p:sld xmlns:a="http://schemas.openxmlformats.org/drawingml/2006/main" xmlns:r="http://schemas.openxmlformats.org/officeDocument/2006/relationships" xmlns:p="http://schemas.openxmlformats.org/presentationml/2006/main">
+  <p:cSld>
+    <p:spTree>
+      <p:nvGrpSpPr>
+        <p:cNvPr id="1" name=""/>
+        <p:cNvGrpSpPr/>
+        <p:nvPr/>
+      </p:nvGrpSpPr>
+      <p:grpSpPr>
+        <a:xfrm>
+          <a:off x="0" y="0"/>
+          <a:ext cx="0" cy="0"/>
+          <a:chOff x="0" y="0"/>
+          <a:chExt cx="0" cy="0"/>
+        </a:xfrm>
+      </p:grpSpPr>
+      <p:sp>
+        <p:nvSpPr>
+          <p:cNvPr id="2" name="Title 1"/>
+          <p:cNvSpPr>
+            <a:spLocks noGrp="1"/>
+          </p:cNvSpPr>
+          <p:nvPr>
+            <p:ph type="title"/>
+          </p:nvPr>
+        </p:nvSpPr>
+        <p:spPr/>
+        <p:txBody>
+          <a:bodyPr/>
+          <a:lstStyle/>
+          <a:p>
+            <a:r>
+              <a:rPr lang="en-US" dirty="0"/>
+              <a:t>64-bit Logic Shift Left</a:t>
+            </a:r>
+          </a:p>
+        </p:txBody>
+      </p:sp>
+      <p:sp>
+        <p:nvSpPr>
+          <p:cNvPr id="3" name="Slide Number Placeholder 2"/>
+          <p:cNvSpPr>
+            <a:spLocks noGrp="1"/>
+          </p:cNvSpPr>
+          <p:nvPr>
+            <p:ph type="sldNum" sz="quarter" idx="12"/>
+          </p:nvPr>
+        </p:nvSpPr>
+        <p:spPr/>
+        <p:txBody>
+          <a:bodyPr/>
+          <a:lstStyle/>
+          <a:p>
+            <a:fld id="{EA7C8D44-3667-46F6-9772-CC52308E2A7F}" type="slidenum">
+              <a:rPr kumimoji="0" lang="en-US" smtClean="0"/>
+              <a:pPr/>
+              <a:t>8</a:t>
+            </a:fld>
+            <a:endParaRPr kumimoji="0" lang="en-US" dirty="0"/>
+          </a:p>
+        </p:txBody>
+      </p:sp>
+      <p:sp>
+        <p:nvSpPr>
+          <p:cNvPr id="4" name="TextBox 3"/>
+          <p:cNvSpPr txBox="1"/>
+          <p:nvPr/>
+        </p:nvSpPr>
+        <p:spPr>
+          <a:xfrm>
+            <a:off x="2057400" y="1447800"/>
+            <a:ext cx="3123932" cy="369332"/>
+          </a:xfrm>
+          <a:prstGeom prst="rect">
+            <a:avLst/>
+          </a:prstGeom>
+          <a:noFill/>
+        </p:spPr>
+        <p:txBody>
+          <a:bodyPr wrap="none" rtlCol="0">
+            <a:spAutoFit/>
+          </a:bodyPr>
+          <a:lstStyle/>
+          <a:p>
+            <a:r>
+              <a:rPr lang="en-US" dirty="0"/>
+              <a:t>Example of Logic Shift Left by 3</a:t>
+            </a:r>
+          </a:p>
+        </p:txBody>
+      </p:sp>
+      <p:pic>
+        <p:nvPicPr>
+          <p:cNvPr id="7" name="Picture 6" descr="Diagram, timeline&#10;&#10;Description automatically generated">
+            <a:extLst>
+              <a:ext uri="{FF2B5EF4-FFF2-40B4-BE49-F238E27FC236}">
+                <a16:creationId xmlns:a16="http://schemas.microsoft.com/office/drawing/2014/main" id="{EC09271D-7561-9293-019D-78DF750CDFC1}"/>
+              </a:ext>
+            </a:extLst>
+          </p:cNvPr>
+          <p:cNvPicPr>
+            <a:picLocks noChangeAspect="1"/>
+          </p:cNvPicPr>
+          <p:nvPr/>
+        </p:nvPicPr>
+        <p:blipFill>
+          <a:blip r:embed="rId2" cstate="print">
+            <a:extLst>
+              <a:ext uri="{28A0092B-C50C-407E-A947-70E740481C1C}">
+                <a14:useLocalDpi xmlns:a14="http://schemas.microsoft.com/office/drawing/2010/main" val="0"/>
+              </a:ext>
+            </a:extLst>
+          </a:blip>
+          <a:stretch>
+            <a:fillRect/>
+          </a:stretch>
+        </p:blipFill>
+        <p:spPr>
+          <a:xfrm>
+            <a:off x="978994" y="2209800"/>
+            <a:ext cx="10603406" cy="3096553"/>
+          </a:xfrm>
+          <a:prstGeom prst="rect">
+            <a:avLst/>
+          </a:prstGeom>
+        </p:spPr>
+      </p:pic>
+    </p:spTree>
+    <p:extLst>
+      <p:ext uri="{BB962C8B-B14F-4D97-AF65-F5344CB8AC3E}">
+        <p14:creationId xmlns:p14="http://schemas.microsoft.com/office/powerpoint/2010/main" val="1508398580"/>
+      </p:ext>
+    </p:extLst>
+  </p:cSld>
+  <p:clrMapOvr>
+    <a:masterClrMapping/>
+  </p:clrMapOvr>
+</p:sld>
+</file>
+
+<file path=ppt/slides/slide9.xml><?xml version="1.0" encoding="utf-8"?>
+<p:sld xmlns:a="http://schemas.openxmlformats.org/drawingml/2006/main" xmlns:r="http://schemas.openxmlformats.org/officeDocument/2006/relationships" xmlns:p="http://schemas.openxmlformats.org/presentationml/2006/main">
+  <p:cSld>
+    <p:spTree>
+      <p:nvGrpSpPr>
+        <p:cNvPr id="1" name=""/>
+        <p:cNvGrpSpPr/>
+        <p:nvPr/>
+      </p:nvGrpSpPr>
+      <p:grpSpPr>
+        <a:xfrm>
+          <a:off x="0" y="0"/>
+          <a:ext cx="0" cy="0"/>
+          <a:chOff x="0" y="0"/>
+          <a:chExt cx="0" cy="0"/>
+        </a:xfrm>
+      </p:grpSpPr>
+      <p:sp>
+        <p:nvSpPr>
+          <p:cNvPr id="2" name="Title 1">
+            <a:extLst>
+              <a:ext uri="{FF2B5EF4-FFF2-40B4-BE49-F238E27FC236}">
+                <a16:creationId xmlns:a16="http://schemas.microsoft.com/office/drawing/2014/main" id="{86BDD6E9-964A-812D-D3B2-86FC83F2F232}"/>
+              </a:ext>
+            </a:extLst>
+          </p:cNvPr>
+          <p:cNvSpPr>
+            <a:spLocks noGrp="1"/>
+          </p:cNvSpPr>
+          <p:nvPr>
+            <p:ph type="title"/>
+          </p:nvPr>
+        </p:nvSpPr>
+        <p:spPr/>
+        <p:txBody>
+          <a:bodyPr/>
+          <a:lstStyle/>
+          <a:p>
+            <a:r>
+              <a:rPr lang="en-US" dirty="0"/>
+              <a:t>64-bit Logic Shift Left</a:t>
+            </a:r>
+          </a:p>
+        </p:txBody>
+      </p:sp>
+      <p:sp>
+        <p:nvSpPr>
+          <p:cNvPr id="3" name="Slide Number Placeholder 2">
+            <a:extLst>
+              <a:ext uri="{FF2B5EF4-FFF2-40B4-BE49-F238E27FC236}">
+                <a16:creationId xmlns:a16="http://schemas.microsoft.com/office/drawing/2014/main" id="{F415B5D9-8CA8-427B-A0A6-F24F6B846104}"/>
+              </a:ext>
+            </a:extLst>
+          </p:cNvPr>
+          <p:cNvSpPr>
+            <a:spLocks noGrp="1"/>
+          </p:cNvSpPr>
+          <p:nvPr>
+            <p:ph type="sldNum" sz="quarter" idx="12"/>
+          </p:nvPr>
+        </p:nvSpPr>
+        <p:spPr/>
+        <p:txBody>
+          <a:bodyPr/>
+          <a:lstStyle/>
+          <a:p>
+            <a:fld id="{EA7C8D44-3667-46F6-9772-CC52308E2A7F}" type="slidenum">
+              <a:rPr kumimoji="0" lang="en-US" smtClean="0"/>
+              <a:pPr/>
+              <a:t>9</a:t>
+            </a:fld>
+            <a:endParaRPr kumimoji="0" lang="en-US" dirty="0"/>
+          </a:p>
+        </p:txBody>
+      </p:sp>
+      <p:sp>
+        <p:nvSpPr>
+          <p:cNvPr id="4" name="Content Placeholder 3">
+            <a:extLst>
+              <a:ext uri="{FF2B5EF4-FFF2-40B4-BE49-F238E27FC236}">
+                <a16:creationId xmlns:a16="http://schemas.microsoft.com/office/drawing/2014/main" id="{ED87AF0E-3042-5B79-52D1-2F094E3BB11D}"/>
+              </a:ext>
+            </a:extLst>
+          </p:cNvPr>
           <p:cNvSpPr>
             <a:spLocks noGrp="1"/>
           </p:cNvSpPr>
@@ -8810,1040 +11524,65 @@
         </p:nvSpPr>
         <p:spPr>
           <a:xfrm>
-            <a:off x="482301" y="1152861"/>
-            <a:ext cx="8229600" cy="2123739"/>
+            <a:off x="609600" y="3733800"/>
+            <a:ext cx="10972800" cy="2622550"/>
           </a:xfrm>
         </p:spPr>
-        <p:style>
-          <a:lnRef idx="2">
-            <a:schemeClr val="accent1"/>
-          </a:lnRef>
-          <a:fillRef idx="1">
-            <a:schemeClr val="lt1"/>
-          </a:fillRef>
-          <a:effectRef idx="0">
-            <a:schemeClr val="accent1"/>
-          </a:effectRef>
-          <a:fontRef idx="minor">
-            <a:schemeClr val="dk1"/>
-          </a:fontRef>
-        </p:style>
         <p:txBody>
           <a:bodyPr>
-            <a:normAutofit lnSpcReduction="10000"/>
+            <a:normAutofit/>
           </a:bodyPr>
           <a:lstStyle/>
           <a:p>
-            <a:pPr marL="0" indent="0">
-              <a:buNone/>
-            </a:pPr>
-            <a:r>
-              <a:rPr lang="en-US" sz="1600" b="1" dirty="0">
-                <a:solidFill>
-                  <a:schemeClr val="bg1">
-                    <a:lumMod val="50000"/>
-                  </a:schemeClr>
-                </a:solidFill>
-                <a:latin typeface="Consolas" panose="020B0609020204030204" pitchFamily="49" charset="0"/>
-                <a:cs typeface="Consolas" panose="020B0609020204030204" pitchFamily="49" charset="0"/>
-              </a:rPr>
-              <a:t>  ; product (</a:t>
-            </a:r>
-            <a:r>
-              <a:rPr lang="en-US" sz="1600" b="1" dirty="0" err="1">
-                <a:solidFill>
-                  <a:schemeClr val="bg1">
-                    <a:lumMod val="50000"/>
-                  </a:schemeClr>
-                </a:solidFill>
-                <a:latin typeface="Consolas" panose="020B0609020204030204" pitchFamily="49" charset="0"/>
-                <a:cs typeface="Consolas" panose="020B0609020204030204" pitchFamily="49" charset="0"/>
-              </a:rPr>
-              <a:t>r5:r4</a:t>
-            </a:r>
-            <a:r>
-              <a:rPr lang="en-US" sz="1600" b="1" dirty="0">
-                <a:solidFill>
-                  <a:schemeClr val="bg1">
-                    <a:lumMod val="50000"/>
-                  </a:schemeClr>
-                </a:solidFill>
-                <a:latin typeface="Consolas" panose="020B0609020204030204" pitchFamily="49" charset="0"/>
-                <a:cs typeface="Consolas" panose="020B0609020204030204" pitchFamily="49" charset="0"/>
-              </a:rPr>
-              <a:t>) = multiplier (</a:t>
-            </a:r>
-            <a:r>
-              <a:rPr lang="en-US" sz="1600" b="1" dirty="0" err="1">
-                <a:solidFill>
-                  <a:schemeClr val="bg1">
-                    <a:lumMod val="50000"/>
-                  </a:schemeClr>
-                </a:solidFill>
-                <a:latin typeface="Consolas" panose="020B0609020204030204" pitchFamily="49" charset="0"/>
-                <a:cs typeface="Consolas" panose="020B0609020204030204" pitchFamily="49" charset="0"/>
-              </a:rPr>
-              <a:t>r1:r0</a:t>
-            </a:r>
-            <a:r>
-              <a:rPr lang="en-US" sz="1600" b="1" dirty="0">
-                <a:solidFill>
-                  <a:schemeClr val="bg1">
-                    <a:lumMod val="50000"/>
-                  </a:schemeClr>
-                </a:solidFill>
-                <a:latin typeface="Consolas" panose="020B0609020204030204" pitchFamily="49" charset="0"/>
-                <a:cs typeface="Consolas" panose="020B0609020204030204" pitchFamily="49" charset="0"/>
-              </a:rPr>
-              <a:t>) × multiplicand (</a:t>
-            </a:r>
-            <a:r>
-              <a:rPr lang="en-US" sz="1600" b="1" dirty="0" err="1">
-                <a:solidFill>
-                  <a:schemeClr val="bg1">
-                    <a:lumMod val="50000"/>
-                  </a:schemeClr>
-                </a:solidFill>
-                <a:latin typeface="Consolas" panose="020B0609020204030204" pitchFamily="49" charset="0"/>
-                <a:cs typeface="Consolas" panose="020B0609020204030204" pitchFamily="49" charset="0"/>
-              </a:rPr>
-              <a:t>r3:r2</a:t>
-            </a:r>
-            <a:r>
-              <a:rPr lang="en-US" sz="1600" b="1" dirty="0">
-                <a:solidFill>
-                  <a:schemeClr val="bg1">
-                    <a:lumMod val="50000"/>
-                  </a:schemeClr>
-                </a:solidFill>
-                <a:latin typeface="Consolas" panose="020B0609020204030204" pitchFamily="49" charset="0"/>
-                <a:cs typeface="Consolas" panose="020B0609020204030204" pitchFamily="49" charset="0"/>
-              </a:rPr>
-              <a:t>) </a:t>
-            </a:r>
-          </a:p>
-          <a:p>
-            <a:pPr marL="0" indent="0">
-              <a:buNone/>
-            </a:pPr>
-            <a:r>
-              <a:rPr lang="en-US" sz="1600" b="1" dirty="0">
-                <a:solidFill>
-                  <a:schemeClr val="bg1">
-                    <a:lumMod val="50000"/>
-                  </a:schemeClr>
-                </a:solidFill>
-                <a:latin typeface="Consolas" panose="020B0609020204030204" pitchFamily="49" charset="0"/>
-                <a:cs typeface="Consolas" panose="020B0609020204030204" pitchFamily="49" charset="0"/>
-              </a:rPr>
-              <a:t>  ; (</a:t>
-            </a:r>
-            <a:r>
-              <a:rPr lang="en-US" sz="1600" b="1" dirty="0" err="1">
-                <a:solidFill>
-                  <a:schemeClr val="bg1">
-                    <a:lumMod val="50000"/>
-                  </a:schemeClr>
-                </a:solidFill>
-                <a:latin typeface="Consolas" panose="020B0609020204030204" pitchFamily="49" charset="0"/>
-                <a:cs typeface="Consolas" panose="020B0609020204030204" pitchFamily="49" charset="0"/>
-              </a:rPr>
-              <a:t>r5:r4</a:t>
-            </a:r>
-            <a:r>
-              <a:rPr lang="en-US" sz="1600" b="1" dirty="0">
-                <a:solidFill>
-                  <a:schemeClr val="bg1">
-                    <a:lumMod val="50000"/>
-                  </a:schemeClr>
-                </a:solidFill>
-                <a:latin typeface="Consolas" panose="020B0609020204030204" pitchFamily="49" charset="0"/>
-                <a:cs typeface="Consolas" panose="020B0609020204030204" pitchFamily="49" charset="0"/>
-              </a:rPr>
-              <a:t>) = </a:t>
-            </a:r>
-            <a:r>
-              <a:rPr lang="en-US" sz="1600" b="1" dirty="0" err="1">
-                <a:solidFill>
-                  <a:schemeClr val="bg1">
-                    <a:lumMod val="50000"/>
-                  </a:schemeClr>
-                </a:solidFill>
-                <a:latin typeface="Consolas" panose="020B0609020204030204" pitchFamily="49" charset="0"/>
-                <a:cs typeface="Consolas" panose="020B0609020204030204" pitchFamily="49" charset="0"/>
-              </a:rPr>
-              <a:t>r0</a:t>
-            </a:r>
-            <a:r>
-              <a:rPr lang="en-US" sz="1600" b="1" dirty="0">
-                <a:solidFill>
-                  <a:schemeClr val="bg1">
-                    <a:lumMod val="50000"/>
-                  </a:schemeClr>
-                </a:solidFill>
-                <a:latin typeface="Consolas" panose="020B0609020204030204" pitchFamily="49" charset="0"/>
-                <a:cs typeface="Consolas" panose="020B0609020204030204" pitchFamily="49" charset="0"/>
-              </a:rPr>
-              <a:t> × </a:t>
-            </a:r>
-            <a:r>
-              <a:rPr lang="en-US" sz="1600" b="1" dirty="0" err="1">
-                <a:solidFill>
-                  <a:schemeClr val="bg1">
-                    <a:lumMod val="50000"/>
-                  </a:schemeClr>
-                </a:solidFill>
-                <a:latin typeface="Consolas" panose="020B0609020204030204" pitchFamily="49" charset="0"/>
-                <a:cs typeface="Consolas" panose="020B0609020204030204" pitchFamily="49" charset="0"/>
-              </a:rPr>
-              <a:t>r2</a:t>
-            </a:r>
-            <a:r>
-              <a:rPr lang="en-US" sz="1600" b="1" dirty="0">
-                <a:solidFill>
-                  <a:schemeClr val="bg1">
-                    <a:lumMod val="50000"/>
-                  </a:schemeClr>
-                </a:solidFill>
-                <a:latin typeface="Consolas" panose="020B0609020204030204" pitchFamily="49" charset="0"/>
-                <a:cs typeface="Consolas" panose="020B0609020204030204" pitchFamily="49" charset="0"/>
-              </a:rPr>
-              <a:t> + 2</a:t>
-            </a:r>
-            <a:r>
-              <a:rPr lang="en-US" sz="1600" b="1" baseline="30000" dirty="0">
-                <a:solidFill>
-                  <a:schemeClr val="bg1">
-                    <a:lumMod val="50000"/>
-                  </a:schemeClr>
-                </a:solidFill>
-                <a:latin typeface="Consolas" panose="020B0609020204030204" pitchFamily="49" charset="0"/>
-                <a:cs typeface="Consolas" panose="020B0609020204030204" pitchFamily="49" charset="0"/>
-              </a:rPr>
-              <a:t>32 </a:t>
-            </a:r>
-            <a:r>
-              <a:rPr lang="en-US" sz="1600" b="1" dirty="0">
-                <a:solidFill>
-                  <a:schemeClr val="bg1">
-                    <a:lumMod val="50000"/>
-                  </a:schemeClr>
-                </a:solidFill>
-                <a:latin typeface="Consolas" panose="020B0609020204030204" pitchFamily="49" charset="0"/>
-                <a:cs typeface="Consolas" panose="020B0609020204030204" pitchFamily="49" charset="0"/>
-              </a:rPr>
-              <a:t>× (</a:t>
-            </a:r>
-            <a:r>
-              <a:rPr lang="en-US" sz="1600" b="1" dirty="0" err="1">
-                <a:solidFill>
-                  <a:schemeClr val="bg1">
-                    <a:lumMod val="50000"/>
-                  </a:schemeClr>
-                </a:solidFill>
-                <a:latin typeface="Consolas" panose="020B0609020204030204" pitchFamily="49" charset="0"/>
-                <a:cs typeface="Consolas" panose="020B0609020204030204" pitchFamily="49" charset="0"/>
-              </a:rPr>
-              <a:t>r1</a:t>
-            </a:r>
-            <a:r>
-              <a:rPr lang="en-US" sz="1600" b="1" dirty="0">
-                <a:solidFill>
-                  <a:schemeClr val="bg1">
-                    <a:lumMod val="50000"/>
-                  </a:schemeClr>
-                </a:solidFill>
-                <a:latin typeface="Consolas" panose="020B0609020204030204" pitchFamily="49" charset="0"/>
-                <a:cs typeface="Consolas" panose="020B0609020204030204" pitchFamily="49" charset="0"/>
-              </a:rPr>
-              <a:t> × </a:t>
-            </a:r>
-            <a:r>
-              <a:rPr lang="en-US" sz="1600" b="1" dirty="0" err="1">
-                <a:solidFill>
-                  <a:schemeClr val="bg1">
-                    <a:lumMod val="50000"/>
-                  </a:schemeClr>
-                </a:solidFill>
-                <a:latin typeface="Consolas" panose="020B0609020204030204" pitchFamily="49" charset="0"/>
-                <a:cs typeface="Consolas" panose="020B0609020204030204" pitchFamily="49" charset="0"/>
-              </a:rPr>
-              <a:t>r2</a:t>
-            </a:r>
-            <a:r>
-              <a:rPr lang="en-US" sz="1600" b="1" dirty="0">
-                <a:solidFill>
-                  <a:schemeClr val="bg1">
-                    <a:lumMod val="50000"/>
-                  </a:schemeClr>
-                </a:solidFill>
-                <a:latin typeface="Consolas" panose="020B0609020204030204" pitchFamily="49" charset="0"/>
-                <a:cs typeface="Consolas" panose="020B0609020204030204" pitchFamily="49" charset="0"/>
-              </a:rPr>
-              <a:t> + </a:t>
-            </a:r>
-            <a:r>
-              <a:rPr lang="en-US" sz="1600" b="1" dirty="0" err="1">
-                <a:solidFill>
-                  <a:schemeClr val="bg1">
-                    <a:lumMod val="50000"/>
-                  </a:schemeClr>
-                </a:solidFill>
-                <a:latin typeface="Consolas" panose="020B0609020204030204" pitchFamily="49" charset="0"/>
-                <a:cs typeface="Consolas" panose="020B0609020204030204" pitchFamily="49" charset="0"/>
-              </a:rPr>
-              <a:t>r0</a:t>
-            </a:r>
-            <a:r>
-              <a:rPr lang="en-US" sz="1600" b="1" dirty="0">
-                <a:solidFill>
-                  <a:schemeClr val="bg1">
-                    <a:lumMod val="50000"/>
-                  </a:schemeClr>
-                </a:solidFill>
-                <a:latin typeface="Consolas" panose="020B0609020204030204" pitchFamily="49" charset="0"/>
-                <a:cs typeface="Consolas" panose="020B0609020204030204" pitchFamily="49" charset="0"/>
-              </a:rPr>
-              <a:t> × </a:t>
-            </a:r>
-            <a:r>
-              <a:rPr lang="en-US" sz="1600" b="1" dirty="0" err="1">
-                <a:solidFill>
-                  <a:schemeClr val="bg1">
-                    <a:lumMod val="50000"/>
-                  </a:schemeClr>
-                </a:solidFill>
-                <a:latin typeface="Consolas" panose="020B0609020204030204" pitchFamily="49" charset="0"/>
-                <a:cs typeface="Consolas" panose="020B0609020204030204" pitchFamily="49" charset="0"/>
-              </a:rPr>
-              <a:t>r3</a:t>
-            </a:r>
-            <a:r>
-              <a:rPr lang="en-US" sz="1600" b="1" dirty="0">
-                <a:solidFill>
-                  <a:schemeClr val="bg1">
-                    <a:lumMod val="50000"/>
-                  </a:schemeClr>
-                </a:solidFill>
-                <a:latin typeface="Consolas" panose="020B0609020204030204" pitchFamily="49" charset="0"/>
-                <a:cs typeface="Consolas" panose="020B0609020204030204" pitchFamily="49" charset="0"/>
-              </a:rPr>
-              <a:t>) + 2</a:t>
-            </a:r>
-            <a:r>
-              <a:rPr lang="en-US" sz="1600" b="1" baseline="30000" dirty="0">
-                <a:solidFill>
-                  <a:schemeClr val="bg1">
-                    <a:lumMod val="50000"/>
-                  </a:schemeClr>
-                </a:solidFill>
-                <a:latin typeface="Consolas" panose="020B0609020204030204" pitchFamily="49" charset="0"/>
-                <a:cs typeface="Consolas" panose="020B0609020204030204" pitchFamily="49" charset="0"/>
-              </a:rPr>
-              <a:t>64</a:t>
-            </a:r>
-            <a:r>
-              <a:rPr lang="en-US" sz="1600" b="1" dirty="0">
-                <a:solidFill>
-                  <a:schemeClr val="bg1">
-                    <a:lumMod val="50000"/>
-                  </a:schemeClr>
-                </a:solidFill>
-                <a:latin typeface="Consolas" panose="020B0609020204030204" pitchFamily="49" charset="0"/>
-                <a:cs typeface="Consolas" panose="020B0609020204030204" pitchFamily="49" charset="0"/>
-              </a:rPr>
-              <a:t> × </a:t>
-            </a:r>
-            <a:r>
-              <a:rPr lang="en-US" sz="1600" b="1" dirty="0" err="1">
-                <a:solidFill>
-                  <a:schemeClr val="bg1">
-                    <a:lumMod val="50000"/>
-                  </a:schemeClr>
-                </a:solidFill>
-                <a:latin typeface="Consolas" panose="020B0609020204030204" pitchFamily="49" charset="0"/>
-                <a:cs typeface="Consolas" panose="020B0609020204030204" pitchFamily="49" charset="0"/>
-              </a:rPr>
-              <a:t>r1</a:t>
-            </a:r>
-            <a:r>
-              <a:rPr lang="en-US" sz="1600" b="1" dirty="0">
-                <a:solidFill>
-                  <a:schemeClr val="bg1">
-                    <a:lumMod val="50000"/>
-                  </a:schemeClr>
-                </a:solidFill>
-                <a:latin typeface="Consolas" panose="020B0609020204030204" pitchFamily="49" charset="0"/>
-                <a:cs typeface="Consolas" panose="020B0609020204030204" pitchFamily="49" charset="0"/>
-              </a:rPr>
-              <a:t> × </a:t>
-            </a:r>
-            <a:r>
-              <a:rPr lang="en-US" sz="1600" b="1" dirty="0" err="1">
-                <a:solidFill>
-                  <a:schemeClr val="bg1">
-                    <a:lumMod val="50000"/>
-                  </a:schemeClr>
-                </a:solidFill>
-                <a:latin typeface="Consolas" panose="020B0609020204030204" pitchFamily="49" charset="0"/>
-                <a:cs typeface="Consolas" panose="020B0609020204030204" pitchFamily="49" charset="0"/>
-              </a:rPr>
-              <a:t>r3</a:t>
-            </a:r>
-            <a:endParaRPr lang="en-US" sz="1600" b="1" dirty="0">
-              <a:solidFill>
-                <a:schemeClr val="bg1">
-                  <a:lumMod val="50000"/>
-                </a:schemeClr>
-              </a:solidFill>
-              <a:latin typeface="Consolas" panose="020B0609020204030204" pitchFamily="49" charset="0"/>
-              <a:cs typeface="Consolas" panose="020B0609020204030204" pitchFamily="49" charset="0"/>
-            </a:endParaRPr>
-          </a:p>
-          <a:p>
-            <a:pPr marL="0" indent="0">
-              <a:buNone/>
-            </a:pPr>
-            <a:r>
-              <a:rPr lang="en-US" sz="1600" b="1" dirty="0">
-                <a:solidFill>
-                  <a:schemeClr val="bg1">
-                    <a:lumMod val="50000"/>
-                  </a:schemeClr>
-                </a:solidFill>
-                <a:latin typeface="Consolas" panose="020B0609020204030204" pitchFamily="49" charset="0"/>
-                <a:cs typeface="Consolas" panose="020B0609020204030204" pitchFamily="49" charset="0"/>
-              </a:rPr>
-              <a:t>  ; The last item exceeds 64 bits and thus it is ignored.</a:t>
-            </a:r>
-          </a:p>
-          <a:p>
-            <a:pPr marL="0" indent="0">
-              <a:buNone/>
-            </a:pPr>
-            <a:r>
-              <a:rPr lang="en-US" sz="1600" b="1" dirty="0">
-                <a:latin typeface="Consolas" panose="020B0609020204030204" pitchFamily="49" charset="0"/>
-                <a:cs typeface="Consolas" panose="020B0609020204030204" pitchFamily="49" charset="0"/>
-              </a:rPr>
-              <a:t> </a:t>
-            </a:r>
-          </a:p>
-          <a:p>
-            <a:pPr marL="0" indent="0">
-              <a:buNone/>
-            </a:pPr>
-            <a:r>
-              <a:rPr lang="en-US" sz="1600" b="1" dirty="0">
-                <a:latin typeface="Consolas" panose="020B0609020204030204" pitchFamily="49" charset="0"/>
-                <a:cs typeface="Consolas" panose="020B0609020204030204" pitchFamily="49" charset="0"/>
-              </a:rPr>
-              <a:t>  </a:t>
-            </a:r>
-            <a:r>
-              <a:rPr lang="en-US" sz="1600" b="1" dirty="0" err="1">
-                <a:solidFill>
-                  <a:srgbClr val="C00000"/>
-                </a:solidFill>
-                <a:latin typeface="Consolas" panose="020B0609020204030204" pitchFamily="49" charset="0"/>
-                <a:cs typeface="Consolas" panose="020B0609020204030204" pitchFamily="49" charset="0"/>
-              </a:rPr>
-              <a:t>UMULL</a:t>
-            </a:r>
-            <a:r>
-              <a:rPr lang="en-US" sz="1600" b="1" dirty="0">
-                <a:solidFill>
-                  <a:srgbClr val="C00000"/>
-                </a:solidFill>
-                <a:latin typeface="Consolas" panose="020B0609020204030204" pitchFamily="49" charset="0"/>
-                <a:cs typeface="Consolas" panose="020B0609020204030204" pitchFamily="49" charset="0"/>
-              </a:rPr>
-              <a:t> </a:t>
-            </a:r>
-            <a:r>
-              <a:rPr lang="en-US" sz="1600" b="1" dirty="0" err="1">
-                <a:solidFill>
-                  <a:srgbClr val="C00000"/>
-                </a:solidFill>
-                <a:latin typeface="Consolas" panose="020B0609020204030204" pitchFamily="49" charset="0"/>
-                <a:cs typeface="Consolas" panose="020B0609020204030204" pitchFamily="49" charset="0"/>
-              </a:rPr>
-              <a:t>r4</a:t>
-            </a:r>
-            <a:r>
-              <a:rPr lang="en-US" sz="1600" b="1" dirty="0">
-                <a:solidFill>
-                  <a:srgbClr val="C00000"/>
-                </a:solidFill>
-                <a:latin typeface="Consolas" panose="020B0609020204030204" pitchFamily="49" charset="0"/>
-                <a:cs typeface="Consolas" panose="020B0609020204030204" pitchFamily="49" charset="0"/>
-              </a:rPr>
-              <a:t>, </a:t>
-            </a:r>
-            <a:r>
-              <a:rPr lang="en-US" sz="1600" b="1" dirty="0" err="1">
-                <a:solidFill>
-                  <a:srgbClr val="C00000"/>
-                </a:solidFill>
-                <a:latin typeface="Consolas" panose="020B0609020204030204" pitchFamily="49" charset="0"/>
-                <a:cs typeface="Consolas" panose="020B0609020204030204" pitchFamily="49" charset="0"/>
-              </a:rPr>
-              <a:t>r5</a:t>
-            </a:r>
-            <a:r>
-              <a:rPr lang="en-US" sz="1600" b="1" dirty="0">
-                <a:solidFill>
-                  <a:srgbClr val="C00000"/>
-                </a:solidFill>
-                <a:latin typeface="Consolas" panose="020B0609020204030204" pitchFamily="49" charset="0"/>
-                <a:cs typeface="Consolas" panose="020B0609020204030204" pitchFamily="49" charset="0"/>
-              </a:rPr>
-              <a:t>, </a:t>
-            </a:r>
-            <a:r>
-              <a:rPr lang="en-US" sz="1600" b="1" dirty="0" err="1">
-                <a:solidFill>
-                  <a:srgbClr val="C00000"/>
-                </a:solidFill>
-                <a:latin typeface="Consolas" panose="020B0609020204030204" pitchFamily="49" charset="0"/>
-                <a:cs typeface="Consolas" panose="020B0609020204030204" pitchFamily="49" charset="0"/>
-              </a:rPr>
-              <a:t>r0</a:t>
-            </a:r>
-            <a:r>
-              <a:rPr lang="en-US" sz="1600" b="1" dirty="0">
-                <a:solidFill>
-                  <a:srgbClr val="C00000"/>
-                </a:solidFill>
-                <a:latin typeface="Consolas" panose="020B0609020204030204" pitchFamily="49" charset="0"/>
-                <a:cs typeface="Consolas" panose="020B0609020204030204" pitchFamily="49" charset="0"/>
-              </a:rPr>
-              <a:t>, </a:t>
-            </a:r>
-            <a:r>
-              <a:rPr lang="en-US" sz="1600" b="1" dirty="0" err="1">
-                <a:solidFill>
-                  <a:srgbClr val="C00000"/>
-                </a:solidFill>
-                <a:latin typeface="Consolas" panose="020B0609020204030204" pitchFamily="49" charset="0"/>
-                <a:cs typeface="Consolas" panose="020B0609020204030204" pitchFamily="49" charset="0"/>
-              </a:rPr>
-              <a:t>r2</a:t>
-            </a:r>
-            <a:r>
-              <a:rPr lang="en-US" sz="1600" b="1" dirty="0">
-                <a:solidFill>
-                  <a:srgbClr val="C00000"/>
-                </a:solidFill>
-                <a:latin typeface="Consolas" panose="020B0609020204030204" pitchFamily="49" charset="0"/>
-                <a:cs typeface="Consolas" panose="020B0609020204030204" pitchFamily="49" charset="0"/>
-              </a:rPr>
-              <a:t>    </a:t>
-            </a:r>
-            <a:r>
-              <a:rPr lang="en-US" sz="1600" b="1" dirty="0">
-                <a:solidFill>
-                  <a:schemeClr val="bg1">
-                    <a:lumMod val="50000"/>
-                  </a:schemeClr>
-                </a:solidFill>
-                <a:latin typeface="Consolas" panose="020B0609020204030204" pitchFamily="49" charset="0"/>
-                <a:cs typeface="Consolas" panose="020B0609020204030204" pitchFamily="49" charset="0"/>
-              </a:rPr>
-              <a:t>; (</a:t>
-            </a:r>
-            <a:r>
-              <a:rPr lang="en-US" sz="1600" b="1" dirty="0" err="1">
-                <a:solidFill>
-                  <a:schemeClr val="bg1">
-                    <a:lumMod val="50000"/>
-                  </a:schemeClr>
-                </a:solidFill>
-                <a:latin typeface="Consolas" panose="020B0609020204030204" pitchFamily="49" charset="0"/>
-                <a:cs typeface="Consolas" panose="020B0609020204030204" pitchFamily="49" charset="0"/>
-              </a:rPr>
-              <a:t>r5:r4</a:t>
-            </a:r>
-            <a:r>
-              <a:rPr lang="en-US" sz="1600" b="1" dirty="0">
-                <a:solidFill>
-                  <a:schemeClr val="bg1">
-                    <a:lumMod val="50000"/>
-                  </a:schemeClr>
-                </a:solidFill>
-                <a:latin typeface="Consolas" panose="020B0609020204030204" pitchFamily="49" charset="0"/>
-                <a:cs typeface="Consolas" panose="020B0609020204030204" pitchFamily="49" charset="0"/>
-              </a:rPr>
-              <a:t>) = </a:t>
-            </a:r>
-            <a:r>
-              <a:rPr lang="en-US" sz="1600" b="1" dirty="0" err="1">
-                <a:solidFill>
-                  <a:schemeClr val="bg1">
-                    <a:lumMod val="50000"/>
-                  </a:schemeClr>
-                </a:solidFill>
-                <a:latin typeface="Consolas" panose="020B0609020204030204" pitchFamily="49" charset="0"/>
-                <a:cs typeface="Consolas" panose="020B0609020204030204" pitchFamily="49" charset="0"/>
-              </a:rPr>
-              <a:t>r0</a:t>
-            </a:r>
-            <a:r>
-              <a:rPr lang="en-US" sz="1600" b="1" dirty="0">
-                <a:solidFill>
-                  <a:schemeClr val="bg1">
-                    <a:lumMod val="50000"/>
-                  </a:schemeClr>
-                </a:solidFill>
-                <a:latin typeface="Consolas" panose="020B0609020204030204" pitchFamily="49" charset="0"/>
-                <a:cs typeface="Consolas" panose="020B0609020204030204" pitchFamily="49" charset="0"/>
-              </a:rPr>
-              <a:t> * </a:t>
-            </a:r>
-            <a:r>
-              <a:rPr lang="en-US" sz="1600" b="1" dirty="0" err="1">
-                <a:solidFill>
-                  <a:schemeClr val="bg1">
-                    <a:lumMod val="50000"/>
-                  </a:schemeClr>
-                </a:solidFill>
-                <a:latin typeface="Consolas" panose="020B0609020204030204" pitchFamily="49" charset="0"/>
-                <a:cs typeface="Consolas" panose="020B0609020204030204" pitchFamily="49" charset="0"/>
-              </a:rPr>
-              <a:t>r2</a:t>
-            </a:r>
-            <a:endParaRPr lang="en-US" sz="1600" b="1" dirty="0">
-              <a:solidFill>
-                <a:schemeClr val="bg1">
-                  <a:lumMod val="50000"/>
-                </a:schemeClr>
-              </a:solidFill>
-              <a:latin typeface="Consolas" panose="020B0609020204030204" pitchFamily="49" charset="0"/>
-              <a:cs typeface="Consolas" panose="020B0609020204030204" pitchFamily="49" charset="0"/>
-            </a:endParaRPr>
-          </a:p>
-          <a:p>
-            <a:pPr marL="0" indent="0">
-              <a:buNone/>
-            </a:pPr>
-            <a:r>
-              <a:rPr lang="en-US" sz="1600" b="1" dirty="0">
-                <a:latin typeface="Consolas" panose="020B0609020204030204" pitchFamily="49" charset="0"/>
-                <a:cs typeface="Consolas" panose="020B0609020204030204" pitchFamily="49" charset="0"/>
-              </a:rPr>
-              <a:t>  </a:t>
-            </a:r>
-            <a:r>
-              <a:rPr lang="en-US" sz="1600" b="1" dirty="0">
-                <a:solidFill>
-                  <a:srgbClr val="C00000"/>
-                </a:solidFill>
-                <a:latin typeface="Consolas" panose="020B0609020204030204" pitchFamily="49" charset="0"/>
-                <a:cs typeface="Consolas" panose="020B0609020204030204" pitchFamily="49" charset="0"/>
-              </a:rPr>
-              <a:t>MLA   </a:t>
-            </a:r>
-            <a:r>
-              <a:rPr lang="en-US" sz="1600" b="1" dirty="0" err="1">
-                <a:solidFill>
-                  <a:srgbClr val="C00000"/>
-                </a:solidFill>
-                <a:latin typeface="Consolas" panose="020B0609020204030204" pitchFamily="49" charset="0"/>
-                <a:cs typeface="Consolas" panose="020B0609020204030204" pitchFamily="49" charset="0"/>
-              </a:rPr>
-              <a:t>r5</a:t>
-            </a:r>
-            <a:r>
-              <a:rPr lang="en-US" sz="1600" b="1" dirty="0">
-                <a:solidFill>
-                  <a:srgbClr val="C00000"/>
-                </a:solidFill>
-                <a:latin typeface="Consolas" panose="020B0609020204030204" pitchFamily="49" charset="0"/>
-                <a:cs typeface="Consolas" panose="020B0609020204030204" pitchFamily="49" charset="0"/>
-              </a:rPr>
-              <a:t>, </a:t>
-            </a:r>
-            <a:r>
-              <a:rPr lang="en-US" sz="1600" b="1" dirty="0" err="1">
-                <a:solidFill>
-                  <a:srgbClr val="C00000"/>
-                </a:solidFill>
-                <a:latin typeface="Consolas" panose="020B0609020204030204" pitchFamily="49" charset="0"/>
-                <a:cs typeface="Consolas" panose="020B0609020204030204" pitchFamily="49" charset="0"/>
-              </a:rPr>
-              <a:t>r1</a:t>
-            </a:r>
-            <a:r>
-              <a:rPr lang="en-US" sz="1600" b="1" dirty="0">
-                <a:solidFill>
-                  <a:srgbClr val="C00000"/>
-                </a:solidFill>
-                <a:latin typeface="Consolas" panose="020B0609020204030204" pitchFamily="49" charset="0"/>
-                <a:cs typeface="Consolas" panose="020B0609020204030204" pitchFamily="49" charset="0"/>
-              </a:rPr>
-              <a:t>, </a:t>
-            </a:r>
-            <a:r>
-              <a:rPr lang="en-US" sz="1600" b="1" dirty="0" err="1">
-                <a:solidFill>
-                  <a:srgbClr val="C00000"/>
-                </a:solidFill>
-                <a:latin typeface="Consolas" panose="020B0609020204030204" pitchFamily="49" charset="0"/>
-                <a:cs typeface="Consolas" panose="020B0609020204030204" pitchFamily="49" charset="0"/>
-              </a:rPr>
-              <a:t>r2</a:t>
-            </a:r>
-            <a:r>
-              <a:rPr lang="en-US" sz="1600" b="1" dirty="0">
-                <a:solidFill>
-                  <a:srgbClr val="C00000"/>
-                </a:solidFill>
-                <a:latin typeface="Consolas" panose="020B0609020204030204" pitchFamily="49" charset="0"/>
-                <a:cs typeface="Consolas" panose="020B0609020204030204" pitchFamily="49" charset="0"/>
-              </a:rPr>
-              <a:t>, </a:t>
-            </a:r>
-            <a:r>
-              <a:rPr lang="en-US" sz="1600" b="1" dirty="0" err="1">
-                <a:solidFill>
-                  <a:srgbClr val="C00000"/>
-                </a:solidFill>
-                <a:latin typeface="Consolas" panose="020B0609020204030204" pitchFamily="49" charset="0"/>
-                <a:cs typeface="Consolas" panose="020B0609020204030204" pitchFamily="49" charset="0"/>
-              </a:rPr>
-              <a:t>r5</a:t>
-            </a:r>
-            <a:r>
-              <a:rPr lang="en-US" sz="1600" b="1" dirty="0">
-                <a:solidFill>
-                  <a:srgbClr val="C00000"/>
-                </a:solidFill>
-                <a:latin typeface="Consolas" panose="020B0609020204030204" pitchFamily="49" charset="0"/>
-                <a:cs typeface="Consolas" panose="020B0609020204030204" pitchFamily="49" charset="0"/>
-              </a:rPr>
-              <a:t>    </a:t>
-            </a:r>
-            <a:r>
-              <a:rPr lang="en-US" sz="1600" b="1" dirty="0">
-                <a:solidFill>
-                  <a:schemeClr val="bg1">
-                    <a:lumMod val="50000"/>
-                  </a:schemeClr>
-                </a:solidFill>
-                <a:latin typeface="Consolas" panose="020B0609020204030204" pitchFamily="49" charset="0"/>
-                <a:cs typeface="Consolas" panose="020B0609020204030204" pitchFamily="49" charset="0"/>
-              </a:rPr>
-              <a:t>; </a:t>
-            </a:r>
-            <a:r>
-              <a:rPr lang="en-US" sz="1600" b="1" dirty="0" err="1">
-                <a:solidFill>
-                  <a:schemeClr val="bg1">
-                    <a:lumMod val="50000"/>
-                  </a:schemeClr>
-                </a:solidFill>
-                <a:latin typeface="Consolas" panose="020B0609020204030204" pitchFamily="49" charset="0"/>
-                <a:cs typeface="Consolas" panose="020B0609020204030204" pitchFamily="49" charset="0"/>
-              </a:rPr>
-              <a:t>r5</a:t>
-            </a:r>
-            <a:r>
-              <a:rPr lang="en-US" sz="1600" b="1" dirty="0">
-                <a:solidFill>
-                  <a:schemeClr val="bg1">
-                    <a:lumMod val="50000"/>
-                  </a:schemeClr>
-                </a:solidFill>
-                <a:latin typeface="Consolas" panose="020B0609020204030204" pitchFamily="49" charset="0"/>
-                <a:cs typeface="Consolas" panose="020B0609020204030204" pitchFamily="49" charset="0"/>
-              </a:rPr>
-              <a:t> = </a:t>
-            </a:r>
-            <a:r>
-              <a:rPr lang="en-US" sz="1600" b="1" dirty="0" err="1">
-                <a:solidFill>
-                  <a:schemeClr val="bg1">
-                    <a:lumMod val="50000"/>
-                  </a:schemeClr>
-                </a:solidFill>
-                <a:latin typeface="Consolas" panose="020B0609020204030204" pitchFamily="49" charset="0"/>
-                <a:cs typeface="Consolas" panose="020B0609020204030204" pitchFamily="49" charset="0"/>
-              </a:rPr>
-              <a:t>r5</a:t>
-            </a:r>
-            <a:r>
-              <a:rPr lang="en-US" sz="1600" b="1" dirty="0">
-                <a:solidFill>
-                  <a:schemeClr val="bg1">
-                    <a:lumMod val="50000"/>
-                  </a:schemeClr>
-                </a:solidFill>
-                <a:latin typeface="Consolas" panose="020B0609020204030204" pitchFamily="49" charset="0"/>
-                <a:cs typeface="Consolas" panose="020B0609020204030204" pitchFamily="49" charset="0"/>
-              </a:rPr>
-              <a:t> + </a:t>
-            </a:r>
-            <a:r>
-              <a:rPr lang="en-US" sz="1600" b="1" dirty="0" err="1">
-                <a:solidFill>
-                  <a:schemeClr val="bg1">
-                    <a:lumMod val="50000"/>
-                  </a:schemeClr>
-                </a:solidFill>
-                <a:latin typeface="Consolas" panose="020B0609020204030204" pitchFamily="49" charset="0"/>
-                <a:cs typeface="Consolas" panose="020B0609020204030204" pitchFamily="49" charset="0"/>
-              </a:rPr>
-              <a:t>r1</a:t>
-            </a:r>
-            <a:r>
-              <a:rPr lang="en-US" sz="1600" b="1" dirty="0">
-                <a:solidFill>
-                  <a:schemeClr val="bg1">
-                    <a:lumMod val="50000"/>
-                  </a:schemeClr>
-                </a:solidFill>
-                <a:latin typeface="Consolas" panose="020B0609020204030204" pitchFamily="49" charset="0"/>
-                <a:cs typeface="Consolas" panose="020B0609020204030204" pitchFamily="49" charset="0"/>
-              </a:rPr>
-              <a:t> * </a:t>
-            </a:r>
-            <a:r>
-              <a:rPr lang="en-US" sz="1600" b="1" dirty="0" err="1">
-                <a:solidFill>
-                  <a:schemeClr val="bg1">
-                    <a:lumMod val="50000"/>
-                  </a:schemeClr>
-                </a:solidFill>
-                <a:latin typeface="Consolas" panose="020B0609020204030204" pitchFamily="49" charset="0"/>
-                <a:cs typeface="Consolas" panose="020B0609020204030204" pitchFamily="49" charset="0"/>
-              </a:rPr>
-              <a:t>r2</a:t>
-            </a:r>
-            <a:endParaRPr lang="en-US" sz="1600" b="1" dirty="0">
-              <a:solidFill>
-                <a:schemeClr val="bg1">
-                  <a:lumMod val="50000"/>
-                </a:schemeClr>
-              </a:solidFill>
-              <a:latin typeface="Consolas" panose="020B0609020204030204" pitchFamily="49" charset="0"/>
-              <a:cs typeface="Consolas" panose="020B0609020204030204" pitchFamily="49" charset="0"/>
-            </a:endParaRPr>
-          </a:p>
-          <a:p>
-            <a:pPr marL="0" indent="0">
-              <a:buNone/>
-            </a:pPr>
-            <a:r>
-              <a:rPr lang="en-US" sz="1600" b="1" dirty="0">
-                <a:latin typeface="Consolas" panose="020B0609020204030204" pitchFamily="49" charset="0"/>
-                <a:cs typeface="Consolas" panose="020B0609020204030204" pitchFamily="49" charset="0"/>
-              </a:rPr>
-              <a:t>  </a:t>
-            </a:r>
-            <a:r>
-              <a:rPr lang="en-US" sz="1600" b="1" dirty="0">
-                <a:solidFill>
-                  <a:srgbClr val="C00000"/>
-                </a:solidFill>
-                <a:latin typeface="Consolas" panose="020B0609020204030204" pitchFamily="49" charset="0"/>
-                <a:cs typeface="Consolas" panose="020B0609020204030204" pitchFamily="49" charset="0"/>
-              </a:rPr>
-              <a:t>MLA   </a:t>
-            </a:r>
-            <a:r>
-              <a:rPr lang="en-US" sz="1600" b="1" dirty="0" err="1">
-                <a:solidFill>
-                  <a:srgbClr val="C00000"/>
-                </a:solidFill>
-                <a:latin typeface="Consolas" panose="020B0609020204030204" pitchFamily="49" charset="0"/>
-                <a:cs typeface="Consolas" panose="020B0609020204030204" pitchFamily="49" charset="0"/>
-              </a:rPr>
-              <a:t>r5</a:t>
-            </a:r>
-            <a:r>
-              <a:rPr lang="en-US" sz="1600" b="1" dirty="0">
-                <a:solidFill>
-                  <a:srgbClr val="C00000"/>
-                </a:solidFill>
-                <a:latin typeface="Consolas" panose="020B0609020204030204" pitchFamily="49" charset="0"/>
-                <a:cs typeface="Consolas" panose="020B0609020204030204" pitchFamily="49" charset="0"/>
-              </a:rPr>
-              <a:t>, </a:t>
-            </a:r>
-            <a:r>
-              <a:rPr lang="en-US" sz="1600" b="1" dirty="0" err="1">
-                <a:solidFill>
-                  <a:srgbClr val="C00000"/>
-                </a:solidFill>
-                <a:latin typeface="Consolas" panose="020B0609020204030204" pitchFamily="49" charset="0"/>
-                <a:cs typeface="Consolas" panose="020B0609020204030204" pitchFamily="49" charset="0"/>
-              </a:rPr>
-              <a:t>r0</a:t>
-            </a:r>
-            <a:r>
-              <a:rPr lang="en-US" sz="1600" b="1" dirty="0">
-                <a:solidFill>
-                  <a:srgbClr val="C00000"/>
-                </a:solidFill>
-                <a:latin typeface="Consolas" panose="020B0609020204030204" pitchFamily="49" charset="0"/>
-                <a:cs typeface="Consolas" panose="020B0609020204030204" pitchFamily="49" charset="0"/>
-              </a:rPr>
-              <a:t>, </a:t>
-            </a:r>
-            <a:r>
-              <a:rPr lang="en-US" sz="1600" b="1" dirty="0" err="1">
-                <a:solidFill>
-                  <a:srgbClr val="C00000"/>
-                </a:solidFill>
-                <a:latin typeface="Consolas" panose="020B0609020204030204" pitchFamily="49" charset="0"/>
-                <a:cs typeface="Consolas" panose="020B0609020204030204" pitchFamily="49" charset="0"/>
-              </a:rPr>
-              <a:t>r3</a:t>
-            </a:r>
-            <a:r>
-              <a:rPr lang="en-US" sz="1600" b="1" dirty="0">
-                <a:solidFill>
-                  <a:srgbClr val="C00000"/>
-                </a:solidFill>
-                <a:latin typeface="Consolas" panose="020B0609020204030204" pitchFamily="49" charset="0"/>
-                <a:cs typeface="Consolas" panose="020B0609020204030204" pitchFamily="49" charset="0"/>
-              </a:rPr>
-              <a:t>, </a:t>
-            </a:r>
-            <a:r>
-              <a:rPr lang="en-US" sz="1600" b="1" dirty="0" err="1">
-                <a:solidFill>
-                  <a:srgbClr val="C00000"/>
-                </a:solidFill>
-                <a:latin typeface="Consolas" panose="020B0609020204030204" pitchFamily="49" charset="0"/>
-                <a:cs typeface="Consolas" panose="020B0609020204030204" pitchFamily="49" charset="0"/>
-              </a:rPr>
-              <a:t>r5</a:t>
-            </a:r>
-            <a:r>
-              <a:rPr lang="en-US" sz="1600" b="1" dirty="0">
-                <a:solidFill>
-                  <a:srgbClr val="C00000"/>
-                </a:solidFill>
-                <a:latin typeface="Consolas" panose="020B0609020204030204" pitchFamily="49" charset="0"/>
-                <a:cs typeface="Consolas" panose="020B0609020204030204" pitchFamily="49" charset="0"/>
-              </a:rPr>
-              <a:t>    </a:t>
-            </a:r>
-            <a:r>
-              <a:rPr lang="en-US" sz="1600" b="1" dirty="0">
-                <a:solidFill>
-                  <a:schemeClr val="bg1">
-                    <a:lumMod val="50000"/>
-                  </a:schemeClr>
-                </a:solidFill>
-                <a:latin typeface="Consolas" panose="020B0609020204030204" pitchFamily="49" charset="0"/>
-                <a:cs typeface="Consolas" panose="020B0609020204030204" pitchFamily="49" charset="0"/>
-              </a:rPr>
-              <a:t>; </a:t>
-            </a:r>
-            <a:r>
-              <a:rPr lang="en-US" sz="1600" b="1" dirty="0" err="1">
-                <a:solidFill>
-                  <a:schemeClr val="bg1">
-                    <a:lumMod val="50000"/>
-                  </a:schemeClr>
-                </a:solidFill>
-                <a:latin typeface="Consolas" panose="020B0609020204030204" pitchFamily="49" charset="0"/>
-                <a:cs typeface="Consolas" panose="020B0609020204030204" pitchFamily="49" charset="0"/>
-              </a:rPr>
-              <a:t>r5</a:t>
-            </a:r>
-            <a:r>
-              <a:rPr lang="en-US" sz="1600" b="1" dirty="0">
-                <a:solidFill>
-                  <a:schemeClr val="bg1">
-                    <a:lumMod val="50000"/>
-                  </a:schemeClr>
-                </a:solidFill>
-                <a:latin typeface="Consolas" panose="020B0609020204030204" pitchFamily="49" charset="0"/>
-                <a:cs typeface="Consolas" panose="020B0609020204030204" pitchFamily="49" charset="0"/>
-              </a:rPr>
-              <a:t> = </a:t>
-            </a:r>
-            <a:r>
-              <a:rPr lang="en-US" sz="1600" b="1" dirty="0" err="1">
-                <a:solidFill>
-                  <a:schemeClr val="bg1">
-                    <a:lumMod val="50000"/>
-                  </a:schemeClr>
-                </a:solidFill>
-                <a:latin typeface="Consolas" panose="020B0609020204030204" pitchFamily="49" charset="0"/>
-                <a:cs typeface="Consolas" panose="020B0609020204030204" pitchFamily="49" charset="0"/>
-              </a:rPr>
-              <a:t>r5</a:t>
-            </a:r>
-            <a:r>
-              <a:rPr lang="en-US" sz="1600" b="1" dirty="0">
-                <a:solidFill>
-                  <a:schemeClr val="bg1">
-                    <a:lumMod val="50000"/>
-                  </a:schemeClr>
-                </a:solidFill>
-                <a:latin typeface="Consolas" panose="020B0609020204030204" pitchFamily="49" charset="0"/>
-                <a:cs typeface="Consolas" panose="020B0609020204030204" pitchFamily="49" charset="0"/>
-              </a:rPr>
-              <a:t> + </a:t>
-            </a:r>
-            <a:r>
-              <a:rPr lang="en-US" sz="1600" b="1" dirty="0" err="1">
-                <a:solidFill>
-                  <a:schemeClr val="bg1">
-                    <a:lumMod val="50000"/>
-                  </a:schemeClr>
-                </a:solidFill>
-                <a:latin typeface="Consolas" panose="020B0609020204030204" pitchFamily="49" charset="0"/>
-                <a:cs typeface="Consolas" panose="020B0609020204030204" pitchFamily="49" charset="0"/>
-              </a:rPr>
-              <a:t>r0</a:t>
-            </a:r>
-            <a:r>
-              <a:rPr lang="en-US" sz="1600" b="1" dirty="0">
-                <a:solidFill>
-                  <a:schemeClr val="bg1">
-                    <a:lumMod val="50000"/>
-                  </a:schemeClr>
-                </a:solidFill>
-                <a:latin typeface="Consolas" panose="020B0609020204030204" pitchFamily="49" charset="0"/>
-                <a:cs typeface="Consolas" panose="020B0609020204030204" pitchFamily="49" charset="0"/>
-              </a:rPr>
-              <a:t> * </a:t>
-            </a:r>
-            <a:r>
-              <a:rPr lang="en-US" sz="1600" b="1" dirty="0" err="1">
-                <a:solidFill>
-                  <a:schemeClr val="bg1">
-                    <a:lumMod val="50000"/>
-                  </a:schemeClr>
-                </a:solidFill>
-                <a:latin typeface="Consolas" panose="020B0609020204030204" pitchFamily="49" charset="0"/>
-                <a:cs typeface="Consolas" panose="020B0609020204030204" pitchFamily="49" charset="0"/>
-              </a:rPr>
-              <a:t>r3</a:t>
-            </a:r>
-            <a:endParaRPr lang="en-US" sz="1600" b="1" dirty="0">
-              <a:solidFill>
-                <a:schemeClr val="bg1">
-                  <a:lumMod val="50000"/>
-                </a:schemeClr>
-              </a:solidFill>
-              <a:latin typeface="Consolas" panose="020B0609020204030204" pitchFamily="49" charset="0"/>
-              <a:cs typeface="Consolas" panose="020B0609020204030204" pitchFamily="49" charset="0"/>
-            </a:endParaRPr>
-          </a:p>
-        </p:txBody>
-      </p:sp>
-      <p:sp>
-        <p:nvSpPr>
-          <p:cNvPr id="5" name="TextBox 4">
+            <a:r>
+              <a:rPr lang="en-US" sz="2000" dirty="0"/>
+              <a:t>Write the assembly code</a:t>
+            </a:r>
+          </a:p>
+        </p:txBody>
+      </p:sp>
+      <p:pic>
+        <p:nvPicPr>
+          <p:cNvPr id="5" name="Picture 4" descr="Diagram, timeline&#10;&#10;Description automatically generated">
             <a:extLst>
               <a:ext uri="{FF2B5EF4-FFF2-40B4-BE49-F238E27FC236}">
-                <a16:creationId xmlns:a16="http://schemas.microsoft.com/office/drawing/2014/main" id="{0D45E53C-60AD-25C3-58B1-487C352241E8}"/>
+                <a16:creationId xmlns:a16="http://schemas.microsoft.com/office/drawing/2014/main" id="{4D38B958-46BB-9D65-5CFE-EF5010B12657}"/>
+              </a:ext>
+            </a:extLst>
+          </p:cNvPr>
+          <p:cNvPicPr>
+            <a:picLocks noChangeAspect="1"/>
+          </p:cNvPicPr>
+          <p:nvPr/>
+        </p:nvPicPr>
+        <p:blipFill>
+          <a:blip r:embed="rId2" cstate="print">
+            <a:extLst>
+              <a:ext uri="{28A0092B-C50C-407E-A947-70E740481C1C}">
+                <a14:useLocalDpi xmlns:a14="http://schemas.microsoft.com/office/drawing/2010/main" val="0"/>
+              </a:ext>
+            </a:extLst>
+          </a:blip>
+          <a:stretch>
+            <a:fillRect/>
+          </a:stretch>
+        </p:blipFill>
+        <p:spPr>
+          <a:xfrm>
+            <a:off x="1828800" y="1219200"/>
+            <a:ext cx="7860206" cy="2295446"/>
+          </a:xfrm>
+          <a:prstGeom prst="rect">
+            <a:avLst/>
+          </a:prstGeom>
+        </p:spPr>
+      </p:pic>
+      <p:sp>
+        <p:nvSpPr>
+          <p:cNvPr id="6" name="TextBox 5">
+            <a:extLst>
+              <a:ext uri="{FF2B5EF4-FFF2-40B4-BE49-F238E27FC236}">
+                <a16:creationId xmlns:a16="http://schemas.microsoft.com/office/drawing/2014/main" id="{80108A63-B80E-2434-483E-2FBAE7FC2285}"/>
               </a:ext>
             </a:extLst>
           </p:cNvPr>
@@ -9852,61 +11591,228 @@
         </p:nvSpPr>
         <p:spPr>
           <a:xfrm>
-            <a:off x="457200" y="3387762"/>
-            <a:ext cx="8229600" cy="2862322"/>
+            <a:off x="7086600" y="1141214"/>
+            <a:ext cx="437940" cy="369332"/>
           </a:xfrm>
           <a:prstGeom prst="rect">
             <a:avLst/>
           </a:prstGeom>
-          <a:solidFill>
-            <a:schemeClr val="bg1">
-              <a:lumMod val="85000"/>
-            </a:schemeClr>
-          </a:solidFill>
+          <a:noFill/>
         </p:spPr>
         <p:txBody>
-          <a:bodyPr wrap="square" rtlCol="0">
+          <a:bodyPr wrap="none" rtlCol="0">
             <a:spAutoFit/>
           </a:bodyPr>
           <a:lstStyle/>
           <a:p>
             <a:r>
-              <a:rPr lang="en-US" dirty="0"/>
-              <a:t>UMULL r4, r5, r0, r2 computes the 64-bit product of the low words and places the low 32 bits in r4 and the high 32 bits in r5, establishing the initial 64-bit accumulator.</a:t>
-            </a:r>
-          </a:p>
-          <a:p>
-            <a:r>
-              <a:rPr lang="en-US" dirty="0"/>
-              <a:t>MLA Multiply Accumulate: MLA Rd, Rn, Rm, Ra computes </a:t>
-            </a:r>
-            <a:r>
-              <a:rPr lang="da-DK" dirty="0"/>
-              <a:t>Rd = (Ra + (Rn × Rm)) mod 2^32. </a:t>
-            </a:r>
-            <a:r>
-              <a:rPr lang="en-US" dirty="0"/>
-              <a:t>Only the least-significant 32 bits of the sum are written to Rd; any higher bits are discarded.</a:t>
-            </a:r>
-          </a:p>
-          <a:p>
-            <a:r>
-              <a:rPr lang="en-US" dirty="0"/>
-              <a:t>MLA r5, r1, r2 adds the cross term r1·r2 (which conceptually belongs at bit position 32) into the high </a:t>
-            </a:r>
-            <a:r>
-              <a:rPr lang="en-US"/>
-              <a:t>half r5</a:t>
-            </a:r>
-          </a:p>
-          <a:p>
-            <a:r>
-              <a:rPr lang="en-US"/>
-              <a:t>MLA </a:t>
-            </a:r>
-            <a:r>
-              <a:rPr lang="en-US" dirty="0"/>
-              <a:t>r5, r0, r3, r5 similarly adds the other cross term r0·r3 into r5, completing the contribution of both cross terms at the correct alignment; overflow beyond 32 bits of r5 is discarded, ignoring the 2^64·(r1·r3) part.</a:t>
+              <a:rPr lang="en-US" b="1" dirty="0">
+                <a:solidFill>
+                  <a:srgbClr val="0000FF"/>
+                </a:solidFill>
+                <a:latin typeface="Consolas" panose="020B0609020204030204" pitchFamily="49" charset="0"/>
+              </a:rPr>
+              <a:t>r0</a:t>
+            </a:r>
+          </a:p>
+        </p:txBody>
+      </p:sp>
+      <p:sp>
+        <p:nvSpPr>
+          <p:cNvPr id="7" name="TextBox 6">
+            <a:extLst>
+              <a:ext uri="{FF2B5EF4-FFF2-40B4-BE49-F238E27FC236}">
+                <a16:creationId xmlns:a16="http://schemas.microsoft.com/office/drawing/2014/main" id="{7E9A29B0-A4A4-F42E-DE4D-0705907E0736}"/>
+              </a:ext>
+            </a:extLst>
+          </p:cNvPr>
+          <p:cNvSpPr txBox="1"/>
+          <p:nvPr/>
+        </p:nvSpPr>
+        <p:spPr>
+          <a:xfrm>
+            <a:off x="3886200" y="1141214"/>
+            <a:ext cx="437940" cy="369332"/>
+          </a:xfrm>
+          <a:prstGeom prst="rect">
+            <a:avLst/>
+          </a:prstGeom>
+          <a:noFill/>
+        </p:spPr>
+        <p:txBody>
+          <a:bodyPr wrap="none" rtlCol="0">
+            <a:spAutoFit/>
+          </a:bodyPr>
+          <a:lstStyle/>
+          <a:p>
+            <a:r>
+              <a:rPr lang="en-US" b="1" dirty="0">
+                <a:solidFill>
+                  <a:srgbClr val="0000FF"/>
+                </a:solidFill>
+                <a:latin typeface="Consolas" panose="020B0609020204030204" pitchFamily="49" charset="0"/>
+              </a:rPr>
+              <a:t>r1</a:t>
+            </a:r>
+          </a:p>
+        </p:txBody>
+      </p:sp>
+      <p:sp>
+        <p:nvSpPr>
+          <p:cNvPr id="8" name="TextBox 7">
+            <a:extLst>
+              <a:ext uri="{FF2B5EF4-FFF2-40B4-BE49-F238E27FC236}">
+                <a16:creationId xmlns:a16="http://schemas.microsoft.com/office/drawing/2014/main" id="{9D375EA0-FFBF-CB2A-26EE-E17CF8A0837C}"/>
+              </a:ext>
+            </a:extLst>
+          </p:cNvPr>
+          <p:cNvSpPr txBox="1"/>
+          <p:nvPr/>
+        </p:nvSpPr>
+        <p:spPr>
+          <a:xfrm>
+            <a:off x="3829260" y="3288268"/>
+            <a:ext cx="437940" cy="369332"/>
+          </a:xfrm>
+          <a:prstGeom prst="rect">
+            <a:avLst/>
+          </a:prstGeom>
+          <a:noFill/>
+        </p:spPr>
+        <p:txBody>
+          <a:bodyPr wrap="none" rtlCol="0">
+            <a:spAutoFit/>
+          </a:bodyPr>
+          <a:lstStyle/>
+          <a:p>
+            <a:r>
+              <a:rPr lang="en-US" b="1" dirty="0">
+                <a:solidFill>
+                  <a:srgbClr val="0000FF"/>
+                </a:solidFill>
+                <a:latin typeface="Consolas" panose="020B0609020204030204" pitchFamily="49" charset="0"/>
+              </a:rPr>
+              <a:t>r1</a:t>
+            </a:r>
+          </a:p>
+        </p:txBody>
+      </p:sp>
+      <p:sp>
+        <p:nvSpPr>
+          <p:cNvPr id="9" name="TextBox 8">
+            <a:extLst>
+              <a:ext uri="{FF2B5EF4-FFF2-40B4-BE49-F238E27FC236}">
+                <a16:creationId xmlns:a16="http://schemas.microsoft.com/office/drawing/2014/main" id="{805B6964-6E28-2AE9-EBB9-5DEFBD660848}"/>
+              </a:ext>
+            </a:extLst>
+          </p:cNvPr>
+          <p:cNvSpPr txBox="1"/>
+          <p:nvPr/>
+        </p:nvSpPr>
+        <p:spPr>
+          <a:xfrm>
+            <a:off x="7086600" y="3288268"/>
+            <a:ext cx="437940" cy="369332"/>
+          </a:xfrm>
+          <a:prstGeom prst="rect">
+            <a:avLst/>
+          </a:prstGeom>
+          <a:noFill/>
+        </p:spPr>
+        <p:txBody>
+          <a:bodyPr wrap="none" rtlCol="0">
+            <a:spAutoFit/>
+          </a:bodyPr>
+          <a:lstStyle/>
+          <a:p>
+            <a:r>
+              <a:rPr lang="en-US" b="1" dirty="0">
+                <a:solidFill>
+                  <a:srgbClr val="0000FF"/>
+                </a:solidFill>
+                <a:latin typeface="Consolas" panose="020B0609020204030204" pitchFamily="49" charset="0"/>
+              </a:rPr>
+              <a:t>r0</a:t>
+            </a:r>
+          </a:p>
+        </p:txBody>
+      </p:sp>
+      <p:sp>
+        <p:nvSpPr>
+          <p:cNvPr id="10" name="TextBox 9">
+            <a:extLst>
+              <a:ext uri="{FF2B5EF4-FFF2-40B4-BE49-F238E27FC236}">
+                <a16:creationId xmlns:a16="http://schemas.microsoft.com/office/drawing/2014/main" id="{37F28818-94A2-F76F-BA07-9224E63D52C3}"/>
+              </a:ext>
+            </a:extLst>
+          </p:cNvPr>
+          <p:cNvSpPr txBox="1"/>
+          <p:nvPr/>
+        </p:nvSpPr>
+        <p:spPr>
+          <a:xfrm>
+            <a:off x="2505323" y="1914882"/>
+            <a:ext cx="437940" cy="369332"/>
+          </a:xfrm>
+          <a:prstGeom prst="rect">
+            <a:avLst/>
+          </a:prstGeom>
+          <a:noFill/>
+        </p:spPr>
+        <p:txBody>
+          <a:bodyPr wrap="none" rtlCol="0">
+            <a:spAutoFit/>
+          </a:bodyPr>
+          <a:lstStyle/>
+          <a:p>
+            <a:r>
+              <a:rPr lang="en-US" b="1" dirty="0">
+                <a:solidFill>
+                  <a:srgbClr val="0000FF"/>
+                </a:solidFill>
+                <a:latin typeface="Consolas" panose="020B0609020204030204" pitchFamily="49" charset="0"/>
+              </a:rPr>
+              <a:t>r1</a:t>
+            </a:r>
+          </a:p>
+        </p:txBody>
+      </p:sp>
+      <p:sp>
+        <p:nvSpPr>
+          <p:cNvPr id="11" name="TextBox 10">
+            <a:extLst>
+              <a:ext uri="{FF2B5EF4-FFF2-40B4-BE49-F238E27FC236}">
+                <a16:creationId xmlns:a16="http://schemas.microsoft.com/office/drawing/2014/main" id="{1F66DCDC-260C-EA34-9282-5EF46AC1E57D}"/>
+              </a:ext>
+            </a:extLst>
+          </p:cNvPr>
+          <p:cNvSpPr txBox="1"/>
+          <p:nvPr/>
+        </p:nvSpPr>
+        <p:spPr>
+          <a:xfrm>
+            <a:off x="5283202" y="1914882"/>
+            <a:ext cx="437940" cy="369332"/>
+          </a:xfrm>
+          <a:prstGeom prst="rect">
+            <a:avLst/>
+          </a:prstGeom>
+          <a:noFill/>
+        </p:spPr>
+        <p:txBody>
+          <a:bodyPr wrap="none" rtlCol="0">
+            <a:spAutoFit/>
+          </a:bodyPr>
+          <a:lstStyle/>
+          <a:p>
+            <a:r>
+              <a:rPr lang="en-US" b="1" dirty="0">
+                <a:solidFill>
+                  <a:srgbClr val="0000FF"/>
+                </a:solidFill>
+                <a:latin typeface="Consolas" panose="020B0609020204030204" pitchFamily="49" charset="0"/>
+              </a:rPr>
+              <a:t>r4</a:t>
             </a:r>
           </a:p>
         </p:txBody>
@@ -9914,7 +11820,7 @@
     </p:spTree>
     <p:extLst>
       <p:ext uri="{BB962C8B-B14F-4D97-AF65-F5344CB8AC3E}">
-        <p14:creationId xmlns:p14="http://schemas.microsoft.com/office/powerpoint/2010/main" val="3638645966"/>
+        <p14:creationId xmlns:p14="http://schemas.microsoft.com/office/powerpoint/2010/main" val="1479121267"/>
       </p:ext>
     </p:extLst>
   </p:cSld>
